--- a/edc_slides/09_current_defenses.pptx
+++ b/edc_slides/09_current_defenses.pptx
@@ -707,480 +707,6 @@
     </a:lvl9pPr>
   </p:notesStyle>
 </p:notesMaster>
-</file>
-
-<file path=ppt/notesSlides/notesSlide1.xml><?xml version="1.0" encoding="utf-8"?>
-<p:notes xmlns:a="http://schemas.openxmlformats.org/drawingml/2006/main" xmlns:r="http://schemas.openxmlformats.org/officeDocument/2006/relationships" xmlns:p="http://schemas.openxmlformats.org/presentationml/2006/main">
-  <p:cSld>
-    <p:spTree>
-      <p:nvGrpSpPr>
-        <p:cNvPr id="1" name=""/>
-        <p:cNvGrpSpPr/>
-        <p:nvPr/>
-      </p:nvGrpSpPr>
-      <p:grpSpPr>
-        <a:xfrm>
-          <a:off x="0" y="0"/>
-          <a:ext cx="0" cy="0"/>
-          <a:chOff x="0" y="0"/>
-          <a:chExt cx="0" cy="0"/>
-        </a:xfrm>
-      </p:grpSpPr>
-      <p:sp>
-        <p:nvSpPr>
-          <p:cNvPr id="2" name="Slide Image Placeholder 1"/>
-          <p:cNvSpPr>
-            <a:spLocks noGrp="1" noRot="1" noChangeAspect="1"/>
-          </p:cNvSpPr>
-          <p:nvPr>
-            <p:ph type="sldImg" idx="2"/>
-          </p:nvPr>
-        </p:nvSpPr>
-        <p:spPr/>
-      </p:sp>
-      <p:sp>
-        <p:nvSpPr>
-          <p:cNvPr id="3" name="Notes Placeholder 2"/>
-          <p:cNvSpPr>
-            <a:spLocks noGrp="1"/>
-          </p:cNvSpPr>
-          <p:nvPr>
-            <p:ph type="body" idx="1"/>
-          </p:nvPr>
-        </p:nvSpPr>
-        <p:spPr/>
-        <p:txBody>
-          <a:bodyPr/>
-          <a:lstStyle/>
-          <a:p>
-            <a:r>
-              <a:t>Set the stage: attacks need two things, a memory corruption and a way to steer control. The classic defenses each target one piece but are individually bypassable, and ROP showed the whole stack of them can be walked past. Today is about defenses that change the game rather than raise it slightly.</a:t>
-            </a:r>
-          </a:p>
-        </p:txBody>
-      </p:sp>
-    </p:spTree>
-  </p:cSld>
-  <p:clrMapOvr>
-    <a:masterClrMapping/>
-  </p:clrMapOvr>
-</p:notes>
-</file>
-
-<file path=ppt/notesSlides/notesSlide2.xml><?xml version="1.0" encoding="utf-8"?>
-<p:notes xmlns:a="http://schemas.openxmlformats.org/drawingml/2006/main" xmlns:r="http://schemas.openxmlformats.org/officeDocument/2006/relationships" xmlns:p="http://schemas.openxmlformats.org/presentationml/2006/main">
-  <p:cSld>
-    <p:spTree>
-      <p:nvGrpSpPr>
-        <p:cNvPr id="1" name=""/>
-        <p:cNvGrpSpPr/>
-        <p:nvPr/>
-      </p:nvGrpSpPr>
-      <p:grpSpPr>
-        <a:xfrm>
-          <a:off x="0" y="0"/>
-          <a:ext cx="0" cy="0"/>
-          <a:chOff x="0" y="0"/>
-          <a:chExt cx="0" cy="0"/>
-        </a:xfrm>
-      </p:grpSpPr>
-      <p:sp>
-        <p:nvSpPr>
-          <p:cNvPr id="2" name="Slide Image Placeholder 1"/>
-          <p:cNvSpPr>
-            <a:spLocks noGrp="1" noRot="1" noChangeAspect="1"/>
-          </p:cNvSpPr>
-          <p:nvPr>
-            <p:ph type="sldImg" idx="2"/>
-          </p:nvPr>
-        </p:nvSpPr>
-        <p:spPr/>
-      </p:sp>
-      <p:sp>
-        <p:nvSpPr>
-          <p:cNvPr id="3" name="Notes Placeholder 2"/>
-          <p:cNvSpPr>
-            <a:spLocks noGrp="1"/>
-          </p:cNvSpPr>
-          <p:nvPr>
-            <p:ph type="body" idx="1"/>
-          </p:nvPr>
-        </p:nvSpPr>
-        <p:spPr/>
-        <p:txBody>
-          <a:bodyPr/>
-          <a:lstStyle/>
-          <a:p>
-            <a:r>
-              <a:t>A map for the lecture. Line 1 removes the vulnerability itself. Line 2 assumes a bug exists and makes turning it into control-flow hijack hard. Line 3 assumes compromise happens and limits what the attacker gains. We take them in the order 2, 1, 3 - from what Lectures 7-8 pointed to.</a:t>
-            </a:r>
-          </a:p>
-        </p:txBody>
-      </p:sp>
-    </p:spTree>
-  </p:cSld>
-  <p:clrMapOvr>
-    <a:masterClrMapping/>
-  </p:clrMapOvr>
-</p:notes>
-</file>
-
-<file path=ppt/notesSlides/notesSlide3.xml><?xml version="1.0" encoding="utf-8"?>
-<p:notes xmlns:a="http://schemas.openxmlformats.org/drawingml/2006/main" xmlns:r="http://schemas.openxmlformats.org/officeDocument/2006/relationships" xmlns:p="http://schemas.openxmlformats.org/presentationml/2006/main">
-  <p:cSld>
-    <p:spTree>
-      <p:nvGrpSpPr>
-        <p:cNvPr id="1" name=""/>
-        <p:cNvGrpSpPr/>
-        <p:nvPr/>
-      </p:nvGrpSpPr>
-      <p:grpSpPr>
-        <a:xfrm>
-          <a:off x="0" y="0"/>
-          <a:ext cx="0" cy="0"/>
-          <a:chOff x="0" y="0"/>
-          <a:chExt cx="0" cy="0"/>
-        </a:xfrm>
-      </p:grpSpPr>
-      <p:sp>
-        <p:nvSpPr>
-          <p:cNvPr id="2" name="Slide Image Placeholder 1"/>
-          <p:cNvSpPr>
-            <a:spLocks noGrp="1" noRot="1" noChangeAspect="1"/>
-          </p:cNvSpPr>
-          <p:nvPr>
-            <p:ph type="sldImg" idx="2"/>
-          </p:nvPr>
-        </p:nvSpPr>
-        <p:spPr/>
-      </p:sp>
-      <p:sp>
-        <p:nvSpPr>
-          <p:cNvPr id="3" name="Notes Placeholder 2"/>
-          <p:cNvSpPr>
-            <a:spLocks noGrp="1"/>
-          </p:cNvSpPr>
-          <p:nvPr>
-            <p:ph type="body" idx="1"/>
-          </p:nvPr>
-        </p:nvSpPr>
-        <p:spPr/>
-        <p:txBody>
-          <a:bodyPr/>
-          <a:lstStyle/>
-          <a:p>
-            <a:r>
-              <a:t>CFI restricts indirect control transfers to a precomputed set of valid targets. Forward-edge CFI covers indirect calls and jumps (through function pointers and vtables). A corrupted pointer that aims at a ROP gadget is no longer in the allowed set, so the check rejects it. Coarse vs fine-grained CFI trades precision for cost; hardware help exists (Intel CET's indirect-branch tracking).</a:t>
-            </a:r>
-          </a:p>
-        </p:txBody>
-      </p:sp>
-    </p:spTree>
-  </p:cSld>
-  <p:clrMapOvr>
-    <a:masterClrMapping/>
-  </p:clrMapOvr>
-</p:notes>
-</file>
-
-<file path=ppt/notesSlides/notesSlide4.xml><?xml version="1.0" encoding="utf-8"?>
-<p:notes xmlns:a="http://schemas.openxmlformats.org/drawingml/2006/main" xmlns:r="http://schemas.openxmlformats.org/officeDocument/2006/relationships" xmlns:p="http://schemas.openxmlformats.org/presentationml/2006/main">
-  <p:cSld>
-    <p:spTree>
-      <p:nvGrpSpPr>
-        <p:cNvPr id="1" name=""/>
-        <p:cNvGrpSpPr/>
-        <p:nvPr/>
-      </p:nvGrpSpPr>
-      <p:grpSpPr>
-        <a:xfrm>
-          <a:off x="0" y="0"/>
-          <a:ext cx="0" cy="0"/>
-          <a:chOff x="0" y="0"/>
-          <a:chExt cx="0" cy="0"/>
-        </a:xfrm>
-      </p:grpSpPr>
-      <p:sp>
-        <p:nvSpPr>
-          <p:cNvPr id="2" name="Slide Image Placeholder 1"/>
-          <p:cNvSpPr>
-            <a:spLocks noGrp="1" noRot="1" noChangeAspect="1"/>
-          </p:cNvSpPr>
-          <p:nvPr>
-            <p:ph type="sldImg" idx="2"/>
-          </p:nvPr>
-        </p:nvSpPr>
-        <p:spPr/>
-      </p:sp>
-      <p:sp>
-        <p:nvSpPr>
-          <p:cNvPr id="3" name="Notes Placeholder 2"/>
-          <p:cNvSpPr>
-            <a:spLocks noGrp="1"/>
-          </p:cNvSpPr>
-          <p:nvPr>
-            <p:ph type="body" idx="1"/>
-          </p:nvPr>
-        </p:nvSpPr>
-        <p:spPr/>
-        <p:txBody>
-          <a:bodyPr/>
-          <a:lstStyle/>
-          <a:p>
-            <a:r>
-              <a:t>Return addresses are the backward edge of control flow and the classic overflow target. A shadow stack stores a protected duplicate of each return address that ordinary writes cannot reach. On function return the CPU (or compiler) checks the real return address against the shadow copy; any overwrite diverges and the program is stopped. Intel CET implements this in hardware.</a:t>
-            </a:r>
-          </a:p>
-        </p:txBody>
-      </p:sp>
-    </p:spTree>
-  </p:cSld>
-  <p:clrMapOvr>
-    <a:masterClrMapping/>
-  </p:clrMapOvr>
-</p:notes>
-</file>
-
-<file path=ppt/notesSlides/notesSlide5.xml><?xml version="1.0" encoding="utf-8"?>
-<p:notes xmlns:a="http://schemas.openxmlformats.org/drawingml/2006/main" xmlns:r="http://schemas.openxmlformats.org/officeDocument/2006/relationships" xmlns:p="http://schemas.openxmlformats.org/presentationml/2006/main">
-  <p:cSld>
-    <p:spTree>
-      <p:nvGrpSpPr>
-        <p:cNvPr id="1" name=""/>
-        <p:cNvGrpSpPr/>
-        <p:nvPr/>
-      </p:nvGrpSpPr>
-      <p:grpSpPr>
-        <a:xfrm>
-          <a:off x="0" y="0"/>
-          <a:ext cx="0" cy="0"/>
-          <a:chOff x="0" y="0"/>
-          <a:chExt cx="0" cy="0"/>
-        </a:xfrm>
-      </p:grpSpPr>
-      <p:sp>
-        <p:nvSpPr>
-          <p:cNvPr id="2" name="Slide Image Placeholder 1"/>
-          <p:cNvSpPr>
-            <a:spLocks noGrp="1" noRot="1" noChangeAspect="1"/>
-          </p:cNvSpPr>
-          <p:nvPr>
-            <p:ph type="sldImg" idx="2"/>
-          </p:nvPr>
-        </p:nvSpPr>
-        <p:spPr>
-          <a:xfrm>
-            <a:off x="-476250" y="685800"/>
-            <a:ext cx="6096000" cy="3429000"/>
-          </a:xfrm>
-        </p:spPr>
-      </p:sp>
-      <p:sp>
-        <p:nvSpPr>
-          <p:cNvPr id="3" name="Notes Placeholder 2"/>
-          <p:cNvSpPr>
-            <a:spLocks noGrp="1"/>
-          </p:cNvSpPr>
-          <p:nvPr>
-            <p:ph type="body" idx="1"/>
-          </p:nvPr>
-        </p:nvSpPr>
-        <p:spPr/>
-        <p:txBody>
-          <a:bodyPr/>
-          <a:lstStyle/>
-          <a:p>
-            <a:r>
-              <a:t>ARM Pointer Authentication adds a cryptographic signature in a pointer's unused high bits, keyed per process. Instructions sign a pointer (e.g. the return address, PACIASP) and later authenticate it (AUTIASP) before use. An attacker who corrupts the pointer cannot produce the matching signature, so authentication fails and the program traps. Apple and recent ARM chips ship this.</a:t>
-            </a:r>
-          </a:p>
-        </p:txBody>
-      </p:sp>
-    </p:spTree>
-  </p:cSld>
-  <p:clrMapOvr>
-    <a:masterClrMapping/>
-  </p:clrMapOvr>
-</p:notes>
-</file>
-
-<file path=ppt/notesSlides/notesSlide6.xml><?xml version="1.0" encoding="utf-8"?>
-<p:notes xmlns:a="http://schemas.openxmlformats.org/drawingml/2006/main" xmlns:r="http://schemas.openxmlformats.org/officeDocument/2006/relationships" xmlns:p="http://schemas.openxmlformats.org/presentationml/2006/main">
-  <p:cSld>
-    <p:spTree>
-      <p:nvGrpSpPr>
-        <p:cNvPr id="1" name=""/>
-        <p:cNvGrpSpPr/>
-        <p:nvPr/>
-      </p:nvGrpSpPr>
-      <p:grpSpPr>
-        <a:xfrm>
-          <a:off x="0" y="0"/>
-          <a:ext cx="0" cy="0"/>
-          <a:chOff x="0" y="0"/>
-          <a:chExt cx="0" cy="0"/>
-        </a:xfrm>
-      </p:grpSpPr>
-      <p:sp>
-        <p:nvSpPr>
-          <p:cNvPr id="2" name="Slide Image Placeholder 1"/>
-          <p:cNvSpPr>
-            <a:spLocks noGrp="1" noRot="1" noChangeAspect="1"/>
-          </p:cNvSpPr>
-          <p:nvPr>
-            <p:ph type="sldImg" idx="2"/>
-          </p:nvPr>
-        </p:nvSpPr>
-        <p:spPr/>
-      </p:sp>
-      <p:sp>
-        <p:nvSpPr>
-          <p:cNvPr id="3" name="Notes Placeholder 2"/>
-          <p:cNvSpPr>
-            <a:spLocks noGrp="1"/>
-          </p:cNvSpPr>
-          <p:nvPr>
-            <p:ph type="body" idx="1"/>
-          </p:nvPr>
-        </p:nvSpPr>
-        <p:spPr/>
-        <p:txBody>
-          <a:bodyPr/>
-          <a:lstStyle/>
-          <a:p>
-            <a:r>
-              <a:t>The majority of critical vulnerabilities in large C/C++ codebases are memory-safety issues. Memory-safe languages remove the entire class: Rust enforces ownership and borrowing at compile time and bounds-checks indexing at runtime, turning what would be silent corruption into a clean panic. National and industry guidance now recommends memory-safe languages for new code; the hard part is the enormous base of existing C/C++.</a:t>
-            </a:r>
-          </a:p>
-        </p:txBody>
-      </p:sp>
-    </p:spTree>
-  </p:cSld>
-  <p:clrMapOvr>
-    <a:masterClrMapping/>
-  </p:clrMapOvr>
-</p:notes>
-</file>
-
-<file path=ppt/notesSlides/notesSlide7.xml><?xml version="1.0" encoding="utf-8"?>
-<p:notes xmlns:a="http://schemas.openxmlformats.org/drawingml/2006/main" xmlns:r="http://schemas.openxmlformats.org/officeDocument/2006/relationships" xmlns:p="http://schemas.openxmlformats.org/presentationml/2006/main">
-  <p:cSld>
-    <p:spTree>
-      <p:nvGrpSpPr>
-        <p:cNvPr id="1" name=""/>
-        <p:cNvGrpSpPr/>
-        <p:nvPr/>
-      </p:nvGrpSpPr>
-      <p:grpSpPr>
-        <a:xfrm>
-          <a:off x="0" y="0"/>
-          <a:ext cx="0" cy="0"/>
-          <a:chOff x="0" y="0"/>
-          <a:chExt cx="0" cy="0"/>
-        </a:xfrm>
-      </p:grpSpPr>
-      <p:sp>
-        <p:nvSpPr>
-          <p:cNvPr id="2" name="Slide Image Placeholder 1"/>
-          <p:cNvSpPr>
-            <a:spLocks noGrp="1" noRot="1" noChangeAspect="1"/>
-          </p:cNvSpPr>
-          <p:nvPr>
-            <p:ph type="sldImg" idx="2"/>
-          </p:nvPr>
-        </p:nvSpPr>
-        <p:spPr>
-          <a:xfrm>
-            <a:off x="-476250" y="685800"/>
-            <a:ext cx="6096000" cy="3429000"/>
-          </a:xfrm>
-        </p:spPr>
-      </p:sp>
-      <p:sp>
-        <p:nvSpPr>
-          <p:cNvPr id="3" name="Notes Placeholder 2"/>
-          <p:cNvSpPr>
-            <a:spLocks noGrp="1"/>
-          </p:cNvSpPr>
-          <p:nvPr>
-            <p:ph type="body" idx="1"/>
-          </p:nvPr>
-        </p:nvSpPr>
-        <p:spPr/>
-        <p:txBody>
-          <a:bodyPr/>
-          <a:lstStyle/>
-          <a:p>
-            <a:r>
-              <a:t>Where C and C++ must stay, layer hardening on top. _FORTIFY_SOURCE adds bounds checks to common libc calls, -fstack-protector-strong extends canaries to far more functions, stack-clash protection stops stack/heap collision tricks, and -fcf-protection turns on CET's CFI and shadow stack. Hardened allocators add heap integrity checks. AddressSanitizer and UBSan find the bugs during testing so they never ship.</a:t>
-            </a:r>
-          </a:p>
-        </p:txBody>
-      </p:sp>
-    </p:spTree>
-  </p:cSld>
-  <p:clrMapOvr>
-    <a:masterClrMapping/>
-  </p:clrMapOvr>
-</p:notes>
-</file>
-
-<file path=ppt/notesSlides/notesSlide8.xml><?xml version="1.0" encoding="utf-8"?>
-<p:notes xmlns:a="http://schemas.openxmlformats.org/drawingml/2006/main" xmlns:r="http://schemas.openxmlformats.org/officeDocument/2006/relationships" xmlns:p="http://schemas.openxmlformats.org/presentationml/2006/main">
-  <p:cSld>
-    <p:spTree>
-      <p:nvGrpSpPr>
-        <p:cNvPr id="1" name=""/>
-        <p:cNvGrpSpPr/>
-        <p:nvPr/>
-      </p:nvGrpSpPr>
-      <p:grpSpPr>
-        <a:xfrm>
-          <a:off x="0" y="0"/>
-          <a:ext cx="0" cy="0"/>
-          <a:chOff x="0" y="0"/>
-          <a:chExt cx="0" cy="0"/>
-        </a:xfrm>
-      </p:grpSpPr>
-      <p:sp>
-        <p:nvSpPr>
-          <p:cNvPr id="2" name="Slide Image Placeholder 1"/>
-          <p:cNvSpPr>
-            <a:spLocks noGrp="1" noRot="1" noChangeAspect="1"/>
-          </p:cNvSpPr>
-          <p:nvPr>
-            <p:ph type="sldImg" idx="2"/>
-          </p:nvPr>
-        </p:nvSpPr>
-        <p:spPr/>
-      </p:sp>
-      <p:sp>
-        <p:nvSpPr>
-          <p:cNvPr id="3" name="Notes Placeholder 2"/>
-          <p:cNvSpPr>
-            <a:spLocks noGrp="1"/>
-          </p:cNvSpPr>
-          <p:nvPr>
-            <p:ph type="body" idx="1"/>
-          </p:nvPr>
-        </p:nvSpPr>
-        <p:spPr/>
-        <p:txBody>
-          <a:bodyPr/>
-          <a:lstStyle/>
-          <a:p>
-            <a:r>
-              <a:t>Least privilege and sandboxing assume the attacker wins somewhere and limit the blast radius. Privilege separation splits a program so the exposed part runs with almost no rights; seccomp filters the syscalls a process may make; containers and OS isolation confine it further. Browsers are the model: each renderer is a locked-down sandbox, so a renderer bug does not own the machine.</a:t>
-            </a:r>
-          </a:p>
-        </p:txBody>
-      </p:sp>
-    </p:spTree>
-  </p:cSld>
-  <p:clrMapOvr>
-    <a:masterClrMapping/>
-  </p:clrMapOvr>
-</p:notes>
 </file>
 
 <file path=ppt/slideLayouts/slideLayout1.xml><?xml version="1.0" encoding="utf-8"?>
@@ -4801,16 +4327,13 @@
         </p:nvSpPr>
         <p:spPr/>
         <p:txBody>
-          <a:bodyPr>
-            <a:normAutofit lnSpcReduction="10000"/>
-          </a:bodyPr>
+          <a:bodyPr/>
           <a:lstStyle/>
           <a:p>
             <a:pPr marL="0" indent="0" algn="l">
               <a:buNone/>
             </a:pPr>
             <a:r>
-              <a:rPr dirty="0"/>
               <a:t>Emiliano De Cristofaro</a:t>
             </a:r>
           </a:p>
@@ -4819,7 +4342,6 @@
               <a:buNone/>
             </a:pPr>
             <a:r>
-              <a:rPr dirty="0"/>
               <a:t>University of California, Riverside</a:t>
             </a:r>
           </a:p>
@@ -4828,16 +4350,7 @@
               <a:buNone/>
             </a:pPr>
             <a:r>
-              <a:rPr dirty="0"/>
-              <a:t>Fall 2026  |  </a:t>
-            </a:r>
-            <a:r>
-              <a:rPr lang="en-US" dirty="0"/>
-              <a:t>Wednesday, Oct 21 / </a:t>
-            </a:r>
-            <a:r>
-              <a:rPr dirty="0"/>
-              <a:t>Monday, Oct 26</a:t>
+              <a:t>Fall 2026  |  Monday, October 26</a:t>
             </a:r>
           </a:p>
         </p:txBody>
@@ -4901,7 +4414,12 @@
             <p:ph type="title"/>
           </p:nvPr>
         </p:nvSpPr>
-        <p:spPr/>
+        <p:spPr>
+          <a:xfrm>
+            <a:off x="534300" y="224048"/>
+            <a:ext cx="8046720" cy="685800"/>
+          </a:xfrm>
+        </p:spPr>
         <p:txBody>
           <a:bodyPr wrap="square"/>
           <a:lstStyle/>
@@ -4914,7 +4432,7 @@
                 </a:solidFill>
                 <a:latin typeface="Arial"/>
               </a:rPr>
-              <a:t>Memory-Safe Languages</a:t>
+              <a:t>Control-Flow Integrity (CFI)</a:t>
             </a:r>
           </a:p>
         </p:txBody>
@@ -4929,7 +4447,12 @@
             <p:ph type="body" idx="1"/>
           </p:nvPr>
         </p:nvSpPr>
-        <p:spPr/>
+        <p:spPr>
+          <a:xfrm>
+            <a:off x="420000" y="1298448"/>
+            <a:ext cx="8046720" cy="3383280"/>
+          </a:xfrm>
+        </p:spPr>
         <p:txBody>
           <a:bodyPr wrap="square" lIns="0" tIns="0" rIns="0" bIns="0"/>
           <a:lstStyle/>
@@ -4941,7 +4464,7 @@
                 </a:solidFill>
                 <a:latin typeface="Arial"/>
               </a:rPr>
-              <a:t>Most exploited bugs are memory-safety errors</a:t>
+              <a:t>Indirect calls, jumps, and returns have targets computed at runtime</a:t>
             </a:r>
           </a:p>
           <a:p>
@@ -4952,7 +4475,7 @@
                 </a:solidFill>
                 <a:latin typeface="Arial"/>
               </a:rPr>
-              <a:t>Rust, Go, Java make these impossible by construction</a:t>
+              <a:t>CFI restricts each to only the targets the program code legally allows</a:t>
             </a:r>
           </a:p>
           <a:p>
@@ -4963,18 +4486,7 @@
                 </a:solidFill>
                 <a:latin typeface="Arial"/>
               </a:rPr>
-              <a:t>Rust: compile-time ownership, bounds-checked indexing</a:t>
-            </a:r>
-          </a:p>
-          <a:p>
-            <a:r>
-              <a:rPr sz="2000" b="0" i="0">
-                <a:solidFill>
-                  <a:srgbClr val="202020"/>
-                </a:solidFill>
-                <a:latin typeface="Arial"/>
-              </a:rPr>
-              <a:t>Guidance now pushes new code to memory-safe languages</a:t>
+              <a:t>An overwritten pointer now aims outside the allowed set, so the call is refused</a:t>
             </a:r>
           </a:p>
         </p:txBody>
@@ -5032,95 +4544,25 @@
       </p:sp>
       <p:sp>
         <p:nvSpPr>
-          <p:cNvPr id="42" name="TextBox 41"/>
-          <p:cNvSpPr txBox="1"/>
+          <p:cNvPr id="42" name="Rectangle 41"/>
+          <p:cNvSpPr/>
           <p:nvPr/>
         </p:nvSpPr>
         <p:spPr>
           <a:xfrm>
-            <a:off x="900000" y="3590000"/>
-            <a:ext cx="3300000" cy="230000"/>
+            <a:off x="600000" y="3500000"/>
+            <a:ext cx="2100000" cy="520000"/>
           </a:xfrm>
           <a:prstGeom prst="rect">
             <a:avLst/>
           </a:prstGeom>
-          <a:noFill/>
-        </p:spPr>
-        <p:txBody>
-          <a:bodyPr wrap="square" lIns="0" tIns="0" rIns="0" bIns="0" anchor="t">
-            <a:spAutoFit/>
-          </a:bodyPr>
-          <a:lstStyle/>
-          <a:p>
-            <a:pPr algn="l"/>
-            <a:r>
-              <a:rPr sz="1000" b="1" i="0">
-                <a:solidFill>
-                  <a:srgbClr val="C0392B"/>
-                </a:solidFill>
-                <a:latin typeface="Arial"/>
-              </a:rPr>
-              <a:t>C: silent corruption</a:t>
-            </a:r>
-          </a:p>
-        </p:txBody>
-      </p:sp>
-      <p:sp>
-        <p:nvSpPr>
-          <p:cNvPr id="43" name="TextBox 42"/>
-          <p:cNvSpPr txBox="1"/>
-          <p:nvPr/>
-        </p:nvSpPr>
-        <p:spPr>
-          <a:xfrm>
-            <a:off x="4500000" y="3590000"/>
-            <a:ext cx="3400000" cy="230000"/>
-          </a:xfrm>
-          <a:prstGeom prst="rect">
-            <a:avLst/>
-          </a:prstGeom>
-          <a:noFill/>
-        </p:spPr>
-        <p:txBody>
-          <a:bodyPr wrap="square" lIns="0" tIns="0" rIns="0" bIns="0" anchor="t">
-            <a:spAutoFit/>
-          </a:bodyPr>
-          <a:lstStyle/>
-          <a:p>
-            <a:pPr algn="l"/>
-            <a:r>
-              <a:rPr sz="1000" b="1" i="0">
-                <a:solidFill>
-                  <a:srgbClr val="2E7D32"/>
-                </a:solidFill>
-                <a:latin typeface="Arial"/>
-              </a:rPr>
-              <a:t>Rust: safe by construction</a:t>
-            </a:r>
-          </a:p>
-        </p:txBody>
-      </p:sp>
-      <p:sp>
-        <p:nvSpPr>
-          <p:cNvPr id="44" name="Rounded Rectangle 43"/>
-          <p:cNvSpPr/>
-          <p:nvPr/>
-        </p:nvSpPr>
-        <p:spPr>
-          <a:xfrm>
-            <a:off x="900000" y="3850000"/>
-            <a:ext cx="3300000" cy="820000"/>
-          </a:xfrm>
-          <a:prstGeom prst="roundRect">
-            <a:avLst>
-              <a:gd name="adj" fmla="val 5000"/>
-            </a:avLst>
-          </a:prstGeom>
           <a:solidFill>
-            <a:srgbClr val="1E2430"/>
+            <a:srgbClr val="D6E4F0"/>
           </a:solidFill>
-          <a:ln>
-            <a:noFill/>
+          <a:ln w="12700">
+            <a:solidFill>
+              <a:srgbClr val="555555"/>
+            </a:solidFill>
           </a:ln>
           <a:effectLst/>
         </p:spPr>
@@ -5139,111 +4581,43 @@
           </a:fontRef>
         </p:style>
         <p:txBody>
-          <a:bodyPr wrap="none" lIns="109728" tIns="68580" rIns="54864" bIns="68580" rtlCol="0" anchor="t"/>
+          <a:bodyPr wrap="square" lIns="45720" tIns="27432" rIns="45720" bIns="27432" rtlCol="0" anchor="ctr"/>
           <a:lstStyle/>
           <a:p>
-            <a:pPr algn="ctr">
-              <a:lnSpc>
-                <a:spcPct val="100000"/>
-              </a:lnSpc>
-              <a:spcBef>
-                <a:spcPts val="0"/>
-              </a:spcBef>
-              <a:spcAft>
-                <a:spcPts val="0"/>
-              </a:spcAft>
-            </a:pPr>
-            <a:r>
-              <a:rPr sz="1050" b="0" i="0">
-                <a:solidFill>
-                  <a:srgbClr val="4EC9B0"/>
+            <a:pPr algn="ctr"/>
+            <a:r>
+              <a:rPr sz="1100" b="0" i="0">
+                <a:solidFill>
+                  <a:srgbClr val="202020"/>
                 </a:solidFill>
                 <a:latin typeface="Courier New"/>
               </a:rPr>
-              <a:t>char</a:t>
-            </a:r>
-            <a:r>
-              <a:rPr sz="1050" b="0" i="0">
-                <a:solidFill>
-                  <a:srgbClr val="D4D4D4"/>
-                </a:solidFill>
-                <a:latin typeface="Courier New"/>
-              </a:rPr>
-              <a:t> buf[</a:t>
-            </a:r>
-            <a:r>
-              <a:rPr sz="1050" b="0" i="0">
-                <a:solidFill>
-                  <a:srgbClr val="B5CEA8"/>
-                </a:solidFill>
-                <a:latin typeface="Courier New"/>
-              </a:rPr>
-              <a:t>8</a:t>
-            </a:r>
-            <a:r>
-              <a:rPr sz="1050" b="0" i="0">
-                <a:solidFill>
-                  <a:srgbClr val="D4D4D4"/>
-                </a:solidFill>
-                <a:latin typeface="Courier New"/>
-              </a:rPr>
-              <a:t>];</a:t>
-            </a:r>
-          </a:p>
-          <a:p>
-            <a:pPr>
-              <a:lnSpc>
-                <a:spcPct val="100000"/>
-              </a:lnSpc>
-              <a:spcBef>
-                <a:spcPts val="0"/>
-              </a:spcBef>
-              <a:spcAft>
-                <a:spcPts val="0"/>
-              </a:spcAft>
-            </a:pPr>
-            <a:r>
-              <a:rPr sz="1050" b="0" i="0">
-                <a:solidFill>
-                  <a:srgbClr val="D4D4D4"/>
-                </a:solidFill>
-                <a:latin typeface="Courier New"/>
-              </a:rPr>
-              <a:t>strcpy(buf, input);   </a:t>
-            </a:r>
-            <a:r>
-              <a:rPr sz="1050" b="0" i="0">
-                <a:solidFill>
-                  <a:srgbClr val="6A9955"/>
-                </a:solidFill>
-                <a:latin typeface="Courier New"/>
-              </a:rPr>
-              <a:t>// no check, UB</a:t>
-            </a:r>
-          </a:p>
-        </p:txBody>
-      </p:sp>
-      <p:sp>
-        <p:nvSpPr>
-          <p:cNvPr id="45" name="Rounded Rectangle 44"/>
+              <a:t>indirect call  (*fp)()</a:t>
+            </a:r>
+          </a:p>
+        </p:txBody>
+      </p:sp>
+      <p:sp>
+        <p:nvSpPr>
+          <p:cNvPr id="43" name="Rectangle 42"/>
           <p:cNvSpPr/>
           <p:nvPr/>
         </p:nvSpPr>
         <p:spPr>
           <a:xfrm>
-            <a:off x="4500000" y="3850000"/>
-            <a:ext cx="3400000" cy="820000"/>
-          </a:xfrm>
-          <a:prstGeom prst="roundRect">
-            <a:avLst>
-              <a:gd name="adj" fmla="val 5000"/>
-            </a:avLst>
+            <a:off x="3700000" y="3250000"/>
+            <a:ext cx="1700000" cy="320000"/>
+          </a:xfrm>
+          <a:prstGeom prst="rect">
+            <a:avLst/>
           </a:prstGeom>
           <a:solidFill>
-            <a:srgbClr val="1E2430"/>
+            <a:srgbClr val="DDEEDD"/>
           </a:solidFill>
-          <a:ln>
-            <a:noFill/>
+          <a:ln w="12700">
+            <a:solidFill>
+              <a:srgbClr val="555555"/>
+            </a:solidFill>
           </a:ln>
           <a:effectLst/>
         </p:spPr>
@@ -5262,50 +4636,309 @@
           </a:fontRef>
         </p:style>
         <p:txBody>
-          <a:bodyPr wrap="none" lIns="109728" tIns="68580" rIns="54864" bIns="68580" rtlCol="0" anchor="t"/>
+          <a:bodyPr wrap="square" lIns="45720" tIns="27432" rIns="45720" bIns="27432" rtlCol="0" anchor="ctr"/>
           <a:lstStyle/>
           <a:p>
-            <a:pPr algn="ctr">
-              <a:lnSpc>
-                <a:spcPct val="100000"/>
-              </a:lnSpc>
-              <a:spcBef>
-                <a:spcPts val="0"/>
-              </a:spcBef>
-              <a:spcAft>
-                <a:spcPts val="0"/>
-              </a:spcAft>
-            </a:pPr>
-            <a:r>
-              <a:rPr sz="1050" b="0" i="0">
-                <a:solidFill>
-                  <a:srgbClr val="D4D4D4"/>
-                </a:solidFill>
-                <a:latin typeface="Courier New"/>
-              </a:rPr>
-              <a:t>let b = &amp;arr[i];</a:t>
-            </a:r>
-          </a:p>
-          <a:p>
-            <a:pPr>
-              <a:lnSpc>
-                <a:spcPct val="100000"/>
-              </a:lnSpc>
-              <a:spcBef>
-                <a:spcPts val="0"/>
-              </a:spcBef>
-              <a:spcAft>
-                <a:spcPts val="0"/>
-              </a:spcAft>
-            </a:pPr>
-            <a:r>
-              <a:rPr sz="1050" b="0" i="0">
-                <a:solidFill>
-                  <a:srgbClr val="6A9955"/>
-                </a:solidFill>
-                <a:latin typeface="Courier New"/>
-              </a:rPr>
-              <a:t>// panics, never corrupts</a:t>
+            <a:pPr algn="ctr"/>
+            <a:r>
+              <a:rPr sz="1000" b="0" i="0">
+                <a:solidFill>
+                  <a:srgbClr val="202020"/>
+                </a:solidFill>
+                <a:latin typeface="Arial"/>
+              </a:rPr>
+              <a:t>handler A</a:t>
+            </a:r>
+          </a:p>
+        </p:txBody>
+      </p:sp>
+      <p:sp>
+        <p:nvSpPr>
+          <p:cNvPr id="44" name="Rectangle 43"/>
+          <p:cNvSpPr/>
+          <p:nvPr/>
+        </p:nvSpPr>
+        <p:spPr>
+          <a:xfrm>
+            <a:off x="3700000" y="3630000"/>
+            <a:ext cx="1700000" cy="320000"/>
+          </a:xfrm>
+          <a:prstGeom prst="rect">
+            <a:avLst/>
+          </a:prstGeom>
+          <a:solidFill>
+            <a:srgbClr val="DDEEDD"/>
+          </a:solidFill>
+          <a:ln w="12700">
+            <a:solidFill>
+              <a:srgbClr val="555555"/>
+            </a:solidFill>
+          </a:ln>
+          <a:effectLst/>
+        </p:spPr>
+        <p:style>
+          <a:lnRef idx="1">
+            <a:schemeClr val="accent1"/>
+          </a:lnRef>
+          <a:fillRef idx="3">
+            <a:schemeClr val="accent1"/>
+          </a:fillRef>
+          <a:effectRef idx="2">
+            <a:schemeClr val="accent1"/>
+          </a:effectRef>
+          <a:fontRef idx="minor">
+            <a:schemeClr val="lt1"/>
+          </a:fontRef>
+        </p:style>
+        <p:txBody>
+          <a:bodyPr wrap="square" lIns="45720" tIns="27432" rIns="45720" bIns="27432" rtlCol="0" anchor="ctr"/>
+          <a:lstStyle/>
+          <a:p>
+            <a:pPr algn="ctr"/>
+            <a:r>
+              <a:rPr sz="1000" b="0" i="0">
+                <a:solidFill>
+                  <a:srgbClr val="202020"/>
+                </a:solidFill>
+                <a:latin typeface="Arial"/>
+              </a:rPr>
+              <a:t>handler B</a:t>
+            </a:r>
+          </a:p>
+        </p:txBody>
+      </p:sp>
+      <p:cxnSp>
+        <p:nvCxnSpPr>
+          <p:cNvPr id="45" name="Connector 44"/>
+          <p:cNvCxnSpPr/>
+          <p:nvPr/>
+        </p:nvCxnSpPr>
+        <p:spPr>
+          <a:xfrm flipV="1">
+            <a:off x="2700000" y="3410000"/>
+            <a:ext cx="1000000" cy="270000"/>
+          </a:xfrm>
+          <a:prstGeom prst="bentConnector3">
+            <a:avLst/>
+          </a:prstGeom>
+          <a:ln w="22225">
+            <a:solidFill>
+              <a:srgbClr val="2E7D32"/>
+            </a:solidFill>
+            <a:tailEnd type="triangle" w="med" len="med"/>
+          </a:ln>
+          <a:effectLst/>
+        </p:spPr>
+        <p:style>
+          <a:lnRef idx="2">
+            <a:schemeClr val="accent1"/>
+          </a:lnRef>
+          <a:fillRef idx="0">
+            <a:schemeClr val="accent1"/>
+          </a:fillRef>
+          <a:effectRef idx="1">
+            <a:schemeClr val="accent1"/>
+          </a:effectRef>
+          <a:fontRef idx="minor">
+            <a:schemeClr val="tx1"/>
+          </a:fontRef>
+        </p:style>
+      </p:cxnSp>
+      <p:cxnSp>
+        <p:nvCxnSpPr>
+          <p:cNvPr id="46" name="Connector 45"/>
+          <p:cNvCxnSpPr/>
+          <p:nvPr/>
+        </p:nvCxnSpPr>
+        <p:spPr>
+          <a:xfrm flipV="1">
+            <a:off x="2700000" y="3790000"/>
+            <a:ext cx="1000000" cy="10000"/>
+          </a:xfrm>
+          <a:prstGeom prst="bentConnector3">
+            <a:avLst/>
+          </a:prstGeom>
+          <a:ln w="22225">
+            <a:solidFill>
+              <a:srgbClr val="2E7D32"/>
+            </a:solidFill>
+            <a:tailEnd type="triangle" w="med" len="med"/>
+          </a:ln>
+          <a:effectLst/>
+        </p:spPr>
+        <p:style>
+          <a:lnRef idx="2">
+            <a:schemeClr val="accent1"/>
+          </a:lnRef>
+          <a:fillRef idx="0">
+            <a:schemeClr val="accent1"/>
+          </a:fillRef>
+          <a:effectRef idx="1">
+            <a:schemeClr val="accent1"/>
+          </a:effectRef>
+          <a:fontRef idx="minor">
+            <a:schemeClr val="tx1"/>
+          </a:fontRef>
+        </p:style>
+      </p:cxnSp>
+      <p:sp>
+        <p:nvSpPr>
+          <p:cNvPr id="47" name="TextBox 46"/>
+          <p:cNvSpPr txBox="1"/>
+          <p:nvPr/>
+        </p:nvSpPr>
+        <p:spPr>
+          <a:xfrm>
+            <a:off x="3700000" y="3010000"/>
+            <a:ext cx="2600000" cy="230000"/>
+          </a:xfrm>
+          <a:prstGeom prst="rect">
+            <a:avLst/>
+          </a:prstGeom>
+          <a:noFill/>
+        </p:spPr>
+        <p:txBody>
+          <a:bodyPr wrap="square" lIns="0" tIns="0" rIns="0" bIns="0" anchor="t">
+            <a:spAutoFit/>
+          </a:bodyPr>
+          <a:lstStyle/>
+          <a:p>
+            <a:pPr algn="l"/>
+            <a:r>
+              <a:rPr sz="1000" b="0" i="1">
+                <a:solidFill>
+                  <a:srgbClr val="2E7D32"/>
+                </a:solidFill>
+                <a:latin typeface="Arial"/>
+              </a:rPr>
+              <a:t>allowed target set</a:t>
+            </a:r>
+          </a:p>
+        </p:txBody>
+      </p:sp>
+      <p:sp>
+        <p:nvSpPr>
+          <p:cNvPr id="48" name="Rectangle 47"/>
+          <p:cNvSpPr/>
+          <p:nvPr/>
+        </p:nvSpPr>
+        <p:spPr>
+          <a:xfrm>
+            <a:off x="3700000" y="4150000"/>
+            <a:ext cx="1850000" cy="340000"/>
+          </a:xfrm>
+          <a:prstGeom prst="rect">
+            <a:avLst/>
+          </a:prstGeom>
+          <a:solidFill>
+            <a:srgbClr val="F6D8C4"/>
+          </a:solidFill>
+          <a:ln w="12700">
+            <a:solidFill>
+              <a:srgbClr val="555555"/>
+            </a:solidFill>
+          </a:ln>
+          <a:effectLst/>
+        </p:spPr>
+        <p:style>
+          <a:lnRef idx="1">
+            <a:schemeClr val="accent1"/>
+          </a:lnRef>
+          <a:fillRef idx="3">
+            <a:schemeClr val="accent1"/>
+          </a:fillRef>
+          <a:effectRef idx="2">
+            <a:schemeClr val="accent1"/>
+          </a:effectRef>
+          <a:fontRef idx="minor">
+            <a:schemeClr val="lt1"/>
+          </a:fontRef>
+        </p:style>
+        <p:txBody>
+          <a:bodyPr wrap="square" lIns="45720" tIns="27432" rIns="45720" bIns="27432" rtlCol="0" anchor="ctr"/>
+          <a:lstStyle/>
+          <a:p>
+            <a:pPr algn="ctr"/>
+            <a:r>
+              <a:rPr sz="1000" b="0" i="0">
+                <a:solidFill>
+                  <a:srgbClr val="202020"/>
+                </a:solidFill>
+                <a:latin typeface="Arial"/>
+              </a:rPr>
+              <a:t>attacker's gadget</a:t>
+            </a:r>
+          </a:p>
+        </p:txBody>
+      </p:sp>
+      <p:cxnSp>
+        <p:nvCxnSpPr>
+          <p:cNvPr id="49" name="Connector 48"/>
+          <p:cNvCxnSpPr/>
+          <p:nvPr/>
+        </p:nvCxnSpPr>
+        <p:spPr>
+          <a:xfrm>
+            <a:off x="2700000" y="3920000"/>
+            <a:ext cx="1000000" cy="380000"/>
+          </a:xfrm>
+          <a:prstGeom prst="bentConnector3">
+            <a:avLst/>
+          </a:prstGeom>
+          <a:ln w="25400">
+            <a:solidFill>
+              <a:srgbClr val="C0392B"/>
+            </a:solidFill>
+            <a:tailEnd type="triangle" w="med" len="med"/>
+          </a:ln>
+          <a:effectLst/>
+        </p:spPr>
+        <p:style>
+          <a:lnRef idx="2">
+            <a:schemeClr val="accent1"/>
+          </a:lnRef>
+          <a:fillRef idx="0">
+            <a:schemeClr val="accent1"/>
+          </a:fillRef>
+          <a:effectRef idx="1">
+            <a:schemeClr val="accent1"/>
+          </a:effectRef>
+          <a:fontRef idx="minor">
+            <a:schemeClr val="tx1"/>
+          </a:fontRef>
+        </p:style>
+      </p:cxnSp>
+      <p:sp>
+        <p:nvSpPr>
+          <p:cNvPr id="50" name="TextBox 49"/>
+          <p:cNvSpPr txBox="1"/>
+          <p:nvPr/>
+        </p:nvSpPr>
+        <p:spPr>
+          <a:xfrm>
+            <a:off x="5650000" y="4180000"/>
+            <a:ext cx="1000000" cy="280000"/>
+          </a:xfrm>
+          <a:prstGeom prst="rect">
+            <a:avLst/>
+          </a:prstGeom>
+          <a:noFill/>
+        </p:spPr>
+        <p:txBody>
+          <a:bodyPr wrap="square" lIns="0" tIns="0" rIns="0" bIns="0" anchor="ctr">
+            <a:spAutoFit/>
+          </a:bodyPr>
+          <a:lstStyle/>
+          <a:p>
+            <a:pPr algn="l"/>
+            <a:r>
+              <a:rPr sz="1100" b="1" i="0">
+                <a:solidFill>
+                  <a:srgbClr val="C0392B"/>
+                </a:solidFill>
+                <a:latin typeface="Arial"/>
+              </a:rPr>
+              <a:t>X blocked</a:t>
             </a:r>
           </a:p>
         </p:txBody>
@@ -5315,6 +4948,159 @@
   <p:clrMapOvr>
     <a:masterClrMapping/>
   </p:clrMapOvr>
+  <p:timing>
+    <p:tnLst>
+      <p:par>
+        <p:cTn id="1" dur="indefinite" restart="never" nodeType="tmRoot">
+          <p:childTnLst>
+            <p:seq concurrent="1" nextAc="seek">
+              <p:cTn id="2" dur="indefinite" nodeType="mainSeq">
+                <p:childTnLst>
+                  <p:par>
+                    <p:cTn id="3" fill="hold">
+                      <p:stCondLst>
+                        <p:cond delay="indefinite"/>
+                      </p:stCondLst>
+                      <p:childTnLst>
+                        <p:par>
+                          <p:cTn id="4" fill="hold">
+                            <p:stCondLst>
+                              <p:cond delay="0"/>
+                            </p:stCondLst>
+                            <p:childTnLst>
+                              <p:par>
+                                <p:cTn id="5" presetID="10" presetClass="entr" presetSubtype="0" fill="hold" nodeType="clickEffect">
+                                  <p:stCondLst>
+                                    <p:cond delay="0"/>
+                                  </p:stCondLst>
+                                  <p:childTnLst>
+                                    <p:set>
+                                      <p:cBhvr>
+                                        <p:cTn id="6" dur="1" fill="hold">
+                                          <p:stCondLst>
+                                            <p:cond delay="0"/>
+                                          </p:stCondLst>
+                                        </p:cTn>
+                                        <p:tgtEl>
+                                          <p:spTgt spid="49"/>
+                                        </p:tgtEl>
+                                        <p:attrNameLst>
+                                          <p:attrName>style.visibility</p:attrName>
+                                        </p:attrNameLst>
+                                      </p:cBhvr>
+                                      <p:to>
+                                        <p:strVal val="visible"/>
+                                      </p:to>
+                                    </p:set>
+                                    <p:animEffect transition="in" filter="fade">
+                                      <p:cBhvr>
+                                        <p:cTn id="7" dur="500"/>
+                                        <p:tgtEl>
+                                          <p:spTgt spid="49"/>
+                                        </p:tgtEl>
+                                      </p:cBhvr>
+                                    </p:animEffect>
+                                  </p:childTnLst>
+                                </p:cTn>
+                              </p:par>
+                              <p:par>
+                                <p:cTn id="8" presetID="10" presetClass="entr" presetSubtype="0" fill="hold" nodeType="withEffect">
+                                  <p:stCondLst>
+                                    <p:cond delay="0"/>
+                                  </p:stCondLst>
+                                  <p:childTnLst>
+                                    <p:set>
+                                      <p:cBhvr>
+                                        <p:cTn id="9" dur="1" fill="hold">
+                                          <p:stCondLst>
+                                            <p:cond delay="0"/>
+                                          </p:stCondLst>
+                                        </p:cTn>
+                                        <p:tgtEl>
+                                          <p:spTgt spid="48"/>
+                                        </p:tgtEl>
+                                        <p:attrNameLst>
+                                          <p:attrName>style.visibility</p:attrName>
+                                        </p:attrNameLst>
+                                      </p:cBhvr>
+                                      <p:to>
+                                        <p:strVal val="visible"/>
+                                      </p:to>
+                                    </p:set>
+                                    <p:animEffect transition="in" filter="fade">
+                                      <p:cBhvr>
+                                        <p:cTn id="10" dur="500"/>
+                                        <p:tgtEl>
+                                          <p:spTgt spid="48"/>
+                                        </p:tgtEl>
+                                      </p:cBhvr>
+                                    </p:animEffect>
+                                  </p:childTnLst>
+                                </p:cTn>
+                              </p:par>
+                              <p:par>
+                                <p:cTn id="11" presetID="10" presetClass="entr" presetSubtype="0" fill="hold" nodeType="withEffect">
+                                  <p:stCondLst>
+                                    <p:cond delay="0"/>
+                                  </p:stCondLst>
+                                  <p:childTnLst>
+                                    <p:set>
+                                      <p:cBhvr>
+                                        <p:cTn id="12" dur="1" fill="hold">
+                                          <p:stCondLst>
+                                            <p:cond delay="0"/>
+                                          </p:stCondLst>
+                                        </p:cTn>
+                                        <p:tgtEl>
+                                          <p:spTgt spid="50"/>
+                                        </p:tgtEl>
+                                        <p:attrNameLst>
+                                          <p:attrName>style.visibility</p:attrName>
+                                        </p:attrNameLst>
+                                      </p:cBhvr>
+                                      <p:to>
+                                        <p:strVal val="visible"/>
+                                      </p:to>
+                                    </p:set>
+                                    <p:animEffect transition="in" filter="fade">
+                                      <p:cBhvr>
+                                        <p:cTn id="13" dur="500"/>
+                                        <p:tgtEl>
+                                          <p:spTgt spid="50"/>
+                                        </p:tgtEl>
+                                      </p:cBhvr>
+                                    </p:animEffect>
+                                  </p:childTnLst>
+                                </p:cTn>
+                              </p:par>
+                            </p:childTnLst>
+                          </p:cTn>
+                        </p:par>
+                      </p:childTnLst>
+                    </p:cTn>
+                  </p:par>
+                </p:childTnLst>
+              </p:cTn>
+              <p:prevCondLst>
+                <p:cond evt="onPrev" delay="0">
+                  <p:tgtEl>
+                    <p:sldTgt/>
+                  </p:tgtEl>
+                </p:cond>
+              </p:prevCondLst>
+              <p:nextCondLst>
+                <p:cond evt="onNext" delay="0">
+                  <p:tgtEl>
+                    <p:sldTgt/>
+                  </p:tgtEl>
+                </p:cond>
+              </p:nextCondLst>
+            </p:seq>
+          </p:childTnLst>
+        </p:cTn>
+      </p:par>
+    </p:tnLst>
+  </p:timing>
 </p:sld>
 </file>
 
@@ -5345,7 +5131,12 @@
             <p:ph type="title"/>
           </p:nvPr>
         </p:nvSpPr>
-        <p:spPr/>
+        <p:spPr>
+          <a:xfrm>
+            <a:off x="534300" y="224048"/>
+            <a:ext cx="8046720" cy="685800"/>
+          </a:xfrm>
+        </p:spPr>
         <p:txBody>
           <a:bodyPr wrap="square"/>
           <a:lstStyle/>
@@ -5358,7 +5149,7 @@
                 </a:solidFill>
                 <a:latin typeface="Arial"/>
               </a:rPr>
-              <a:t>Hardening the C You Must Keep</a:t>
+              <a:t>Coarse vs Fine CFI</a:t>
             </a:r>
           </a:p>
         </p:txBody>
@@ -5373,7 +5164,12 @@
             <p:ph type="body" idx="1"/>
           </p:nvPr>
         </p:nvSpPr>
-        <p:spPr/>
+        <p:spPr>
+          <a:xfrm>
+            <a:off x="420000" y="1298448"/>
+            <a:ext cx="8046720" cy="3383280"/>
+          </a:xfrm>
+        </p:spPr>
         <p:txBody>
           <a:bodyPr wrap="square" lIns="0" tIns="0" rIns="0" bIns="0"/>
           <a:lstStyle/>
@@ -5385,29 +5181,7 @@
                 </a:solidFill>
                 <a:latin typeface="Arial"/>
               </a:rPr>
-              <a:t>Rewrites are slow, so make existing C far harder to exploit</a:t>
-            </a:r>
-          </a:p>
-          <a:p>
-            <a:r>
-              <a:rPr sz="2000" b="0" i="0">
-                <a:solidFill>
-                  <a:srgbClr val="202020"/>
-                </a:solidFill>
-                <a:latin typeface="Arial"/>
-              </a:rPr>
-              <a:t>Compiler and library hardening add checks the classic defenses did not</a:t>
-            </a:r>
-          </a:p>
-          <a:p>
-            <a:r>
-              <a:rPr sz="2000" b="0" i="0">
-                <a:solidFill>
-                  <a:srgbClr val="202020"/>
-                </a:solidFill>
-                <a:latin typeface="Arial"/>
-              </a:rPr>
-              <a:t>Sanitizers (ASan, UBSan) catch memory errors during testing, before shipping</a:t>
+              <a:t>The allowed target set can be loose or tight - a real trade-off</a:t>
             </a:r>
           </a:p>
         </p:txBody>
@@ -5471,19 +5245,21 @@
         </p:nvSpPr>
         <p:spPr>
           <a:xfrm>
-            <a:off x="548640" y="3350000"/>
-            <a:ext cx="6600000" cy="1200000"/>
+            <a:off x="350000" y="2850000"/>
+            <a:ext cx="3550000" cy="1850000"/>
           </a:xfrm>
           <a:prstGeom prst="roundRect">
             <a:avLst>
-              <a:gd name="adj" fmla="val 5000"/>
+              <a:gd name="adj" fmla="val 6000"/>
             </a:avLst>
           </a:prstGeom>
           <a:solidFill>
-            <a:srgbClr val="1E2430"/>
+            <a:srgbClr val="F6D8C4"/>
           </a:solidFill>
-          <a:ln>
-            <a:noFill/>
+          <a:ln w="12700">
+            <a:solidFill>
+              <a:srgbClr val="BBBBBB"/>
+            </a:solidFill>
           </a:ln>
           <a:effectLst/>
         </p:spPr>
@@ -5502,511 +5278,142 @@
           </a:fontRef>
         </p:style>
         <p:txBody>
-          <a:bodyPr wrap="none" lIns="109728" tIns="68580" rIns="54864" bIns="68580" rtlCol="0" anchor="t"/>
+          <a:bodyPr rtlCol="0" anchor="ctr"/>
           <a:lstStyle/>
           <a:p>
-            <a:pPr>
-              <a:lnSpc>
-                <a:spcPct val="100000"/>
-              </a:lnSpc>
-              <a:spcBef>
-                <a:spcPts val="0"/>
-              </a:spcBef>
-              <a:spcAft>
-                <a:spcPts val="0"/>
-              </a:spcAft>
-            </a:pPr>
-            <a:r>
-              <a:rPr sz="1050" b="0" i="0" dirty="0" err="1">
-                <a:solidFill>
-                  <a:srgbClr val="D4D4D4"/>
-                </a:solidFill>
-                <a:latin typeface="Courier New"/>
-              </a:rPr>
-              <a:t>gcc</a:t>
-            </a:r>
-            <a:r>
-              <a:rPr sz="1050" b="0" i="0" dirty="0">
-                <a:solidFill>
-                  <a:srgbClr val="D4D4D4"/>
-                </a:solidFill>
-                <a:latin typeface="Courier New"/>
-              </a:rPr>
-              <a:t> -O2 -D_FORTIFY_SOURCE=</a:t>
-            </a:r>
-            <a:r>
-              <a:rPr sz="1050" b="0" i="0" dirty="0">
-                <a:solidFill>
-                  <a:srgbClr val="B5CEA8"/>
-                </a:solidFill>
-                <a:latin typeface="Courier New"/>
-              </a:rPr>
-              <a:t>2</a:t>
-            </a:r>
-            <a:r>
-              <a:rPr sz="1050" b="0" i="0" dirty="0">
-                <a:solidFill>
-                  <a:srgbClr val="D4D4D4"/>
-                </a:solidFill>
-                <a:latin typeface="Courier New"/>
-              </a:rPr>
-              <a:t> \</a:t>
-            </a:r>
-          </a:p>
-          <a:p>
-            <a:pPr>
-              <a:lnSpc>
-                <a:spcPct val="100000"/>
-              </a:lnSpc>
-              <a:spcBef>
-                <a:spcPts val="0"/>
-              </a:spcBef>
-              <a:spcAft>
-                <a:spcPts val="0"/>
-              </a:spcAft>
-            </a:pPr>
-            <a:r>
-              <a:rPr sz="1050" b="0" i="0" dirty="0">
-                <a:solidFill>
-                  <a:srgbClr val="D4D4D4"/>
-                </a:solidFill>
-                <a:latin typeface="Courier New"/>
-              </a:rPr>
-              <a:t>    -</a:t>
-            </a:r>
-            <a:r>
-              <a:rPr sz="1050" b="0" i="0" dirty="0" err="1">
-                <a:solidFill>
-                  <a:srgbClr val="D4D4D4"/>
-                </a:solidFill>
-                <a:latin typeface="Courier New"/>
-              </a:rPr>
-              <a:t>fstack</a:t>
-            </a:r>
-            <a:r>
-              <a:rPr sz="1050" b="0" i="0" dirty="0">
-                <a:solidFill>
-                  <a:srgbClr val="D4D4D4"/>
-                </a:solidFill>
-                <a:latin typeface="Courier New"/>
-              </a:rPr>
-              <a:t>-protector-strong \   </a:t>
-            </a:r>
-            <a:r>
-              <a:rPr sz="1050" b="0" i="0" dirty="0">
-                <a:solidFill>
-                  <a:srgbClr val="6A9955"/>
-                </a:solidFill>
-                <a:latin typeface="Courier New"/>
-              </a:rPr>
-              <a:t>// canaries on more functions</a:t>
-            </a:r>
-          </a:p>
-          <a:p>
-            <a:pPr>
-              <a:lnSpc>
-                <a:spcPct val="100000"/>
-              </a:lnSpc>
-              <a:spcBef>
-                <a:spcPts val="0"/>
-              </a:spcBef>
-              <a:spcAft>
-                <a:spcPts val="0"/>
-              </a:spcAft>
-            </a:pPr>
-            <a:r>
-              <a:rPr sz="1050" b="0" i="0" dirty="0">
-                <a:solidFill>
-                  <a:srgbClr val="D4D4D4"/>
-                </a:solidFill>
-                <a:latin typeface="Courier New"/>
-              </a:rPr>
-              <a:t>    -</a:t>
-            </a:r>
-            <a:r>
-              <a:rPr sz="1050" b="0" i="0" dirty="0" err="1">
-                <a:solidFill>
-                  <a:srgbClr val="D4D4D4"/>
-                </a:solidFill>
-                <a:latin typeface="Courier New"/>
-              </a:rPr>
-              <a:t>fstack</a:t>
-            </a:r>
-            <a:r>
-              <a:rPr sz="1050" b="0" i="0" dirty="0">
-                <a:solidFill>
-                  <a:srgbClr val="D4D4D4"/>
-                </a:solidFill>
-                <a:latin typeface="Courier New"/>
-              </a:rPr>
-              <a:t>-clash-protection \   </a:t>
-            </a:r>
-            <a:r>
-              <a:rPr sz="1050" b="0" i="0" dirty="0">
-                <a:solidFill>
-                  <a:srgbClr val="6A9955"/>
-                </a:solidFill>
-                <a:latin typeface="Courier New"/>
-              </a:rPr>
-              <a:t>// guard large stack growth</a:t>
-            </a:r>
-          </a:p>
-          <a:p>
-            <a:pPr>
-              <a:lnSpc>
-                <a:spcPct val="100000"/>
-              </a:lnSpc>
-              <a:spcBef>
-                <a:spcPts val="0"/>
-              </a:spcBef>
-              <a:spcAft>
-                <a:spcPts val="0"/>
-              </a:spcAft>
-            </a:pPr>
-            <a:r>
-              <a:rPr sz="1050" b="0" i="0" dirty="0">
-                <a:solidFill>
-                  <a:srgbClr val="D4D4D4"/>
-                </a:solidFill>
-                <a:latin typeface="Courier New"/>
-              </a:rPr>
-              <a:t>    -</a:t>
-            </a:r>
-            <a:r>
-              <a:rPr sz="1050" b="0" i="0" dirty="0" err="1">
-                <a:solidFill>
-                  <a:srgbClr val="D4D4D4"/>
-                </a:solidFill>
-                <a:latin typeface="Courier New"/>
-              </a:rPr>
-              <a:t>fcf</a:t>
-            </a:r>
-            <a:r>
-              <a:rPr sz="1050" b="0" i="0" dirty="0">
-                <a:solidFill>
-                  <a:srgbClr val="D4D4D4"/>
-                </a:solidFill>
-                <a:latin typeface="Courier New"/>
-              </a:rPr>
-              <a:t>-protection=full          </a:t>
-            </a:r>
-            <a:r>
-              <a:rPr sz="1050" b="0" i="0" dirty="0">
-                <a:solidFill>
-                  <a:srgbClr val="6A9955"/>
-                </a:solidFill>
-                <a:latin typeface="Courier New"/>
-              </a:rPr>
-              <a:t>// Intel CET: CFI + shadow stack</a:t>
-            </a:r>
-          </a:p>
-        </p:txBody>
-      </p:sp>
-    </p:spTree>
-  </p:cSld>
-  <p:clrMapOvr>
-    <a:masterClrMapping/>
-  </p:clrMapOvr>
-</p:sld>
-</file>
-
-<file path=ppt/slides/slide12.xml><?xml version="1.0" encoding="utf-8"?>
-<p:sld xmlns:a="http://schemas.openxmlformats.org/drawingml/2006/main" xmlns:r="http://schemas.openxmlformats.org/officeDocument/2006/relationships" xmlns:p="http://schemas.openxmlformats.org/presentationml/2006/main">
-  <p:cSld>
-    <p:spTree>
-      <p:nvGrpSpPr>
-        <p:cNvPr id="1" name=""/>
-        <p:cNvGrpSpPr/>
-        <p:nvPr/>
-      </p:nvGrpSpPr>
-      <p:grpSpPr>
-        <a:xfrm>
-          <a:off x="0" y="0"/>
-          <a:ext cx="0" cy="0"/>
-          <a:chOff x="0" y="0"/>
-          <a:chExt cx="0" cy="0"/>
-        </a:xfrm>
-      </p:grpSpPr>
-      <p:sp>
-        <p:nvSpPr>
-          <p:cNvPr id="2" name="Title 1"/>
-          <p:cNvSpPr>
-            <a:spLocks noGrp="1"/>
-          </p:cNvSpPr>
-          <p:nvPr>
-            <p:ph type="title"/>
-          </p:nvPr>
-        </p:nvSpPr>
-        <p:spPr/>
-        <p:txBody>
-          <a:bodyPr/>
-          <a:lstStyle/>
-          <a:p>
-            <a:r>
-              <a:rPr sz="2600" b="1" i="0">
-                <a:solidFill>
-                  <a:srgbClr val="202020"/>
-                </a:solidFill>
-                <a:latin typeface="Arial"/>
-              </a:rPr>
-              <a:t>Line of Defense 3: Contain the Damage</a:t>
-            </a:r>
-          </a:p>
-        </p:txBody>
-      </p:sp>
-      <p:sp>
-        <p:nvSpPr>
-          <p:cNvPr id="3" name="Text Placeholder 2"/>
-          <p:cNvSpPr>
-            <a:spLocks noGrp="1"/>
-          </p:cNvSpPr>
-          <p:nvPr>
-            <p:ph type="body" idx="1"/>
-          </p:nvPr>
-        </p:nvSpPr>
-        <p:spPr/>
-        <p:txBody>
-          <a:bodyPr/>
-          <a:lstStyle/>
-          <a:p>
-            <a:r>
-              <a:rPr sz="1800" b="1" i="0">
-                <a:solidFill>
-                  <a:srgbClr val="E47932"/>
-                </a:solidFill>
-                <a:latin typeface="Arial"/>
-              </a:rPr>
-              <a:t>Assume a compromise happens, and limit what it can reach</a:t>
-            </a:r>
-          </a:p>
-        </p:txBody>
-      </p:sp>
-      <p:sp>
-        <p:nvSpPr>
-          <p:cNvPr id="41" name="Google Shape;41;p8"/>
-          <p:cNvSpPr txBox="1">
-            <a:spLocks noGrp="1"/>
-          </p:cNvSpPr>
-          <p:nvPr>
-            <p:ph type="sldNum" idx="12"/>
-          </p:nvPr>
-        </p:nvSpPr>
-        <p:spPr>
-          <a:xfrm>
-            <a:off x="8229600" y="4690872"/>
-            <a:ext cx="548640" cy="274320"/>
+            <a:pPr algn="ctr"/>
+            <a:endParaRPr/>
+          </a:p>
+        </p:txBody>
+      </p:sp>
+      <p:sp>
+        <p:nvSpPr>
+          <p:cNvPr id="43" name="TextBox 42"/>
+          <p:cNvSpPr txBox="1"/>
+          <p:nvPr/>
+        </p:nvSpPr>
+        <p:spPr>
+          <a:xfrm>
+            <a:off x="520000" y="2940000"/>
+            <a:ext cx="3200000" cy="340000"/>
           </a:xfrm>
           <a:prstGeom prst="rect">
             <a:avLst/>
           </a:prstGeom>
           <a:noFill/>
-          <a:ln>
-            <a:noFill/>
-          </a:ln>
-        </p:spPr>
-        <p:txBody>
-          <a:bodyPr spcFirstLastPara="1" wrap="square" lIns="0" tIns="0" rIns="0" bIns="0" anchor="ctr" anchorCtr="0">
-            <a:noAutofit/>
+        </p:spPr>
+        <p:txBody>
+          <a:bodyPr wrap="square" lIns="0" tIns="0" rIns="0" bIns="0" anchor="t">
+            <a:spAutoFit/>
           </a:bodyPr>
           <a:lstStyle/>
           <a:p>
-            <a:pPr marL="0" lvl="0" indent="0" algn="r" rtl="0">
-              <a:spcBef>
-                <a:spcPts val="0"/>
-              </a:spcBef>
-              <a:spcAft>
-                <a:spcPts val="0"/>
-              </a:spcAft>
-              <a:buClr>
-                <a:srgbClr val="8A8A8A"/>
-              </a:buClr>
-              <a:buSzPts val="1200"/>
-              <a:buFont typeface="Arial"/>
-              <a:buNone/>
-            </a:pPr>
-            <a:fld id="{00000000-1234-1234-1234-123412341234}" type="slidenum">
-              <a:rPr lang="en-US"/>
-              <a:t>12</a:t>
-            </a:fld>
-            <a:endParaRPr/>
-          </a:p>
-        </p:txBody>
-      </p:sp>
-    </p:spTree>
-  </p:cSld>
-  <p:clrMapOvr>
-    <a:masterClrMapping/>
-  </p:clrMapOvr>
-</p:sld>
-</file>
-
-<file path=ppt/slides/slide13.xml><?xml version="1.0" encoding="utf-8"?>
-<p:sld xmlns:a="http://schemas.openxmlformats.org/drawingml/2006/main" xmlns:r="http://schemas.openxmlformats.org/officeDocument/2006/relationships" xmlns:p="http://schemas.openxmlformats.org/presentationml/2006/main">
-  <p:cSld>
-    <p:spTree>
-      <p:nvGrpSpPr>
-        <p:cNvPr id="1" name=""/>
-        <p:cNvGrpSpPr/>
-        <p:nvPr/>
-      </p:nvGrpSpPr>
-      <p:grpSpPr>
-        <a:xfrm>
-          <a:off x="0" y="0"/>
-          <a:ext cx="0" cy="0"/>
-          <a:chOff x="0" y="0"/>
-          <a:chExt cx="0" cy="0"/>
-        </a:xfrm>
-      </p:grpSpPr>
-      <p:sp>
-        <p:nvSpPr>
-          <p:cNvPr id="2" name="Title 1"/>
-          <p:cNvSpPr>
-            <a:spLocks noGrp="1"/>
-          </p:cNvSpPr>
-          <p:nvPr>
-            <p:ph type="title"/>
-          </p:nvPr>
-        </p:nvSpPr>
-        <p:spPr/>
-        <p:txBody>
-          <a:bodyPr wrap="square"/>
-          <a:lstStyle/>
-          <a:p>
             <a:pPr algn="l"/>
             <a:r>
-              <a:rPr sz="2800" b="1" i="0">
-                <a:solidFill>
-                  <a:srgbClr val="202020"/>
-                </a:solidFill>
-                <a:latin typeface="Arial"/>
-              </a:rPr>
-              <a:t>Sandboxing and Least Privilege</a:t>
-            </a:r>
-          </a:p>
-        </p:txBody>
-      </p:sp>
-      <p:sp>
-        <p:nvSpPr>
-          <p:cNvPr id="3" name="Text Placeholder 2"/>
-          <p:cNvSpPr>
-            <a:spLocks noGrp="1"/>
-          </p:cNvSpPr>
-          <p:nvPr>
-            <p:ph type="body" idx="1"/>
-          </p:nvPr>
-        </p:nvSpPr>
-        <p:spPr/>
-        <p:txBody>
-          <a:bodyPr wrap="square" lIns="0" tIns="0" rIns="0" bIns="0"/>
-          <a:lstStyle/>
-          <a:p>
-            <a:r>
-              <a:rPr sz="2000" b="0" i="0">
-                <a:solidFill>
-                  <a:srgbClr val="202020"/>
-                </a:solidFill>
-                <a:latin typeface="Arial"/>
-              </a:rPr>
-              <a:t>Give each component only the privileges and resources it truly needs</a:t>
-            </a:r>
-          </a:p>
-          <a:p>
-            <a:r>
-              <a:rPr sz="2000" b="0" i="0">
-                <a:solidFill>
-                  <a:srgbClr val="202020"/>
-                </a:solidFill>
-                <a:latin typeface="Arial"/>
-              </a:rPr>
-              <a:t>Sandboxes (seccomp, containers, OS isolation) wall off the risky parts</a:t>
-            </a:r>
-          </a:p>
-          <a:p>
-            <a:r>
-              <a:rPr sz="2000" b="0" i="0">
-                <a:solidFill>
-                  <a:srgbClr val="202020"/>
-                </a:solidFill>
-                <a:latin typeface="Arial"/>
-              </a:rPr>
-              <a:t>A bug in a sandboxed parser then compromises the sandbox, not the whole system</a:t>
-            </a:r>
-          </a:p>
-        </p:txBody>
-      </p:sp>
-      <p:sp>
-        <p:nvSpPr>
-          <p:cNvPr id="41" name="Google Shape;41;p8"/>
-          <p:cNvSpPr txBox="1">
-            <a:spLocks noGrp="1"/>
-          </p:cNvSpPr>
-          <p:nvPr>
-            <p:ph type="sldNum" idx="12"/>
-          </p:nvPr>
-        </p:nvSpPr>
-        <p:spPr>
-          <a:xfrm>
-            <a:off x="8229600" y="4690872"/>
-            <a:ext cx="548640" cy="274320"/>
+              <a:rPr sz="1500" b="1" i="0">
+                <a:solidFill>
+                  <a:srgbClr val="E47932"/>
+                </a:solidFill>
+                <a:latin typeface="Arial"/>
+              </a:rPr>
+              <a:t>Coarse CFI</a:t>
+            </a:r>
+          </a:p>
+        </p:txBody>
+      </p:sp>
+      <p:sp>
+        <p:nvSpPr>
+          <p:cNvPr id="44" name="TextBox 43"/>
+          <p:cNvSpPr txBox="1"/>
+          <p:nvPr/>
+        </p:nvSpPr>
+        <p:spPr>
+          <a:xfrm>
+            <a:off x="530000" y="3340000"/>
+            <a:ext cx="3200000" cy="1300000"/>
           </a:xfrm>
           <a:prstGeom prst="rect">
             <a:avLst/>
           </a:prstGeom>
           <a:noFill/>
-          <a:ln>
-            <a:noFill/>
-          </a:ln>
-        </p:spPr>
-        <p:txBody>
-          <a:bodyPr spcFirstLastPara="1" wrap="square" lIns="0" tIns="0" rIns="0" bIns="0" anchor="ctr" anchorCtr="0">
-            <a:noAutofit/>
+        </p:spPr>
+        <p:txBody>
+          <a:bodyPr wrap="square" lIns="0" tIns="0" rIns="0" bIns="0" anchor="t">
+            <a:spAutoFit/>
           </a:bodyPr>
           <a:lstStyle/>
           <a:p>
-            <a:pPr marL="0" lvl="0" indent="0" algn="r" rtl="0">
-              <a:spcBef>
-                <a:spcPts val="0"/>
-              </a:spcBef>
-              <a:spcAft>
-                <a:spcPts val="0"/>
-              </a:spcAft>
-              <a:buClr>
-                <a:srgbClr val="8A8A8A"/>
-              </a:buClr>
-              <a:buSzPts val="1200"/>
-              <a:buFont typeface="Arial"/>
-              <a:buNone/>
-            </a:pPr>
-            <a:fld id="{00000000-1234-1234-1234-123412341234}" type="slidenum">
-              <a:rPr lang="en-US"/>
-              <a:t>13</a:t>
-            </a:fld>
-            <a:endParaRPr/>
-          </a:p>
-        </p:txBody>
-      </p:sp>
-      <p:sp>
-        <p:nvSpPr>
-          <p:cNvPr id="42" name="Rounded Rectangle 41"/>
+            <a:pPr algn="l"/>
+            <a:r>
+              <a:rPr sz="1100" b="0" i="0">
+                <a:solidFill>
+                  <a:srgbClr val="202020"/>
+                </a:solidFill>
+                <a:latin typeface="Arial"/>
+              </a:rPr>
+              <a:t>- Any function start for calls</a:t>
+            </a:r>
+          </a:p>
+          <a:p>
+            <a:pPr algn="l"/>
+            <a:r>
+              <a:rPr sz="1100" b="0" i="0">
+                <a:solidFill>
+                  <a:srgbClr val="202020"/>
+                </a:solidFill>
+                <a:latin typeface="Arial"/>
+              </a:rPr>
+              <a:t>- Any call site for returns</a:t>
+            </a:r>
+          </a:p>
+          <a:p>
+            <a:pPr algn="l"/>
+            <a:r>
+              <a:rPr sz="1100" b="0" i="0">
+                <a:solidFill>
+                  <a:srgbClr val="202020"/>
+                </a:solidFill>
+                <a:latin typeface="Arial"/>
+              </a:rPr>
+              <a:t>- Cheap, and what CET enforces</a:t>
+            </a:r>
+          </a:p>
+          <a:p>
+            <a:pPr algn="l"/>
+            <a:r>
+              <a:rPr sz="1100" b="0" i="0">
+                <a:solidFill>
+                  <a:srgbClr val="202020"/>
+                </a:solidFill>
+                <a:latin typeface="Arial"/>
+              </a:rPr>
+              <a:t>- But still exploitable in practice</a:t>
+            </a:r>
+          </a:p>
+        </p:txBody>
+      </p:sp>
+      <p:sp>
+        <p:nvSpPr>
+          <p:cNvPr id="45" name="Rounded Rectangle 44"/>
           <p:cNvSpPr/>
           <p:nvPr/>
         </p:nvSpPr>
         <p:spPr>
           <a:xfrm>
-            <a:off x="1100000" y="3500000"/>
-            <a:ext cx="3300000" cy="1050000"/>
+            <a:off x="4200000" y="2850000"/>
+            <a:ext cx="3550000" cy="1850000"/>
           </a:xfrm>
           <a:prstGeom prst="roundRect">
             <a:avLst>
-              <a:gd name="adj" fmla="val 5000"/>
+              <a:gd name="adj" fmla="val 6000"/>
             </a:avLst>
           </a:prstGeom>
           <a:solidFill>
-            <a:srgbClr val="F6D8C4"/>
+            <a:srgbClr val="DDEEDD"/>
           </a:solidFill>
           <a:ln w="12700">
             <a:solidFill>
-              <a:srgbClr val="C08040"/>
+              <a:srgbClr val="BBBBBB"/>
             </a:solidFill>
           </a:ln>
           <a:effectLst/>
@@ -6036,14 +5443,14 @@
       </p:sp>
       <p:sp>
         <p:nvSpPr>
-          <p:cNvPr id="43" name="TextBox 42"/>
+          <p:cNvPr id="46" name="TextBox 45"/>
           <p:cNvSpPr txBox="1"/>
           <p:nvPr/>
         </p:nvSpPr>
         <p:spPr>
           <a:xfrm>
-            <a:off x="1220000" y="3590000"/>
-            <a:ext cx="3060000" cy="240000"/>
+            <a:off x="4370000" y="2940000"/>
+            <a:ext cx="3200000" cy="340000"/>
           </a:xfrm>
           <a:prstGeom prst="rect">
             <a:avLst/>
@@ -6058,174 +5465,13 @@
           <a:p>
             <a:pPr algn="l"/>
             <a:r>
-              <a:rPr sz="1100" b="1" i="0">
-                <a:solidFill>
-                  <a:srgbClr val="C0392B"/>
-                </a:solidFill>
-                <a:latin typeface="Arial"/>
-              </a:rPr>
-              <a:t>sandbox (restricted)</a:t>
-            </a:r>
-          </a:p>
-        </p:txBody>
-      </p:sp>
-      <p:sp>
-        <p:nvSpPr>
-          <p:cNvPr id="44" name="Rectangle 43"/>
-          <p:cNvSpPr/>
-          <p:nvPr/>
-        </p:nvSpPr>
-        <p:spPr>
-          <a:xfrm>
-            <a:off x="1400000" y="3920000"/>
-            <a:ext cx="2700000" cy="480000"/>
-          </a:xfrm>
-          <a:prstGeom prst="rect">
-            <a:avLst/>
-          </a:prstGeom>
-          <a:solidFill>
-            <a:srgbClr val="D6E4F0"/>
-          </a:solidFill>
-          <a:ln w="12700">
-            <a:solidFill>
-              <a:srgbClr val="555555"/>
-            </a:solidFill>
-          </a:ln>
-          <a:effectLst/>
-        </p:spPr>
-        <p:style>
-          <a:lnRef idx="1">
-            <a:schemeClr val="accent1"/>
-          </a:lnRef>
-          <a:fillRef idx="3">
-            <a:schemeClr val="accent1"/>
-          </a:fillRef>
-          <a:effectRef idx="2">
-            <a:schemeClr val="accent1"/>
-          </a:effectRef>
-          <a:fontRef idx="minor">
-            <a:schemeClr val="lt1"/>
-          </a:fontRef>
-        </p:style>
-        <p:txBody>
-          <a:bodyPr wrap="square" lIns="45720" tIns="27432" rIns="45720" bIns="27432" rtlCol="0" anchor="ctr"/>
-          <a:lstStyle/>
-          <a:p>
-            <a:pPr algn="ctr"/>
-            <a:r>
-              <a:rPr sz="1100" b="0" i="0">
-                <a:solidFill>
-                  <a:srgbClr val="202020"/>
-                </a:solidFill>
-                <a:latin typeface="Arial"/>
-              </a:rPr>
-              <a:t>compromised parser</a:t>
-            </a:r>
-          </a:p>
-        </p:txBody>
-      </p:sp>
-      <p:cxnSp>
-        <p:nvCxnSpPr>
-          <p:cNvPr id="45" name="Connector 44"/>
-          <p:cNvCxnSpPr/>
-          <p:nvPr/>
-        </p:nvCxnSpPr>
-        <p:spPr>
-          <a:xfrm>
-            <a:off x="4400000" y="4020000"/>
-            <a:ext cx="800000" cy="0"/>
-          </a:xfrm>
-          <a:prstGeom prst="bentConnector3">
-            <a:avLst/>
-          </a:prstGeom>
-          <a:ln w="25400">
-            <a:solidFill>
-              <a:srgbClr val="C0392B"/>
-            </a:solidFill>
-            <a:tailEnd type="triangle" w="med" len="med"/>
-          </a:ln>
-          <a:effectLst/>
-        </p:spPr>
-        <p:style>
-          <a:lnRef idx="2">
-            <a:schemeClr val="accent1"/>
-          </a:lnRef>
-          <a:fillRef idx="0">
-            <a:schemeClr val="accent1"/>
-          </a:fillRef>
-          <a:effectRef idx="1">
-            <a:schemeClr val="accent1"/>
-          </a:effectRef>
-          <a:fontRef idx="minor">
-            <a:schemeClr val="tx1"/>
-          </a:fontRef>
-        </p:style>
-      </p:cxnSp>
-      <p:sp>
-        <p:nvSpPr>
-          <p:cNvPr id="46" name="Rounded Rectangle 45"/>
-          <p:cNvSpPr/>
-          <p:nvPr/>
-        </p:nvSpPr>
-        <p:spPr>
-          <a:xfrm>
-            <a:off x="5250000" y="3750000"/>
-            <a:ext cx="2600000" cy="560000"/>
-          </a:xfrm>
-          <a:prstGeom prst="roundRect">
-            <a:avLst>
-              <a:gd name="adj" fmla="val 5000"/>
-            </a:avLst>
-          </a:prstGeom>
-          <a:solidFill>
-            <a:srgbClr val="DDEEDD"/>
-          </a:solidFill>
-          <a:ln w="12700">
-            <a:solidFill>
-              <a:srgbClr val="558855"/>
-            </a:solidFill>
-          </a:ln>
-          <a:effectLst/>
-        </p:spPr>
-        <p:style>
-          <a:lnRef idx="1">
-            <a:schemeClr val="accent1"/>
-          </a:lnRef>
-          <a:fillRef idx="3">
-            <a:schemeClr val="accent1"/>
-          </a:fillRef>
-          <a:effectRef idx="2">
-            <a:schemeClr val="accent1"/>
-          </a:effectRef>
-          <a:fontRef idx="minor">
-            <a:schemeClr val="lt1"/>
-          </a:fontRef>
-        </p:style>
-        <p:txBody>
-          <a:bodyPr wrap="square" lIns="45720" tIns="27432" rIns="45720" bIns="27432" rtlCol="0" anchor="ctr"/>
-          <a:lstStyle/>
-          <a:p>
-            <a:pPr algn="ctr"/>
-            <a:r>
-              <a:rPr sz="1100" b="1" i="0">
+              <a:rPr sz="1500" b="1" i="0">
                 <a:solidFill>
                   <a:srgbClr val="2E7D32"/>
                 </a:solidFill>
                 <a:latin typeface="Arial"/>
               </a:rPr>
-              <a:t>rest of the system</a:t>
-            </a:r>
-          </a:p>
-          <a:p>
-            <a:pPr algn="ctr"/>
-            <a:r>
-              <a:rPr sz="1000" b="0" i="1">
-                <a:solidFill>
-                  <a:srgbClr val="2E7D32"/>
-                </a:solidFill>
-                <a:latin typeface="Arial"/>
-              </a:rPr>
-              <a:t>out of reach</a:t>
+              <a:t>Fine CFI</a:t>
             </a:r>
           </a:p>
         </p:txBody>
@@ -6238,8 +5484,8 @@
         </p:nvSpPr>
         <p:spPr>
           <a:xfrm>
-            <a:off x="4250000" y="4140000"/>
-            <a:ext cx="1100000" cy="230000"/>
+            <a:off x="4380000" y="3340000"/>
+            <a:ext cx="3200000" cy="1300000"/>
           </a:xfrm>
           <a:prstGeom prst="rect">
             <a:avLst/>
@@ -6252,2273 +5498,51 @@
           </a:bodyPr>
           <a:lstStyle/>
           <a:p>
-            <a:pPr algn="ctr"/>
-            <a:r>
-              <a:rPr sz="950" b="0" i="1">
-                <a:solidFill>
-                  <a:srgbClr val="C0392B"/>
-                </a:solidFill>
-                <a:latin typeface="Arial"/>
-              </a:rPr>
-              <a:t>contained</a:t>
-            </a:r>
-          </a:p>
-        </p:txBody>
-      </p:sp>
-    </p:spTree>
-  </p:cSld>
-  <p:clrMapOvr>
-    <a:masterClrMapping/>
-  </p:clrMapOvr>
-</p:sld>
-</file>
-
-<file path=ppt/slides/slide14.xml><?xml version="1.0" encoding="utf-8"?>
-<p:sld xmlns:a="http://schemas.openxmlformats.org/drawingml/2006/main" xmlns:r="http://schemas.openxmlformats.org/officeDocument/2006/relationships" xmlns:p="http://schemas.openxmlformats.org/presentationml/2006/main">
-  <p:cSld>
-    <p:spTree>
-      <p:nvGrpSpPr>
-        <p:cNvPr id="1" name=""/>
-        <p:cNvGrpSpPr/>
-        <p:nvPr/>
-      </p:nvGrpSpPr>
-      <p:grpSpPr>
-        <a:xfrm>
-          <a:off x="0" y="0"/>
-          <a:ext cx="0" cy="0"/>
-          <a:chOff x="0" y="0"/>
-          <a:chExt cx="0" cy="0"/>
-        </a:xfrm>
-      </p:grpSpPr>
-      <p:sp>
-        <p:nvSpPr>
-          <p:cNvPr id="2" name="Title 1"/>
-          <p:cNvSpPr>
-            <a:spLocks noGrp="1"/>
-          </p:cNvSpPr>
-          <p:nvPr>
-            <p:ph type="title"/>
-          </p:nvPr>
-        </p:nvSpPr>
-        <p:spPr/>
-        <p:txBody>
-          <a:bodyPr wrap="square"/>
-          <a:lstStyle/>
-          <a:p>
             <a:pPr algn="l"/>
             <a:r>
-              <a:rPr sz="2800" b="1" i="0">
+              <a:rPr sz="1100" b="0" i="0">
                 <a:solidFill>
                   <a:srgbClr val="202020"/>
                 </a:solidFill>
                 <a:latin typeface="Arial"/>
               </a:rPr>
-              <a:t>Defense in Depth: the Layers Compose</a:t>
-            </a:r>
-          </a:p>
-        </p:txBody>
-      </p:sp>
-      <p:sp>
-        <p:nvSpPr>
-          <p:cNvPr id="3" name="Text Placeholder 2"/>
-          <p:cNvSpPr>
-            <a:spLocks noGrp="1"/>
-          </p:cNvSpPr>
-          <p:nvPr>
-            <p:ph type="body" idx="1"/>
-          </p:nvPr>
-        </p:nvSpPr>
-        <p:spPr/>
-        <p:txBody>
-          <a:bodyPr wrap="square" lIns="0" tIns="0" rIns="0" bIns="0"/>
-          <a:lstStyle/>
-          <a:p>
-            <a:r>
-              <a:rPr sz="2000" b="0" i="0">
+              <a:t>- Calls: match the function signature</a:t>
+            </a:r>
+          </a:p>
+          <a:p>
+            <a:pPr algn="l"/>
+            <a:r>
+              <a:rPr sz="1100" b="0" i="0">
                 <a:solidFill>
                   <a:srgbClr val="202020"/>
                 </a:solidFill>
                 <a:latin typeface="Arial"/>
               </a:rPr>
-              <a:t>No layer is perfect, but an attacker must defeat all of them at once</a:t>
-            </a:r>
-          </a:p>
-          <a:p>
-            <a:r>
-              <a:rPr sz="2000" b="0" i="0">
+              <a:t>  (return type, #args, arg types)</a:t>
+            </a:r>
+          </a:p>
+          <a:p>
+            <a:pPr algn="l"/>
+            <a:r>
+              <a:rPr sz="1100" b="0" i="0">
                 <a:solidFill>
                   <a:srgbClr val="202020"/>
                 </a:solidFill>
                 <a:latin typeface="Arial"/>
               </a:rPr>
-              <a:t>Remove bugs where you can; make the rest hard to exploit; contain the rest</a:t>
-            </a:r>
-          </a:p>
-          <a:p>
-            <a:r>
-              <a:rPr sz="2000" b="0" i="0">
+              <a:t>- Returns: use a shadow stack</a:t>
+            </a:r>
+          </a:p>
+          <a:p>
+            <a:pPr algn="l"/>
+            <a:r>
+              <a:rPr sz="1100" b="0" i="0">
                 <a:solidFill>
                   <a:srgbClr val="202020"/>
                 </a:solidFill>
                 <a:latin typeface="Arial"/>
               </a:rPr>
-              <a:t>This is why modern exploits are long chains, not a single overflow</a:t>
-            </a:r>
-          </a:p>
-        </p:txBody>
-      </p:sp>
-      <p:sp>
-        <p:nvSpPr>
-          <p:cNvPr id="41" name="Google Shape;41;p8"/>
-          <p:cNvSpPr txBox="1">
-            <a:spLocks noGrp="1"/>
-          </p:cNvSpPr>
-          <p:nvPr>
-            <p:ph type="sldNum" idx="12"/>
-          </p:nvPr>
-        </p:nvSpPr>
-        <p:spPr>
-          <a:xfrm>
-            <a:off x="8229600" y="4690872"/>
-            <a:ext cx="548640" cy="274320"/>
-          </a:xfrm>
-          <a:prstGeom prst="rect">
-            <a:avLst/>
-          </a:prstGeom>
-          <a:noFill/>
-          <a:ln>
-            <a:noFill/>
-          </a:ln>
-        </p:spPr>
-        <p:txBody>
-          <a:bodyPr spcFirstLastPara="1" wrap="square" lIns="0" tIns="0" rIns="0" bIns="0" anchor="ctr" anchorCtr="0">
-            <a:noAutofit/>
-          </a:bodyPr>
-          <a:lstStyle/>
-          <a:p>
-            <a:pPr marL="0" lvl="0" indent="0" algn="r" rtl="0">
-              <a:spcBef>
-                <a:spcPts val="0"/>
-              </a:spcBef>
-              <a:spcAft>
-                <a:spcPts val="0"/>
-              </a:spcAft>
-              <a:buClr>
-                <a:srgbClr val="8A8A8A"/>
-              </a:buClr>
-              <a:buSzPts val="1200"/>
-              <a:buFont typeface="Arial"/>
-              <a:buNone/>
-            </a:pPr>
-            <a:fld id="{00000000-1234-1234-1234-123412341234}" type="slidenum">
-              <a:rPr lang="en-US"/>
-              <a:t>14</a:t>
-            </a:fld>
-            <a:endParaRPr/>
-          </a:p>
-        </p:txBody>
-      </p:sp>
-      <p:sp>
-        <p:nvSpPr>
-          <p:cNvPr id="42" name="Rectangle 41"/>
-          <p:cNvSpPr/>
-          <p:nvPr/>
-        </p:nvSpPr>
-        <p:spPr>
-          <a:xfrm>
-            <a:off x="1500000" y="3450000"/>
-            <a:ext cx="6000000" cy="330000"/>
-          </a:xfrm>
-          <a:prstGeom prst="rect">
-            <a:avLst/>
-          </a:prstGeom>
-          <a:solidFill>
-            <a:srgbClr val="DDEEDD"/>
-          </a:solidFill>
-          <a:ln w="12700">
-            <a:solidFill>
-              <a:srgbClr val="555555"/>
-            </a:solidFill>
-          </a:ln>
-          <a:effectLst/>
-        </p:spPr>
-        <p:style>
-          <a:lnRef idx="1">
-            <a:schemeClr val="accent1"/>
-          </a:lnRef>
-          <a:fillRef idx="3">
-            <a:schemeClr val="accent1"/>
-          </a:fillRef>
-          <a:effectRef idx="2">
-            <a:schemeClr val="accent1"/>
-          </a:effectRef>
-          <a:fontRef idx="minor">
-            <a:schemeClr val="lt1"/>
-          </a:fontRef>
-        </p:style>
-        <p:txBody>
-          <a:bodyPr wrap="square" lIns="45720" tIns="27432" rIns="45720" bIns="27432" rtlCol="0" anchor="ctr"/>
-          <a:lstStyle/>
-          <a:p>
-            <a:pPr algn="ctr"/>
-            <a:r>
-              <a:rPr sz="1100" b="1" i="0">
-                <a:solidFill>
-                  <a:srgbClr val="202020"/>
-                </a:solidFill>
-                <a:latin typeface="Arial"/>
-              </a:rPr>
-              <a:t>Remove the bug class  (memory-safe languages, hardened C)</a:t>
-            </a:r>
-          </a:p>
-        </p:txBody>
-      </p:sp>
-      <p:sp>
-        <p:nvSpPr>
-          <p:cNvPr id="43" name="Rectangle 42"/>
-          <p:cNvSpPr/>
-          <p:nvPr/>
-        </p:nvSpPr>
-        <p:spPr>
-          <a:xfrm>
-            <a:off x="1500000" y="3840000"/>
-            <a:ext cx="6000000" cy="330000"/>
-          </a:xfrm>
-          <a:prstGeom prst="rect">
-            <a:avLst/>
-          </a:prstGeom>
-          <a:solidFill>
-            <a:srgbClr val="D6E4F0"/>
-          </a:solidFill>
-          <a:ln w="12700">
-            <a:solidFill>
-              <a:srgbClr val="555555"/>
-            </a:solidFill>
-          </a:ln>
-          <a:effectLst/>
-        </p:spPr>
-        <p:style>
-          <a:lnRef idx="1">
-            <a:schemeClr val="accent1"/>
-          </a:lnRef>
-          <a:fillRef idx="3">
-            <a:schemeClr val="accent1"/>
-          </a:fillRef>
-          <a:effectRef idx="2">
-            <a:schemeClr val="accent1"/>
-          </a:effectRef>
-          <a:fontRef idx="minor">
-            <a:schemeClr val="lt1"/>
-          </a:fontRef>
-        </p:style>
-        <p:txBody>
-          <a:bodyPr wrap="square" lIns="45720" tIns="27432" rIns="45720" bIns="27432" rtlCol="0" anchor="ctr"/>
-          <a:lstStyle/>
-          <a:p>
-            <a:pPr algn="ctr"/>
-            <a:r>
-              <a:rPr sz="1100" b="1" i="0">
-                <a:solidFill>
-                  <a:srgbClr val="202020"/>
-                </a:solidFill>
-                <a:latin typeface="Arial"/>
-              </a:rPr>
-              <a:t>Make hijacking hard  (CFI, shadow stacks, PAC)</a:t>
-            </a:r>
-          </a:p>
-        </p:txBody>
-      </p:sp>
-      <p:sp>
-        <p:nvSpPr>
-          <p:cNvPr id="44" name="Rectangle 43"/>
-          <p:cNvSpPr/>
-          <p:nvPr/>
-        </p:nvSpPr>
-        <p:spPr>
-          <a:xfrm>
-            <a:off x="1500000" y="4230000"/>
-            <a:ext cx="6000000" cy="330000"/>
-          </a:xfrm>
-          <a:prstGeom prst="rect">
-            <a:avLst/>
-          </a:prstGeom>
-          <a:solidFill>
-            <a:srgbClr val="F6D8C4"/>
-          </a:solidFill>
-          <a:ln w="12700">
-            <a:solidFill>
-              <a:srgbClr val="555555"/>
-            </a:solidFill>
-          </a:ln>
-          <a:effectLst/>
-        </p:spPr>
-        <p:style>
-          <a:lnRef idx="1">
-            <a:schemeClr val="accent1"/>
-          </a:lnRef>
-          <a:fillRef idx="3">
-            <a:schemeClr val="accent1"/>
-          </a:fillRef>
-          <a:effectRef idx="2">
-            <a:schemeClr val="accent1"/>
-          </a:effectRef>
-          <a:fontRef idx="minor">
-            <a:schemeClr val="lt1"/>
-          </a:fontRef>
-        </p:style>
-        <p:txBody>
-          <a:bodyPr wrap="square" lIns="45720" tIns="27432" rIns="45720" bIns="27432" rtlCol="0" anchor="ctr"/>
-          <a:lstStyle/>
-          <a:p>
-            <a:pPr algn="ctr"/>
-            <a:r>
-              <a:rPr sz="1100" b="1" i="0">
-                <a:solidFill>
-                  <a:srgbClr val="202020"/>
-                </a:solidFill>
-                <a:latin typeface="Arial"/>
-              </a:rPr>
-              <a:t>Contain the damage  (sandboxing, least privilege)</a:t>
-            </a:r>
-          </a:p>
-        </p:txBody>
-      </p:sp>
-      <p:sp>
-        <p:nvSpPr>
-          <p:cNvPr id="45" name="TextBox 44"/>
-          <p:cNvSpPr txBox="1"/>
-          <p:nvPr/>
-        </p:nvSpPr>
-        <p:spPr>
-          <a:xfrm>
-            <a:off x="1500000" y="4640000"/>
-            <a:ext cx="6000000" cy="260000"/>
-          </a:xfrm>
-          <a:prstGeom prst="rect">
-            <a:avLst/>
-          </a:prstGeom>
-          <a:noFill/>
-        </p:spPr>
-        <p:txBody>
-          <a:bodyPr wrap="square" lIns="0" tIns="0" rIns="0" bIns="0" anchor="t">
-            <a:spAutoFit/>
-          </a:bodyPr>
-          <a:lstStyle/>
-          <a:p>
-            <a:pPr algn="ctr"/>
-            <a:r>
-              <a:rPr sz="1100" b="0" i="1">
-                <a:solidFill>
-                  <a:srgbClr val="8A8A8A"/>
-                </a:solidFill>
-                <a:latin typeface="Arial"/>
-              </a:rPr>
-              <a:t>an exploit must pass through every layer</a:t>
-            </a:r>
-          </a:p>
-        </p:txBody>
-      </p:sp>
-    </p:spTree>
-  </p:cSld>
-  <p:clrMapOvr>
-    <a:masterClrMapping/>
-  </p:clrMapOvr>
-</p:sld>
-</file>
-
-<file path=ppt/slides/slide15.xml><?xml version="1.0" encoding="utf-8"?>
-<p:sld xmlns:a="http://schemas.openxmlformats.org/drawingml/2006/main" xmlns:r="http://schemas.openxmlformats.org/officeDocument/2006/relationships" xmlns:p="http://schemas.openxmlformats.org/presentationml/2006/main">
-  <p:cSld>
-    <p:spTree>
-      <p:nvGrpSpPr>
-        <p:cNvPr id="1" name=""/>
-        <p:cNvGrpSpPr/>
-        <p:nvPr/>
-      </p:nvGrpSpPr>
-      <p:grpSpPr>
-        <a:xfrm>
-          <a:off x="0" y="0"/>
-          <a:ext cx="0" cy="0"/>
-          <a:chOff x="0" y="0"/>
-          <a:chExt cx="0" cy="0"/>
-        </a:xfrm>
-      </p:grpSpPr>
-      <p:sp>
-        <p:nvSpPr>
-          <p:cNvPr id="2" name="Title 1"/>
-          <p:cNvSpPr>
-            <a:spLocks noGrp="1"/>
-          </p:cNvSpPr>
-          <p:nvPr>
-            <p:ph type="title"/>
-          </p:nvPr>
-        </p:nvSpPr>
-        <p:spPr/>
-        <p:txBody>
-          <a:bodyPr wrap="square"/>
-          <a:lstStyle/>
-          <a:p>
-            <a:pPr algn="l"/>
-            <a:r>
-              <a:rPr sz="2800" b="1" i="0">
-                <a:solidFill>
-                  <a:srgbClr val="202020"/>
-                </a:solidFill>
-                <a:latin typeface="Arial"/>
-              </a:rPr>
-              <a:t>The Costs, and What Remains Open</a:t>
-            </a:r>
-          </a:p>
-        </p:txBody>
-      </p:sp>
-      <p:sp>
-        <p:nvSpPr>
-          <p:cNvPr id="3" name="Text Placeholder 2"/>
-          <p:cNvSpPr>
-            <a:spLocks noGrp="1"/>
-          </p:cNvSpPr>
-          <p:nvPr>
-            <p:ph type="body" idx="1"/>
-          </p:nvPr>
-        </p:nvSpPr>
-        <p:spPr/>
-        <p:txBody>
-          <a:bodyPr wrap="square" lIns="0" tIns="0" rIns="0" bIns="0"/>
-          <a:lstStyle/>
-          <a:p>
-            <a:r>
-              <a:rPr sz="2000" b="0" i="0">
-                <a:solidFill>
-                  <a:srgbClr val="202020"/>
-                </a:solidFill>
-                <a:latin typeface="Arial"/>
-              </a:rPr>
-              <a:t>Performance: checks cost cycles, so some defenses ship off by default</a:t>
-            </a:r>
-          </a:p>
-          <a:p>
-            <a:r>
-              <a:rPr sz="2000" b="0" i="0">
-                <a:solidFill>
-                  <a:srgbClr val="202020"/>
-                </a:solidFill>
-                <a:latin typeface="Arial"/>
-              </a:rPr>
-              <a:t>Compatibility: CFI and shadow stacks need recompilation and break some code</a:t>
-            </a:r>
-          </a:p>
-          <a:p>
-            <a:r>
-              <a:rPr sz="2000" b="0" i="0">
-                <a:solidFill>
-                  <a:srgbClr val="202020"/>
-                </a:solidFill>
-                <a:latin typeface="Arial"/>
-              </a:rPr>
-              <a:t>Deployment lag: hardware features take years to become universal</a:t>
-            </a:r>
-          </a:p>
-          <a:p>
-            <a:r>
-              <a:rPr sz="2000" b="0" i="0">
-                <a:solidFill>
-                  <a:srgbClr val="202020"/>
-                </a:solidFill>
-                <a:latin typeface="Arial"/>
-              </a:rPr>
-              <a:t>The base of existing C and C++ is enormous, so attacks will persist for a long time</a:t>
-            </a:r>
-          </a:p>
-          <a:p>
-            <a:r>
-              <a:rPr sz="2000" b="0" i="0">
-                <a:solidFill>
-                  <a:srgbClr val="8A8A8A"/>
-                </a:solidFill>
-                <a:latin typeface="Arial"/>
-              </a:rPr>
-              <a:t>Open problem: strong, cheap, and deployable - rarely all three at once</a:t>
-            </a:r>
-          </a:p>
-        </p:txBody>
-      </p:sp>
-      <p:sp>
-        <p:nvSpPr>
-          <p:cNvPr id="41" name="Google Shape;41;p8"/>
-          <p:cNvSpPr txBox="1">
-            <a:spLocks noGrp="1"/>
-          </p:cNvSpPr>
-          <p:nvPr>
-            <p:ph type="sldNum" idx="12"/>
-          </p:nvPr>
-        </p:nvSpPr>
-        <p:spPr>
-          <a:xfrm>
-            <a:off x="8229600" y="4690872"/>
-            <a:ext cx="548640" cy="274320"/>
-          </a:xfrm>
-          <a:prstGeom prst="rect">
-            <a:avLst/>
-          </a:prstGeom>
-          <a:noFill/>
-          <a:ln>
-            <a:noFill/>
-          </a:ln>
-        </p:spPr>
-        <p:txBody>
-          <a:bodyPr spcFirstLastPara="1" wrap="square" lIns="0" tIns="0" rIns="0" bIns="0" anchor="ctr" anchorCtr="0">
-            <a:noAutofit/>
-          </a:bodyPr>
-          <a:lstStyle/>
-          <a:p>
-            <a:pPr marL="0" lvl="0" indent="0" algn="r" rtl="0">
-              <a:spcBef>
-                <a:spcPts val="0"/>
-              </a:spcBef>
-              <a:spcAft>
-                <a:spcPts val="0"/>
-              </a:spcAft>
-              <a:buClr>
-                <a:srgbClr val="8A8A8A"/>
-              </a:buClr>
-              <a:buSzPts val="1200"/>
-              <a:buFont typeface="Arial"/>
-              <a:buNone/>
-            </a:pPr>
-            <a:fld id="{00000000-1234-1234-1234-123412341234}" type="slidenum">
-              <a:rPr lang="en-US"/>
-              <a:t>15</a:t>
-            </a:fld>
-            <a:endParaRPr/>
-          </a:p>
-        </p:txBody>
-      </p:sp>
-    </p:spTree>
-  </p:cSld>
-  <p:clrMapOvr>
-    <a:masterClrMapping/>
-  </p:clrMapOvr>
-</p:sld>
-</file>
-
-<file path=ppt/slides/slide16.xml><?xml version="1.0" encoding="utf-8"?>
-<p:sld xmlns:a="http://schemas.openxmlformats.org/drawingml/2006/main" xmlns:r="http://schemas.openxmlformats.org/officeDocument/2006/relationships" xmlns:p="http://schemas.openxmlformats.org/presentationml/2006/main">
-  <p:cSld>
-    <p:spTree>
-      <p:nvGrpSpPr>
-        <p:cNvPr id="1" name=""/>
-        <p:cNvGrpSpPr/>
-        <p:nvPr/>
-      </p:nvGrpSpPr>
-      <p:grpSpPr>
-        <a:xfrm>
-          <a:off x="0" y="0"/>
-          <a:ext cx="0" cy="0"/>
-          <a:chOff x="0" y="0"/>
-          <a:chExt cx="0" cy="0"/>
-        </a:xfrm>
-      </p:grpSpPr>
-      <p:sp>
-        <p:nvSpPr>
-          <p:cNvPr id="2" name="Title 1"/>
-          <p:cNvSpPr>
-            <a:spLocks noGrp="1"/>
-          </p:cNvSpPr>
-          <p:nvPr>
-            <p:ph type="title"/>
-          </p:nvPr>
-        </p:nvSpPr>
-        <p:spPr/>
-        <p:txBody>
-          <a:bodyPr wrap="square"/>
-          <a:lstStyle/>
-          <a:p>
-            <a:pPr algn="l"/>
-            <a:r>
-              <a:rPr sz="2800" b="1" i="0">
-                <a:solidFill>
-                  <a:srgbClr val="202020"/>
-                </a:solidFill>
-                <a:latin typeface="Arial"/>
-              </a:rPr>
-              <a:t>Conclusions</a:t>
-            </a:r>
-          </a:p>
-        </p:txBody>
-      </p:sp>
-      <p:sp>
-        <p:nvSpPr>
-          <p:cNvPr id="3" name="Text Placeholder 2"/>
-          <p:cNvSpPr>
-            <a:spLocks noGrp="1"/>
-          </p:cNvSpPr>
-          <p:nvPr>
-            <p:ph type="body" idx="1"/>
-          </p:nvPr>
-        </p:nvSpPr>
-        <p:spPr/>
-        <p:txBody>
-          <a:bodyPr wrap="square" lIns="0" tIns="0" rIns="0" bIns="0"/>
-          <a:lstStyle/>
-          <a:p>
-            <a:r>
-              <a:rPr sz="2000" b="0" i="0">
-                <a:solidFill>
-                  <a:srgbClr val="202020"/>
-                </a:solidFill>
-                <a:latin typeface="Arial"/>
-              </a:rPr>
-              <a:t>The classic defenses only raise the bar; modern defenses change the game</a:t>
-            </a:r>
-          </a:p>
-          <a:p>
-            <a:r>
-              <a:rPr sz="2000" b="0" i="0">
-                <a:solidFill>
-                  <a:srgbClr val="202020"/>
-                </a:solidFill>
-                <a:latin typeface="Arial"/>
-              </a:rPr>
-              <a:t>Three lines: remove the bug, make hijacking hard, contain the damage</a:t>
-            </a:r>
-          </a:p>
-          <a:p>
-            <a:r>
-              <a:rPr sz="2000" b="0" i="0">
-                <a:solidFill>
-                  <a:srgbClr val="202020"/>
-                </a:solidFill>
-                <a:latin typeface="Arial"/>
-              </a:rPr>
-              <a:t>CFI, shadow stacks, and PAC protect the targets attackers must corrupt</a:t>
-            </a:r>
-          </a:p>
-          <a:p>
-            <a:r>
-              <a:rPr sz="2000" b="0" i="0">
-                <a:solidFill>
-                  <a:srgbClr val="202020"/>
-                </a:solidFill>
-                <a:latin typeface="Arial"/>
-              </a:rPr>
-              <a:t>Memory-safe languages remove the bug class; hardening buys time for the rest</a:t>
-            </a:r>
-          </a:p>
-          <a:p>
-            <a:r>
-              <a:rPr sz="2000" b="0" i="0">
-                <a:solidFill>
-                  <a:srgbClr val="8A8A8A"/>
-                </a:solidFill>
-                <a:latin typeface="Arial"/>
-              </a:rPr>
-              <a:t>Next: Software Testing &amp; Fuzzing - finding the bugs before attackers do</a:t>
-            </a:r>
-          </a:p>
-        </p:txBody>
-      </p:sp>
-      <p:sp>
-        <p:nvSpPr>
-          <p:cNvPr id="41" name="Google Shape;41;p8"/>
-          <p:cNvSpPr txBox="1">
-            <a:spLocks noGrp="1"/>
-          </p:cNvSpPr>
-          <p:nvPr>
-            <p:ph type="sldNum" idx="12"/>
-          </p:nvPr>
-        </p:nvSpPr>
-        <p:spPr>
-          <a:xfrm>
-            <a:off x="8229600" y="4690872"/>
-            <a:ext cx="548640" cy="274320"/>
-          </a:xfrm>
-          <a:prstGeom prst="rect">
-            <a:avLst/>
-          </a:prstGeom>
-          <a:noFill/>
-          <a:ln>
-            <a:noFill/>
-          </a:ln>
-        </p:spPr>
-        <p:txBody>
-          <a:bodyPr spcFirstLastPara="1" wrap="square" lIns="0" tIns="0" rIns="0" bIns="0" anchor="ctr" anchorCtr="0">
-            <a:noAutofit/>
-          </a:bodyPr>
-          <a:lstStyle/>
-          <a:p>
-            <a:pPr marL="0" lvl="0" indent="0" algn="r" rtl="0">
-              <a:spcBef>
-                <a:spcPts val="0"/>
-              </a:spcBef>
-              <a:spcAft>
-                <a:spcPts val="0"/>
-              </a:spcAft>
-              <a:buClr>
-                <a:srgbClr val="8A8A8A"/>
-              </a:buClr>
-              <a:buSzPts val="1200"/>
-              <a:buFont typeface="Arial"/>
-              <a:buNone/>
-            </a:pPr>
-            <a:fld id="{00000000-1234-1234-1234-123412341234}" type="slidenum">
-              <a:rPr lang="en-US"/>
-              <a:t>16</a:t>
-            </a:fld>
-            <a:endParaRPr/>
-          </a:p>
-        </p:txBody>
-      </p:sp>
-    </p:spTree>
-  </p:cSld>
-  <p:clrMapOvr>
-    <a:masterClrMapping/>
-  </p:clrMapOvr>
-</p:sld>
-</file>
-
-<file path=ppt/slides/slide17.xml><?xml version="1.0" encoding="utf-8"?>
-<p:sld xmlns:a="http://schemas.openxmlformats.org/drawingml/2006/main" xmlns:r="http://schemas.openxmlformats.org/officeDocument/2006/relationships" xmlns:p="http://schemas.openxmlformats.org/presentationml/2006/main">
-  <p:cSld>
-    <p:spTree>
-      <p:nvGrpSpPr>
-        <p:cNvPr id="1" name=""/>
-        <p:cNvGrpSpPr/>
-        <p:nvPr/>
-      </p:nvGrpSpPr>
-      <p:grpSpPr>
-        <a:xfrm>
-          <a:off x="0" y="0"/>
-          <a:ext cx="0" cy="0"/>
-          <a:chOff x="0" y="0"/>
-          <a:chExt cx="0" cy="0"/>
-        </a:xfrm>
-      </p:grpSpPr>
-      <p:sp>
-        <p:nvSpPr>
-          <p:cNvPr id="2" name="Title 1"/>
-          <p:cNvSpPr>
-            <a:spLocks noGrp="1"/>
-          </p:cNvSpPr>
-          <p:nvPr>
-            <p:ph type="title"/>
-          </p:nvPr>
-        </p:nvSpPr>
-        <p:spPr/>
-        <p:txBody>
-          <a:bodyPr wrap="square"/>
-          <a:lstStyle/>
-          <a:p>
-            <a:pPr algn="l"/>
-            <a:r>
-              <a:rPr sz="2800" b="1" i="0">
-                <a:solidFill>
-                  <a:srgbClr val="202020"/>
-                </a:solidFill>
-                <a:latin typeface="Arial"/>
-              </a:rPr>
-              <a:t>Questions</a:t>
-            </a:r>
-          </a:p>
-        </p:txBody>
-      </p:sp>
-      <p:sp>
-        <p:nvSpPr>
-          <p:cNvPr id="41" name="Google Shape;41;p8"/>
-          <p:cNvSpPr txBox="1">
-            <a:spLocks noGrp="1"/>
-          </p:cNvSpPr>
-          <p:nvPr>
-            <p:ph type="sldNum" idx="12"/>
-          </p:nvPr>
-        </p:nvSpPr>
-        <p:spPr>
-          <a:xfrm>
-            <a:off x="8229600" y="4690872"/>
-            <a:ext cx="548640" cy="274320"/>
-          </a:xfrm>
-          <a:prstGeom prst="rect">
-            <a:avLst/>
-          </a:prstGeom>
-          <a:noFill/>
-          <a:ln>
-            <a:noFill/>
-          </a:ln>
-        </p:spPr>
-        <p:txBody>
-          <a:bodyPr spcFirstLastPara="1" wrap="square" lIns="0" tIns="0" rIns="0" bIns="0" anchor="ctr" anchorCtr="0">
-            <a:noAutofit/>
-          </a:bodyPr>
-          <a:lstStyle/>
-          <a:p>
-            <a:pPr marL="0" lvl="0" indent="0" algn="r" rtl="0">
-              <a:spcBef>
-                <a:spcPts val="0"/>
-              </a:spcBef>
-              <a:spcAft>
-                <a:spcPts val="0"/>
-              </a:spcAft>
-              <a:buClr>
-                <a:srgbClr val="8A8A8A"/>
-              </a:buClr>
-              <a:buSzPts val="1200"/>
-              <a:buFont typeface="Arial"/>
-              <a:buNone/>
-            </a:pPr>
-            <a:fld id="{00000000-1234-1234-1234-123412341234}" type="slidenum">
-              <a:rPr lang="en-US"/>
-              <a:t>17</a:t>
-            </a:fld>
-            <a:endParaRPr/>
-          </a:p>
-        </p:txBody>
-      </p:sp>
-      <p:sp>
-        <p:nvSpPr>
-          <p:cNvPr id="42" name="Rounded Rectangle 41"/>
-          <p:cNvSpPr/>
-          <p:nvPr/>
-        </p:nvSpPr>
-        <p:spPr>
-          <a:xfrm>
-            <a:off x="4100000" y="2550000"/>
-            <a:ext cx="950000" cy="950000"/>
-          </a:xfrm>
-          <a:prstGeom prst="roundRect">
-            <a:avLst>
-              <a:gd name="adj" fmla="val 50000"/>
-            </a:avLst>
-          </a:prstGeom>
-          <a:solidFill>
-            <a:srgbClr val="E47932"/>
-          </a:solidFill>
-          <a:ln>
-            <a:noFill/>
-          </a:ln>
-          <a:effectLst/>
-        </p:spPr>
-        <p:style>
-          <a:lnRef idx="1">
-            <a:schemeClr val="accent1"/>
-          </a:lnRef>
-          <a:fillRef idx="3">
-            <a:schemeClr val="accent1"/>
-          </a:fillRef>
-          <a:effectRef idx="2">
-            <a:schemeClr val="accent1"/>
-          </a:effectRef>
-          <a:fontRef idx="minor">
-            <a:schemeClr val="lt1"/>
-          </a:fontRef>
-        </p:style>
-        <p:txBody>
-          <a:bodyPr wrap="square" lIns="45720" tIns="27432" rIns="45720" bIns="27432" rtlCol="0" anchor="ctr"/>
-          <a:lstStyle/>
-          <a:p>
-            <a:pPr algn="ctr"/>
-            <a:r>
-              <a:rPr sz="5400" b="1" i="0">
-                <a:solidFill>
-                  <a:srgbClr val="FFFFFF"/>
-                </a:solidFill>
-                <a:latin typeface="Arial"/>
-              </a:rPr>
-              <a:t>?</a:t>
-            </a:r>
-          </a:p>
-        </p:txBody>
-      </p:sp>
-    </p:spTree>
-  </p:cSld>
-  <p:clrMapOvr>
-    <a:masterClrMapping/>
-  </p:clrMapOvr>
-</p:sld>
-</file>
-
-<file path=ppt/slides/slide2.xml><?xml version="1.0" encoding="utf-8"?>
-<p:sld xmlns:a="http://schemas.openxmlformats.org/drawingml/2006/main" xmlns:r="http://schemas.openxmlformats.org/officeDocument/2006/relationships" xmlns:p="http://schemas.openxmlformats.org/presentationml/2006/main">
-  <p:cSld>
-    <p:spTree>
-      <p:nvGrpSpPr>
-        <p:cNvPr id="1" name=""/>
-        <p:cNvGrpSpPr/>
-        <p:nvPr/>
-      </p:nvGrpSpPr>
-      <p:grpSpPr>
-        <a:xfrm>
-          <a:off x="0" y="0"/>
-          <a:ext cx="0" cy="0"/>
-          <a:chOff x="0" y="0"/>
-          <a:chExt cx="0" cy="0"/>
-        </a:xfrm>
-      </p:grpSpPr>
-      <p:sp>
-        <p:nvSpPr>
-          <p:cNvPr id="2" name="Title 1"/>
-          <p:cNvSpPr>
-            <a:spLocks noGrp="1"/>
-          </p:cNvSpPr>
-          <p:nvPr>
-            <p:ph type="title"/>
-          </p:nvPr>
-        </p:nvSpPr>
-        <p:spPr/>
-        <p:txBody>
-          <a:bodyPr wrap="square"/>
-          <a:lstStyle/>
-          <a:p>
-            <a:pPr algn="l"/>
-            <a:r>
-              <a:rPr sz="2800" b="1" i="0">
-                <a:solidFill>
-                  <a:srgbClr val="202020"/>
-                </a:solidFill>
-                <a:latin typeface="Arial"/>
-              </a:rPr>
-              <a:t>Outline</a:t>
-            </a:r>
-          </a:p>
-        </p:txBody>
-      </p:sp>
-      <p:sp>
-        <p:nvSpPr>
-          <p:cNvPr id="3" name="Text Placeholder 2"/>
-          <p:cNvSpPr>
-            <a:spLocks noGrp="1"/>
-          </p:cNvSpPr>
-          <p:nvPr>
-            <p:ph type="body" idx="1"/>
-          </p:nvPr>
-        </p:nvSpPr>
-        <p:spPr>
-          <a:xfrm>
-            <a:off x="548639" y="1298448"/>
-            <a:ext cx="8146473" cy="3383280"/>
-          </a:xfrm>
-        </p:spPr>
-        <p:txBody>
-          <a:bodyPr wrap="square" lIns="0" tIns="0" rIns="0" bIns="0"/>
-          <a:lstStyle/>
-          <a:p>
-            <a:r>
-              <a:rPr sz="2000" b="0" i="0" dirty="0">
-                <a:solidFill>
-                  <a:srgbClr val="202020"/>
-                </a:solidFill>
-                <a:latin typeface="Arial"/>
-              </a:rPr>
-              <a:t>Recap: the classic defenses raise the bar, but ROP walks past them</a:t>
-            </a:r>
-          </a:p>
-          <a:p>
-            <a:r>
-              <a:rPr sz="2000" b="0" i="0" dirty="0">
-                <a:solidFill>
-                  <a:srgbClr val="202020"/>
-                </a:solidFill>
-                <a:latin typeface="Arial"/>
-              </a:rPr>
-              <a:t>A plan: remove the bug, make hijacking hard, or contain the damage</a:t>
-            </a:r>
-          </a:p>
-          <a:p>
-            <a:r>
-              <a:rPr sz="2000" b="0" i="0" dirty="0">
-                <a:solidFill>
-                  <a:srgbClr val="202020"/>
-                </a:solidFill>
-                <a:latin typeface="Arial"/>
-              </a:rPr>
-              <a:t>Control-flow integrity, shadow stacks, and pointer authentication</a:t>
-            </a:r>
-          </a:p>
-          <a:p>
-            <a:r>
-              <a:rPr sz="2000" b="0" i="0" dirty="0">
-                <a:solidFill>
-                  <a:srgbClr val="202020"/>
-                </a:solidFill>
-                <a:latin typeface="Arial"/>
-              </a:rPr>
-              <a:t>Memory-safe languages, and hardening the C you must keep</a:t>
-            </a:r>
-          </a:p>
-          <a:p>
-            <a:r>
-              <a:rPr sz="2000" b="0" i="0" dirty="0">
-                <a:solidFill>
-                  <a:srgbClr val="202020"/>
-                </a:solidFill>
-                <a:latin typeface="Arial"/>
-              </a:rPr>
-              <a:t>Sandboxing and least privilege: shrinking the blast radius</a:t>
-            </a:r>
-          </a:p>
-          <a:p>
-            <a:r>
-              <a:rPr sz="2000" b="0" i="0" dirty="0">
-                <a:solidFill>
-                  <a:srgbClr val="202020"/>
-                </a:solidFill>
-                <a:latin typeface="Arial"/>
-              </a:rPr>
-              <a:t>Costs, deployment, and what remains open</a:t>
-            </a:r>
-          </a:p>
-        </p:txBody>
-      </p:sp>
-      <p:sp>
-        <p:nvSpPr>
-          <p:cNvPr id="41" name="Google Shape;41;p8"/>
-          <p:cNvSpPr txBox="1">
-            <a:spLocks noGrp="1"/>
-          </p:cNvSpPr>
-          <p:nvPr>
-            <p:ph type="sldNum" idx="12"/>
-          </p:nvPr>
-        </p:nvSpPr>
-        <p:spPr>
-          <a:xfrm>
-            <a:off x="8229600" y="4690872"/>
-            <a:ext cx="548640" cy="274320"/>
-          </a:xfrm>
-          <a:prstGeom prst="rect">
-            <a:avLst/>
-          </a:prstGeom>
-          <a:noFill/>
-          <a:ln>
-            <a:noFill/>
-          </a:ln>
-        </p:spPr>
-        <p:txBody>
-          <a:bodyPr spcFirstLastPara="1" wrap="square" lIns="0" tIns="0" rIns="0" bIns="0" anchor="ctr" anchorCtr="0">
-            <a:noAutofit/>
-          </a:bodyPr>
-          <a:lstStyle/>
-          <a:p>
-            <a:pPr marL="0" lvl="0" indent="0" algn="r" rtl="0">
-              <a:spcBef>
-                <a:spcPts val="0"/>
-              </a:spcBef>
-              <a:spcAft>
-                <a:spcPts val="0"/>
-              </a:spcAft>
-              <a:buClr>
-                <a:srgbClr val="8A8A8A"/>
-              </a:buClr>
-              <a:buSzPts val="1200"/>
-              <a:buFont typeface="Arial"/>
-              <a:buNone/>
-            </a:pPr>
-            <a:fld id="{00000000-1234-1234-1234-123412341234}" type="slidenum">
-              <a:rPr lang="en-US"/>
-              <a:t>2</a:t>
-            </a:fld>
-            <a:endParaRPr/>
-          </a:p>
-        </p:txBody>
-      </p:sp>
-      <p:sp>
-        <p:nvSpPr>
-          <p:cNvPr id="42" name="Rounded Rectangle 41"/>
-          <p:cNvSpPr/>
-          <p:nvPr/>
-        </p:nvSpPr>
-        <p:spPr>
-          <a:xfrm>
-            <a:off x="548640" y="4319258"/>
-            <a:ext cx="2529840" cy="500000"/>
-          </a:xfrm>
-          <a:prstGeom prst="roundRect">
-            <a:avLst>
-              <a:gd name="adj" fmla="val 12000"/>
-            </a:avLst>
-          </a:prstGeom>
-          <a:solidFill>
-            <a:srgbClr val="94B6D2"/>
-          </a:solidFill>
-          <a:ln>
-            <a:noFill/>
-          </a:ln>
-          <a:effectLst/>
-        </p:spPr>
-        <p:style>
-          <a:lnRef idx="1">
-            <a:schemeClr val="accent1"/>
-          </a:lnRef>
-          <a:fillRef idx="3">
-            <a:schemeClr val="accent1"/>
-          </a:fillRef>
-          <a:effectRef idx="2">
-            <a:schemeClr val="accent1"/>
-          </a:effectRef>
-          <a:fontRef idx="minor">
-            <a:schemeClr val="lt1"/>
-          </a:fontRef>
-        </p:style>
-        <p:txBody>
-          <a:bodyPr wrap="square" lIns="45720" tIns="27432" rIns="45720" bIns="27432" rtlCol="0" anchor="ctr"/>
-          <a:lstStyle/>
-          <a:p>
-            <a:pPr algn="ctr"/>
-            <a:r>
-              <a:rPr sz="1300" b="1" i="0" dirty="0">
-                <a:solidFill>
-                  <a:srgbClr val="202020"/>
-                </a:solidFill>
-                <a:latin typeface="Arial"/>
-              </a:rPr>
-              <a:t>Make hijacking hard</a:t>
-            </a:r>
-          </a:p>
-        </p:txBody>
-      </p:sp>
-      <p:sp>
-        <p:nvSpPr>
-          <p:cNvPr id="43" name="Rounded Rectangle 42"/>
-          <p:cNvSpPr/>
-          <p:nvPr/>
-        </p:nvSpPr>
-        <p:spPr>
-          <a:xfrm>
-            <a:off x="3307080" y="4319258"/>
-            <a:ext cx="2529840" cy="500000"/>
-          </a:xfrm>
-          <a:prstGeom prst="roundRect">
-            <a:avLst>
-              <a:gd name="adj" fmla="val 12000"/>
-            </a:avLst>
-          </a:prstGeom>
-          <a:solidFill>
-            <a:srgbClr val="94B6D2"/>
-          </a:solidFill>
-          <a:ln>
-            <a:noFill/>
-          </a:ln>
-          <a:effectLst/>
-        </p:spPr>
-        <p:style>
-          <a:lnRef idx="1">
-            <a:schemeClr val="accent1"/>
-          </a:lnRef>
-          <a:fillRef idx="3">
-            <a:schemeClr val="accent1"/>
-          </a:fillRef>
-          <a:effectRef idx="2">
-            <a:schemeClr val="accent1"/>
-          </a:effectRef>
-          <a:fontRef idx="minor">
-            <a:schemeClr val="lt1"/>
-          </a:fontRef>
-        </p:style>
-        <p:txBody>
-          <a:bodyPr wrap="square" lIns="45720" tIns="27432" rIns="45720" bIns="27432" rtlCol="0" anchor="ctr"/>
-          <a:lstStyle/>
-          <a:p>
-            <a:pPr algn="ctr"/>
-            <a:r>
-              <a:rPr sz="1300" b="1" i="0">
-                <a:solidFill>
-                  <a:srgbClr val="202020"/>
-                </a:solidFill>
-                <a:latin typeface="Arial"/>
-              </a:rPr>
-              <a:t>Remove the bug class</a:t>
-            </a:r>
-          </a:p>
-        </p:txBody>
-      </p:sp>
-      <p:sp>
-        <p:nvSpPr>
-          <p:cNvPr id="44" name="Rounded Rectangle 43"/>
-          <p:cNvSpPr/>
-          <p:nvPr/>
-        </p:nvSpPr>
-        <p:spPr>
-          <a:xfrm>
-            <a:off x="6065520" y="4319258"/>
-            <a:ext cx="2529840" cy="500000"/>
-          </a:xfrm>
-          <a:prstGeom prst="roundRect">
-            <a:avLst>
-              <a:gd name="adj" fmla="val 12000"/>
-            </a:avLst>
-          </a:prstGeom>
-          <a:solidFill>
-            <a:srgbClr val="94B6D2"/>
-          </a:solidFill>
-          <a:ln>
-            <a:noFill/>
-          </a:ln>
-          <a:effectLst/>
-        </p:spPr>
-        <p:style>
-          <a:lnRef idx="1">
-            <a:schemeClr val="accent1"/>
-          </a:lnRef>
-          <a:fillRef idx="3">
-            <a:schemeClr val="accent1"/>
-          </a:fillRef>
-          <a:effectRef idx="2">
-            <a:schemeClr val="accent1"/>
-          </a:effectRef>
-          <a:fontRef idx="minor">
-            <a:schemeClr val="lt1"/>
-          </a:fontRef>
-        </p:style>
-        <p:txBody>
-          <a:bodyPr wrap="square" lIns="45720" tIns="27432" rIns="45720" bIns="27432" rtlCol="0" anchor="ctr"/>
-          <a:lstStyle/>
-          <a:p>
-            <a:pPr algn="ctr"/>
-            <a:r>
-              <a:rPr sz="1300" b="1" i="0">
-                <a:solidFill>
-                  <a:srgbClr val="202020"/>
-                </a:solidFill>
-                <a:latin typeface="Arial"/>
-              </a:rPr>
-              <a:t>Contain the damage</a:t>
-            </a:r>
-          </a:p>
-        </p:txBody>
-      </p:sp>
-    </p:spTree>
-  </p:cSld>
-  <p:clrMapOvr>
-    <a:masterClrMapping/>
-  </p:clrMapOvr>
-</p:sld>
-</file>
-
-<file path=ppt/slides/slide3.xml><?xml version="1.0" encoding="utf-8"?>
-<p:sld xmlns:a="http://schemas.openxmlformats.org/drawingml/2006/main" xmlns:r="http://schemas.openxmlformats.org/officeDocument/2006/relationships" xmlns:p="http://schemas.openxmlformats.org/presentationml/2006/main">
-  <p:cSld>
-    <p:spTree>
-      <p:nvGrpSpPr>
-        <p:cNvPr id="1" name=""/>
-        <p:cNvGrpSpPr/>
-        <p:nvPr/>
-      </p:nvGrpSpPr>
-      <p:grpSpPr>
-        <a:xfrm>
-          <a:off x="0" y="0"/>
-          <a:ext cx="0" cy="0"/>
-          <a:chOff x="0" y="0"/>
-          <a:chExt cx="0" cy="0"/>
-        </a:xfrm>
-      </p:grpSpPr>
-      <p:sp>
-        <p:nvSpPr>
-          <p:cNvPr id="2" name="Title 1"/>
-          <p:cNvSpPr>
-            <a:spLocks noGrp="1"/>
-          </p:cNvSpPr>
-          <p:nvPr>
-            <p:ph type="title"/>
-          </p:nvPr>
-        </p:nvSpPr>
-        <p:spPr/>
-        <p:txBody>
-          <a:bodyPr wrap="square"/>
-          <a:lstStyle/>
-          <a:p>
-            <a:pPr algn="l"/>
-            <a:r>
-              <a:rPr sz="2800" b="1" i="0">
-                <a:solidFill>
-                  <a:srgbClr val="202020"/>
-                </a:solidFill>
-                <a:latin typeface="Arial"/>
-              </a:rPr>
-              <a:t>Recap: Why We Need Stronger Defenses</a:t>
-            </a:r>
-          </a:p>
-        </p:txBody>
-      </p:sp>
-      <p:sp>
-        <p:nvSpPr>
-          <p:cNvPr id="3" name="Text Placeholder 2"/>
-          <p:cNvSpPr>
-            <a:spLocks noGrp="1"/>
-          </p:cNvSpPr>
-          <p:nvPr>
-            <p:ph type="body" idx="1"/>
-          </p:nvPr>
-        </p:nvSpPr>
-        <p:spPr/>
-        <p:txBody>
-          <a:bodyPr wrap="square" lIns="0" tIns="0" rIns="0" bIns="0"/>
-          <a:lstStyle/>
-          <a:p>
-            <a:r>
-              <a:rPr sz="2000" b="0" i="0">
-                <a:solidFill>
-                  <a:srgbClr val="202020"/>
-                </a:solidFill>
-                <a:latin typeface="Arial"/>
-              </a:rPr>
-              <a:t>An exploit must corrupt memory, then hijack control</a:t>
-            </a:r>
-          </a:p>
-          <a:p>
-            <a:r>
-              <a:rPr sz="2000" b="0" i="0">
-                <a:solidFill>
-                  <a:srgbClr val="202020"/>
-                </a:solidFill>
-                <a:latin typeface="Arial"/>
-              </a:rPr>
-              <a:t>Lecture 8's trio raises the bar: canaries, ASLR, DEP / NX</a:t>
-            </a:r>
-          </a:p>
-          <a:p>
-            <a:r>
-              <a:rPr sz="2000" b="0" i="0">
-                <a:solidFill>
-                  <a:srgbClr val="202020"/>
-                </a:solidFill>
-                <a:latin typeface="Arial"/>
-              </a:rPr>
-              <a:t>But each is bypassable; ROP beats NX by reusing code</a:t>
-            </a:r>
-          </a:p>
-          <a:p>
-            <a:r>
-              <a:rPr sz="2000" b="0" i="0">
-                <a:solidFill>
-                  <a:srgbClr val="202020"/>
-                </a:solidFill>
-                <a:latin typeface="Arial"/>
-              </a:rPr>
-              <a:t>We want defenses that are systematic, not just speed bumps</a:t>
-            </a:r>
-          </a:p>
-        </p:txBody>
-      </p:sp>
-      <p:sp>
-        <p:nvSpPr>
-          <p:cNvPr id="41" name="Google Shape;41;p8"/>
-          <p:cNvSpPr txBox="1">
-            <a:spLocks noGrp="1"/>
-          </p:cNvSpPr>
-          <p:nvPr>
-            <p:ph type="sldNum" idx="12"/>
-          </p:nvPr>
-        </p:nvSpPr>
-        <p:spPr>
-          <a:xfrm>
-            <a:off x="8229600" y="4690872"/>
-            <a:ext cx="548640" cy="274320"/>
-          </a:xfrm>
-          <a:prstGeom prst="rect">
-            <a:avLst/>
-          </a:prstGeom>
-          <a:noFill/>
-          <a:ln>
-            <a:noFill/>
-          </a:ln>
-        </p:spPr>
-        <p:txBody>
-          <a:bodyPr spcFirstLastPara="1" wrap="square" lIns="0" tIns="0" rIns="0" bIns="0" anchor="ctr" anchorCtr="0">
-            <a:noAutofit/>
-          </a:bodyPr>
-          <a:lstStyle/>
-          <a:p>
-            <a:pPr marL="0" lvl="0" indent="0" algn="r" rtl="0">
-              <a:spcBef>
-                <a:spcPts val="0"/>
-              </a:spcBef>
-              <a:spcAft>
-                <a:spcPts val="0"/>
-              </a:spcAft>
-              <a:buClr>
-                <a:srgbClr val="8A8A8A"/>
-              </a:buClr>
-              <a:buSzPts val="1200"/>
-              <a:buFont typeface="Arial"/>
-              <a:buNone/>
-            </a:pPr>
-            <a:fld id="{00000000-1234-1234-1234-123412341234}" type="slidenum">
-              <a:rPr lang="en-US"/>
-              <a:t>3</a:t>
-            </a:fld>
-            <a:endParaRPr/>
-          </a:p>
-        </p:txBody>
-      </p:sp>
-      <p:sp>
-        <p:nvSpPr>
-          <p:cNvPr id="42" name="Rectangle 41"/>
-          <p:cNvSpPr/>
-          <p:nvPr/>
-        </p:nvSpPr>
-        <p:spPr>
-          <a:xfrm>
-            <a:off x="900000" y="3650000"/>
-            <a:ext cx="2050000" cy="430000"/>
-          </a:xfrm>
-          <a:prstGeom prst="rect">
-            <a:avLst/>
-          </a:prstGeom>
-          <a:solidFill>
-            <a:srgbClr val="D6E4F0"/>
-          </a:solidFill>
-          <a:ln w="12700">
-            <a:solidFill>
-              <a:srgbClr val="555555"/>
-            </a:solidFill>
-          </a:ln>
-          <a:effectLst/>
-        </p:spPr>
-        <p:style>
-          <a:lnRef idx="1">
-            <a:schemeClr val="accent1"/>
-          </a:lnRef>
-          <a:fillRef idx="3">
-            <a:schemeClr val="accent1"/>
-          </a:fillRef>
-          <a:effectRef idx="2">
-            <a:schemeClr val="accent1"/>
-          </a:effectRef>
-          <a:fontRef idx="minor">
-            <a:schemeClr val="lt1"/>
-          </a:fontRef>
-        </p:style>
-        <p:txBody>
-          <a:bodyPr wrap="square" lIns="45720" tIns="27432" rIns="45720" bIns="27432" rtlCol="0" anchor="ctr"/>
-          <a:lstStyle/>
-          <a:p>
-            <a:pPr algn="ctr"/>
-            <a:r>
-              <a:rPr sz="1200" b="1" i="0">
-                <a:solidFill>
-                  <a:srgbClr val="202020"/>
-                </a:solidFill>
-                <a:latin typeface="Arial"/>
-              </a:rPr>
-              <a:t>Stack canary</a:t>
-            </a:r>
-          </a:p>
-        </p:txBody>
-      </p:sp>
-      <p:sp>
-        <p:nvSpPr>
-          <p:cNvPr id="43" name="TextBox 42"/>
-          <p:cNvSpPr txBox="1"/>
-          <p:nvPr/>
-        </p:nvSpPr>
-        <p:spPr>
-          <a:xfrm>
-            <a:off x="900000" y="4120000"/>
-            <a:ext cx="2050000" cy="240000"/>
-          </a:xfrm>
-          <a:prstGeom prst="rect">
-            <a:avLst/>
-          </a:prstGeom>
-          <a:noFill/>
-        </p:spPr>
-        <p:txBody>
-          <a:bodyPr wrap="square" lIns="0" tIns="0" rIns="0" bIns="0" anchor="t">
-            <a:spAutoFit/>
-          </a:bodyPr>
-          <a:lstStyle/>
-          <a:p>
-            <a:pPr algn="ctr"/>
-            <a:r>
-              <a:rPr sz="1000" b="0" i="1">
-                <a:solidFill>
-                  <a:srgbClr val="C0392B"/>
-                </a:solidFill>
-                <a:latin typeface="Arial"/>
-              </a:rPr>
-              <a:t>guessed or leaked</a:t>
-            </a:r>
-          </a:p>
-        </p:txBody>
-      </p:sp>
-      <p:sp>
-        <p:nvSpPr>
-          <p:cNvPr id="44" name="Rectangle 43"/>
-          <p:cNvSpPr/>
-          <p:nvPr/>
-        </p:nvSpPr>
-        <p:spPr>
-          <a:xfrm>
-            <a:off x="3200000" y="3650000"/>
-            <a:ext cx="2050000" cy="430000"/>
-          </a:xfrm>
-          <a:prstGeom prst="rect">
-            <a:avLst/>
-          </a:prstGeom>
-          <a:solidFill>
-            <a:srgbClr val="D6E4F0"/>
-          </a:solidFill>
-          <a:ln w="12700">
-            <a:solidFill>
-              <a:srgbClr val="555555"/>
-            </a:solidFill>
-          </a:ln>
-          <a:effectLst/>
-        </p:spPr>
-        <p:style>
-          <a:lnRef idx="1">
-            <a:schemeClr val="accent1"/>
-          </a:lnRef>
-          <a:fillRef idx="3">
-            <a:schemeClr val="accent1"/>
-          </a:fillRef>
-          <a:effectRef idx="2">
-            <a:schemeClr val="accent1"/>
-          </a:effectRef>
-          <a:fontRef idx="minor">
-            <a:schemeClr val="lt1"/>
-          </a:fontRef>
-        </p:style>
-        <p:txBody>
-          <a:bodyPr wrap="square" lIns="45720" tIns="27432" rIns="45720" bIns="27432" rtlCol="0" anchor="ctr"/>
-          <a:lstStyle/>
-          <a:p>
-            <a:pPr algn="ctr"/>
-            <a:r>
-              <a:rPr sz="1200" b="1" i="0">
-                <a:solidFill>
-                  <a:srgbClr val="202020"/>
-                </a:solidFill>
-                <a:latin typeface="Arial"/>
-              </a:rPr>
-              <a:t>ASLR</a:t>
-            </a:r>
-          </a:p>
-        </p:txBody>
-      </p:sp>
-      <p:sp>
-        <p:nvSpPr>
-          <p:cNvPr id="45" name="TextBox 44"/>
-          <p:cNvSpPr txBox="1"/>
-          <p:nvPr/>
-        </p:nvSpPr>
-        <p:spPr>
-          <a:xfrm>
-            <a:off x="3200000" y="4120000"/>
-            <a:ext cx="2050000" cy="240000"/>
-          </a:xfrm>
-          <a:prstGeom prst="rect">
-            <a:avLst/>
-          </a:prstGeom>
-          <a:noFill/>
-        </p:spPr>
-        <p:txBody>
-          <a:bodyPr wrap="square" lIns="0" tIns="0" rIns="0" bIns="0" anchor="t">
-            <a:spAutoFit/>
-          </a:bodyPr>
-          <a:lstStyle/>
-          <a:p>
-            <a:pPr algn="ctr"/>
-            <a:r>
-              <a:rPr sz="1000" b="0" i="1">
-                <a:solidFill>
-                  <a:srgbClr val="C0392B"/>
-                </a:solidFill>
-                <a:latin typeface="Arial"/>
-              </a:rPr>
-              <a:t>defeated by a leak</a:t>
-            </a:r>
-          </a:p>
-        </p:txBody>
-      </p:sp>
-      <p:sp>
-        <p:nvSpPr>
-          <p:cNvPr id="46" name="Rectangle 45"/>
-          <p:cNvSpPr/>
-          <p:nvPr/>
-        </p:nvSpPr>
-        <p:spPr>
-          <a:xfrm>
-            <a:off x="5500000" y="3650000"/>
-            <a:ext cx="2050000" cy="430000"/>
-          </a:xfrm>
-          <a:prstGeom prst="rect">
-            <a:avLst/>
-          </a:prstGeom>
-          <a:solidFill>
-            <a:srgbClr val="D6E4F0"/>
-          </a:solidFill>
-          <a:ln w="12700">
-            <a:solidFill>
-              <a:srgbClr val="555555"/>
-            </a:solidFill>
-          </a:ln>
-          <a:effectLst/>
-        </p:spPr>
-        <p:style>
-          <a:lnRef idx="1">
-            <a:schemeClr val="accent1"/>
-          </a:lnRef>
-          <a:fillRef idx="3">
-            <a:schemeClr val="accent1"/>
-          </a:fillRef>
-          <a:effectRef idx="2">
-            <a:schemeClr val="accent1"/>
-          </a:effectRef>
-          <a:fontRef idx="minor">
-            <a:schemeClr val="lt1"/>
-          </a:fontRef>
-        </p:style>
-        <p:txBody>
-          <a:bodyPr wrap="square" lIns="45720" tIns="27432" rIns="45720" bIns="27432" rtlCol="0" anchor="ctr"/>
-          <a:lstStyle/>
-          <a:p>
-            <a:pPr algn="ctr"/>
-            <a:r>
-              <a:rPr sz="1200" b="1" i="0">
-                <a:solidFill>
-                  <a:srgbClr val="202020"/>
-                </a:solidFill>
-                <a:latin typeface="Arial"/>
-              </a:rPr>
-              <a:t>DEP / NX</a:t>
-            </a:r>
-          </a:p>
-        </p:txBody>
-      </p:sp>
-      <p:sp>
-        <p:nvSpPr>
-          <p:cNvPr id="47" name="TextBox 46"/>
-          <p:cNvSpPr txBox="1"/>
-          <p:nvPr/>
-        </p:nvSpPr>
-        <p:spPr>
-          <a:xfrm>
-            <a:off x="5500000" y="4120000"/>
-            <a:ext cx="2050000" cy="240000"/>
-          </a:xfrm>
-          <a:prstGeom prst="rect">
-            <a:avLst/>
-          </a:prstGeom>
-          <a:noFill/>
-        </p:spPr>
-        <p:txBody>
-          <a:bodyPr wrap="square" lIns="0" tIns="0" rIns="0" bIns="0" anchor="t">
-            <a:spAutoFit/>
-          </a:bodyPr>
-          <a:lstStyle/>
-          <a:p>
-            <a:pPr algn="ctr"/>
-            <a:r>
-              <a:rPr sz="1000" b="0" i="1">
-                <a:solidFill>
-                  <a:srgbClr val="C0392B"/>
-                </a:solidFill>
-                <a:latin typeface="Arial"/>
-              </a:rPr>
-              <a:t>bypassed by ROP</a:t>
-            </a:r>
-          </a:p>
-        </p:txBody>
-      </p:sp>
-      <p:sp>
-        <p:nvSpPr>
-          <p:cNvPr id="48" name="TextBox 47"/>
-          <p:cNvSpPr txBox="1"/>
-          <p:nvPr/>
-        </p:nvSpPr>
-        <p:spPr>
-          <a:xfrm>
-            <a:off x="900000" y="4410000"/>
-            <a:ext cx="6600000" cy="260000"/>
-          </a:xfrm>
-          <a:prstGeom prst="rect">
-            <a:avLst/>
-          </a:prstGeom>
-          <a:noFill/>
-        </p:spPr>
-        <p:txBody>
-          <a:bodyPr wrap="square" lIns="0" tIns="0" rIns="0" bIns="0" anchor="t">
-            <a:spAutoFit/>
-          </a:bodyPr>
-          <a:lstStyle/>
-          <a:p>
-            <a:pPr algn="l"/>
-            <a:r>
-              <a:rPr sz="1100" b="0" i="1">
-                <a:solidFill>
-                  <a:srgbClr val="8A8A8A"/>
-                </a:solidFill>
-                <a:latin typeface="Arial"/>
-              </a:rPr>
-              <a:t>Each is a speed bump; together they still fall - so we need stronger, systematic defenses</a:t>
-            </a:r>
-          </a:p>
-        </p:txBody>
-      </p:sp>
-    </p:spTree>
-  </p:cSld>
-  <p:clrMapOvr>
-    <a:masterClrMapping/>
-  </p:clrMapOvr>
-</p:sld>
-</file>
-
-<file path=ppt/slides/slide4.xml><?xml version="1.0" encoding="utf-8"?>
-<p:sld xmlns:a="http://schemas.openxmlformats.org/drawingml/2006/main" xmlns:r="http://schemas.openxmlformats.org/officeDocument/2006/relationships" xmlns:p="http://schemas.openxmlformats.org/presentationml/2006/main">
-  <p:cSld>
-    <p:spTree>
-      <p:nvGrpSpPr>
-        <p:cNvPr id="1" name=""/>
-        <p:cNvGrpSpPr/>
-        <p:nvPr/>
-      </p:nvGrpSpPr>
-      <p:grpSpPr>
-        <a:xfrm>
-          <a:off x="0" y="0"/>
-          <a:ext cx="0" cy="0"/>
-          <a:chOff x="0" y="0"/>
-          <a:chExt cx="0" cy="0"/>
-        </a:xfrm>
-      </p:grpSpPr>
-      <p:sp>
-        <p:nvSpPr>
-          <p:cNvPr id="2" name="Title 1"/>
-          <p:cNvSpPr>
-            <a:spLocks noGrp="1"/>
-          </p:cNvSpPr>
-          <p:nvPr>
-            <p:ph type="title"/>
-          </p:nvPr>
-        </p:nvSpPr>
-        <p:spPr/>
-        <p:txBody>
-          <a:bodyPr wrap="square"/>
-          <a:lstStyle/>
-          <a:p>
-            <a:pPr algn="l"/>
-            <a:r>
-              <a:rPr sz="2800" b="1" i="0">
-                <a:solidFill>
-                  <a:srgbClr val="202020"/>
-                </a:solidFill>
-                <a:latin typeface="Arial"/>
-              </a:rPr>
-              <a:t>Three Lines of Defense</a:t>
-            </a:r>
-          </a:p>
-        </p:txBody>
-      </p:sp>
-      <p:sp>
-        <p:nvSpPr>
-          <p:cNvPr id="3" name="Text Placeholder 2"/>
-          <p:cNvSpPr>
-            <a:spLocks noGrp="1"/>
-          </p:cNvSpPr>
-          <p:nvPr>
-            <p:ph type="body" idx="1"/>
-          </p:nvPr>
-        </p:nvSpPr>
-        <p:spPr/>
-        <p:txBody>
-          <a:bodyPr wrap="square" lIns="0" tIns="0" rIns="0" bIns="0"/>
-          <a:lstStyle/>
-          <a:p>
-            <a:r>
-              <a:rPr sz="2000" b="0" i="0">
-                <a:solidFill>
-                  <a:srgbClr val="202020"/>
-                </a:solidFill>
-                <a:latin typeface="Arial"/>
-              </a:rPr>
-              <a:t>No single mechanism is enough; modern systems layer several</a:t>
-            </a:r>
-          </a:p>
-          <a:p>
-            <a:r>
-              <a:rPr sz="2000" b="0" i="0">
-                <a:solidFill>
-                  <a:srgbClr val="202020"/>
-                </a:solidFill>
-                <a:latin typeface="Arial"/>
-              </a:rPr>
-              <a:t>Each line attacks a different stage of the exploit</a:t>
-            </a:r>
-          </a:p>
-        </p:txBody>
-      </p:sp>
-      <p:sp>
-        <p:nvSpPr>
-          <p:cNvPr id="41" name="Google Shape;41;p8"/>
-          <p:cNvSpPr txBox="1">
-            <a:spLocks noGrp="1"/>
-          </p:cNvSpPr>
-          <p:nvPr>
-            <p:ph type="sldNum" idx="12"/>
-          </p:nvPr>
-        </p:nvSpPr>
-        <p:spPr>
-          <a:xfrm>
-            <a:off x="8229600" y="4690872"/>
-            <a:ext cx="548640" cy="274320"/>
-          </a:xfrm>
-          <a:prstGeom prst="rect">
-            <a:avLst/>
-          </a:prstGeom>
-          <a:noFill/>
-          <a:ln>
-            <a:noFill/>
-          </a:ln>
-        </p:spPr>
-        <p:txBody>
-          <a:bodyPr spcFirstLastPara="1" wrap="square" lIns="0" tIns="0" rIns="0" bIns="0" anchor="ctr" anchorCtr="0">
-            <a:noAutofit/>
-          </a:bodyPr>
-          <a:lstStyle/>
-          <a:p>
-            <a:pPr marL="0" lvl="0" indent="0" algn="r" rtl="0">
-              <a:spcBef>
-                <a:spcPts val="0"/>
-              </a:spcBef>
-              <a:spcAft>
-                <a:spcPts val="0"/>
-              </a:spcAft>
-              <a:buClr>
-                <a:srgbClr val="8A8A8A"/>
-              </a:buClr>
-              <a:buSzPts val="1200"/>
-              <a:buFont typeface="Arial"/>
-              <a:buNone/>
-            </a:pPr>
-            <a:fld id="{00000000-1234-1234-1234-123412341234}" type="slidenum">
-              <a:rPr lang="en-US"/>
-              <a:t>4</a:t>
-            </a:fld>
-            <a:endParaRPr/>
-          </a:p>
-        </p:txBody>
-      </p:sp>
-      <p:sp>
-        <p:nvSpPr>
-          <p:cNvPr id="42" name="Rounded Rectangle 41"/>
-          <p:cNvSpPr/>
-          <p:nvPr/>
-        </p:nvSpPr>
-        <p:spPr>
-          <a:xfrm>
-            <a:off x="620000" y="2620000"/>
-            <a:ext cx="2550000" cy="2050000"/>
-          </a:xfrm>
-          <a:prstGeom prst="roundRect">
-            <a:avLst>
-              <a:gd name="adj" fmla="val 6000"/>
-            </a:avLst>
-          </a:prstGeom>
-          <a:solidFill>
-            <a:srgbClr val="DDEEDD"/>
-          </a:solidFill>
-          <a:ln w="12700">
-            <a:solidFill>
-              <a:srgbClr val="BBBBBB"/>
-            </a:solidFill>
-          </a:ln>
-          <a:effectLst/>
-        </p:spPr>
-        <p:style>
-          <a:lnRef idx="1">
-            <a:schemeClr val="accent1"/>
-          </a:lnRef>
-          <a:fillRef idx="3">
-            <a:schemeClr val="accent1"/>
-          </a:fillRef>
-          <a:effectRef idx="2">
-            <a:schemeClr val="accent1"/>
-          </a:effectRef>
-          <a:fontRef idx="minor">
-            <a:schemeClr val="lt1"/>
-          </a:fontRef>
-        </p:style>
-        <p:txBody>
-          <a:bodyPr rtlCol="0" anchor="ctr"/>
-          <a:lstStyle/>
-          <a:p>
-            <a:pPr algn="ctr"/>
-            <a:endParaRPr/>
-          </a:p>
-        </p:txBody>
-      </p:sp>
-      <p:sp>
-        <p:nvSpPr>
-          <p:cNvPr id="43" name="TextBox 42"/>
-          <p:cNvSpPr txBox="1"/>
-          <p:nvPr/>
-        </p:nvSpPr>
-        <p:spPr>
-          <a:xfrm>
-            <a:off x="780000" y="2710000"/>
-            <a:ext cx="2250000" cy="340000"/>
-          </a:xfrm>
-          <a:prstGeom prst="rect">
-            <a:avLst/>
-          </a:prstGeom>
-          <a:noFill/>
-        </p:spPr>
-        <p:txBody>
-          <a:bodyPr wrap="square" lIns="0" tIns="0" rIns="0" bIns="0" anchor="t">
-            <a:spAutoFit/>
-          </a:bodyPr>
-          <a:lstStyle/>
-          <a:p>
-            <a:pPr algn="l"/>
-            <a:r>
-              <a:rPr sz="1500" b="1" i="0">
-                <a:solidFill>
-                  <a:srgbClr val="2E7D32"/>
-                </a:solidFill>
-                <a:latin typeface="Arial"/>
-              </a:rPr>
-              <a:t>Remove the bug</a:t>
-            </a:r>
-          </a:p>
-        </p:txBody>
-      </p:sp>
-      <p:sp>
-        <p:nvSpPr>
-          <p:cNvPr id="44" name="TextBox 43"/>
-          <p:cNvSpPr txBox="1"/>
-          <p:nvPr/>
-        </p:nvSpPr>
-        <p:spPr>
-          <a:xfrm>
-            <a:off x="790000" y="3120000"/>
-            <a:ext cx="2240000" cy="1480000"/>
-          </a:xfrm>
-          <a:prstGeom prst="rect">
-            <a:avLst/>
-          </a:prstGeom>
-          <a:noFill/>
-        </p:spPr>
-        <p:txBody>
-          <a:bodyPr wrap="square" lIns="0" tIns="0" rIns="0" bIns="0" anchor="t">
-            <a:spAutoFit/>
-          </a:bodyPr>
-          <a:lstStyle/>
-          <a:p>
-            <a:pPr algn="l"/>
-            <a:r>
-              <a:rPr sz="1100" b="0" i="0">
-                <a:solidFill>
-                  <a:srgbClr val="202020"/>
-                </a:solidFill>
-                <a:latin typeface="Arial"/>
-              </a:rPr>
-              <a:t>- Memory-safe languages</a:t>
-            </a:r>
-          </a:p>
-          <a:p>
-            <a:pPr algn="l"/>
-            <a:r>
-              <a:rPr sz="1100" b="0" i="0">
-                <a:solidFill>
-                  <a:srgbClr val="202020"/>
-                </a:solidFill>
-                <a:latin typeface="Arial"/>
-              </a:rPr>
-              <a:t>- Hardened, checked C</a:t>
-            </a:r>
-          </a:p>
-          <a:p>
-            <a:pPr algn="l"/>
-            <a:r>
-              <a:rPr sz="1100" b="0" i="0">
-                <a:solidFill>
-                  <a:srgbClr val="202020"/>
-                </a:solidFill>
-                <a:latin typeface="Arial"/>
-              </a:rPr>
-              <a:t>- Kill the bug class</a:t>
-            </a:r>
-          </a:p>
-        </p:txBody>
-      </p:sp>
-      <p:sp>
-        <p:nvSpPr>
-          <p:cNvPr id="45" name="Rounded Rectangle 44"/>
-          <p:cNvSpPr/>
-          <p:nvPr/>
-        </p:nvSpPr>
-        <p:spPr>
-          <a:xfrm>
-            <a:off x="3300000" y="2620000"/>
-            <a:ext cx="2550000" cy="2050000"/>
-          </a:xfrm>
-          <a:prstGeom prst="roundRect">
-            <a:avLst>
-              <a:gd name="adj" fmla="val 6000"/>
-            </a:avLst>
-          </a:prstGeom>
-          <a:solidFill>
-            <a:srgbClr val="D6E4F0"/>
-          </a:solidFill>
-          <a:ln w="12700">
-            <a:solidFill>
-              <a:srgbClr val="BBBBBB"/>
-            </a:solidFill>
-          </a:ln>
-          <a:effectLst/>
-        </p:spPr>
-        <p:style>
-          <a:lnRef idx="1">
-            <a:schemeClr val="accent1"/>
-          </a:lnRef>
-          <a:fillRef idx="3">
-            <a:schemeClr val="accent1"/>
-          </a:fillRef>
-          <a:effectRef idx="2">
-            <a:schemeClr val="accent1"/>
-          </a:effectRef>
-          <a:fontRef idx="minor">
-            <a:schemeClr val="lt1"/>
-          </a:fontRef>
-        </p:style>
-        <p:txBody>
-          <a:bodyPr rtlCol="0" anchor="ctr"/>
-          <a:lstStyle/>
-          <a:p>
-            <a:pPr algn="ctr"/>
-            <a:endParaRPr/>
-          </a:p>
-        </p:txBody>
-      </p:sp>
-      <p:sp>
-        <p:nvSpPr>
-          <p:cNvPr id="46" name="TextBox 45"/>
-          <p:cNvSpPr txBox="1"/>
-          <p:nvPr/>
-        </p:nvSpPr>
-        <p:spPr>
-          <a:xfrm>
-            <a:off x="3460000" y="2710000"/>
-            <a:ext cx="2250000" cy="340000"/>
-          </a:xfrm>
-          <a:prstGeom prst="rect">
-            <a:avLst/>
-          </a:prstGeom>
-          <a:noFill/>
-        </p:spPr>
-        <p:txBody>
-          <a:bodyPr wrap="square" lIns="0" tIns="0" rIns="0" bIns="0" anchor="t">
-            <a:spAutoFit/>
-          </a:bodyPr>
-          <a:lstStyle/>
-          <a:p>
-            <a:pPr algn="l"/>
-            <a:r>
-              <a:rPr sz="1500" b="1" i="0">
-                <a:solidFill>
-                  <a:srgbClr val="94B6D2"/>
-                </a:solidFill>
-                <a:latin typeface="Arial"/>
-              </a:rPr>
-              <a:t>Make hijacking hard</a:t>
-            </a:r>
-          </a:p>
-        </p:txBody>
-      </p:sp>
-      <p:sp>
-        <p:nvSpPr>
-          <p:cNvPr id="47" name="TextBox 46"/>
-          <p:cNvSpPr txBox="1"/>
-          <p:nvPr/>
-        </p:nvSpPr>
-        <p:spPr>
-          <a:xfrm>
-            <a:off x="3470000" y="3120000"/>
-            <a:ext cx="2240000" cy="1480000"/>
-          </a:xfrm>
-          <a:prstGeom prst="rect">
-            <a:avLst/>
-          </a:prstGeom>
-          <a:noFill/>
-        </p:spPr>
-        <p:txBody>
-          <a:bodyPr wrap="square" lIns="0" tIns="0" rIns="0" bIns="0" anchor="t">
-            <a:spAutoFit/>
-          </a:bodyPr>
-          <a:lstStyle/>
-          <a:p>
-            <a:pPr algn="l"/>
-            <a:r>
-              <a:rPr sz="1100" b="0" i="0">
-                <a:solidFill>
-                  <a:srgbClr val="202020"/>
-                </a:solidFill>
-                <a:latin typeface="Arial"/>
-              </a:rPr>
-              <a:t>- Control-flow integrity</a:t>
-            </a:r>
-          </a:p>
-          <a:p>
-            <a:pPr algn="l"/>
-            <a:r>
-              <a:rPr sz="1100" b="0" i="0">
-                <a:solidFill>
-                  <a:srgbClr val="202020"/>
-                </a:solidFill>
-                <a:latin typeface="Arial"/>
-              </a:rPr>
-              <a:t>- Shadow stacks</a:t>
-            </a:r>
-          </a:p>
-          <a:p>
-            <a:pPr algn="l"/>
-            <a:r>
-              <a:rPr sz="1100" b="0" i="0">
-                <a:solidFill>
-                  <a:srgbClr val="202020"/>
-                </a:solidFill>
-                <a:latin typeface="Arial"/>
-              </a:rPr>
-              <a:t>- Pointer authentication</a:t>
-            </a:r>
-          </a:p>
-        </p:txBody>
-      </p:sp>
-      <p:sp>
-        <p:nvSpPr>
-          <p:cNvPr id="48" name="Rounded Rectangle 47"/>
-          <p:cNvSpPr/>
-          <p:nvPr/>
-        </p:nvSpPr>
-        <p:spPr>
-          <a:xfrm>
-            <a:off x="5980000" y="2620000"/>
-            <a:ext cx="2550000" cy="2050000"/>
-          </a:xfrm>
-          <a:prstGeom prst="roundRect">
-            <a:avLst>
-              <a:gd name="adj" fmla="val 6000"/>
-            </a:avLst>
-          </a:prstGeom>
-          <a:solidFill>
-            <a:srgbClr val="F6D8C4"/>
-          </a:solidFill>
-          <a:ln w="12700">
-            <a:solidFill>
-              <a:srgbClr val="BBBBBB"/>
-            </a:solidFill>
-          </a:ln>
-          <a:effectLst/>
-        </p:spPr>
-        <p:style>
-          <a:lnRef idx="1">
-            <a:schemeClr val="accent1"/>
-          </a:lnRef>
-          <a:fillRef idx="3">
-            <a:schemeClr val="accent1"/>
-          </a:fillRef>
-          <a:effectRef idx="2">
-            <a:schemeClr val="accent1"/>
-          </a:effectRef>
-          <a:fontRef idx="minor">
-            <a:schemeClr val="lt1"/>
-          </a:fontRef>
-        </p:style>
-        <p:txBody>
-          <a:bodyPr rtlCol="0" anchor="ctr"/>
-          <a:lstStyle/>
-          <a:p>
-            <a:pPr algn="ctr"/>
-            <a:endParaRPr/>
-          </a:p>
-        </p:txBody>
-      </p:sp>
-      <p:sp>
-        <p:nvSpPr>
-          <p:cNvPr id="49" name="TextBox 48"/>
-          <p:cNvSpPr txBox="1"/>
-          <p:nvPr/>
-        </p:nvSpPr>
-        <p:spPr>
-          <a:xfrm>
-            <a:off x="6140000" y="2710000"/>
-            <a:ext cx="2250000" cy="340000"/>
-          </a:xfrm>
-          <a:prstGeom prst="rect">
-            <a:avLst/>
-          </a:prstGeom>
-          <a:noFill/>
-        </p:spPr>
-        <p:txBody>
-          <a:bodyPr wrap="square" lIns="0" tIns="0" rIns="0" bIns="0" anchor="t">
-            <a:spAutoFit/>
-          </a:bodyPr>
-          <a:lstStyle/>
-          <a:p>
-            <a:pPr algn="l"/>
-            <a:r>
-              <a:rPr sz="1500" b="1" i="0">
-                <a:solidFill>
-                  <a:srgbClr val="E47932"/>
-                </a:solidFill>
-                <a:latin typeface="Arial"/>
-              </a:rPr>
-              <a:t>Contain the damage</a:t>
-            </a:r>
-          </a:p>
-        </p:txBody>
-      </p:sp>
-      <p:sp>
-        <p:nvSpPr>
-          <p:cNvPr id="50" name="TextBox 49"/>
-          <p:cNvSpPr txBox="1"/>
-          <p:nvPr/>
-        </p:nvSpPr>
-        <p:spPr>
-          <a:xfrm>
-            <a:off x="6150000" y="3120000"/>
-            <a:ext cx="2240000" cy="1480000"/>
-          </a:xfrm>
-          <a:prstGeom prst="rect">
-            <a:avLst/>
-          </a:prstGeom>
-          <a:noFill/>
-        </p:spPr>
-        <p:txBody>
-          <a:bodyPr wrap="square" lIns="0" tIns="0" rIns="0" bIns="0" anchor="t">
-            <a:spAutoFit/>
-          </a:bodyPr>
-          <a:lstStyle/>
-          <a:p>
-            <a:pPr algn="l"/>
-            <a:r>
-              <a:rPr sz="1100" b="0" i="0">
-                <a:solidFill>
-                  <a:srgbClr val="202020"/>
-                </a:solidFill>
-                <a:latin typeface="Arial"/>
-              </a:rPr>
-              <a:t>- Sandboxing</a:t>
-            </a:r>
-          </a:p>
-          <a:p>
-            <a:pPr algn="l"/>
-            <a:r>
-              <a:rPr sz="1100" b="0" i="0">
-                <a:solidFill>
-                  <a:srgbClr val="202020"/>
-                </a:solidFill>
-                <a:latin typeface="Arial"/>
-              </a:rPr>
-              <a:t>- Least privilege</a:t>
-            </a:r>
-          </a:p>
-          <a:p>
-            <a:pPr algn="l"/>
-            <a:r>
-              <a:rPr sz="1100" b="0" i="0">
-                <a:solidFill>
-                  <a:srgbClr val="202020"/>
-                </a:solidFill>
-                <a:latin typeface="Arial"/>
-              </a:rPr>
-              <a:t>- Shrink the blast radius</a:t>
+              <a:t>- Precise, but costs more</a:t>
             </a:r>
           </a:p>
         </p:txBody>
@@ -8782,33 +5806,2692 @@
                       </p:childTnLst>
                     </p:cTn>
                   </p:par>
+                </p:childTnLst>
+              </p:cTn>
+              <p:prevCondLst>
+                <p:cond evt="onPrev" delay="0">
+                  <p:tgtEl>
+                    <p:sldTgt/>
+                  </p:tgtEl>
+                </p:cond>
+              </p:prevCondLst>
+              <p:nextCondLst>
+                <p:cond evt="onNext" delay="0">
+                  <p:tgtEl>
+                    <p:sldTgt/>
+                  </p:tgtEl>
+                </p:cond>
+              </p:nextCondLst>
+            </p:seq>
+          </p:childTnLst>
+        </p:cTn>
+      </p:par>
+    </p:tnLst>
+  </p:timing>
+</p:sld>
+</file>
+
+<file path=ppt/slides/slide12.xml><?xml version="1.0" encoding="utf-8"?>
+<p:sld xmlns:a="http://schemas.openxmlformats.org/drawingml/2006/main" xmlns:r="http://schemas.openxmlformats.org/officeDocument/2006/relationships" xmlns:p="http://schemas.openxmlformats.org/presentationml/2006/main">
+  <p:cSld>
+    <p:spTree>
+      <p:nvGrpSpPr>
+        <p:cNvPr id="1" name=""/>
+        <p:cNvGrpSpPr/>
+        <p:nvPr/>
+      </p:nvGrpSpPr>
+      <p:grpSpPr>
+        <a:xfrm>
+          <a:off x="0" y="0"/>
+          <a:ext cx="0" cy="0"/>
+          <a:chOff x="0" y="0"/>
+          <a:chExt cx="0" cy="0"/>
+        </a:xfrm>
+      </p:grpSpPr>
+      <p:sp>
+        <p:nvSpPr>
+          <p:cNvPr id="2" name="Title 1"/>
+          <p:cNvSpPr>
+            <a:spLocks noGrp="1"/>
+          </p:cNvSpPr>
+          <p:nvPr>
+            <p:ph type="title"/>
+          </p:nvPr>
+        </p:nvSpPr>
+        <p:spPr>
+          <a:xfrm>
+            <a:off x="534300" y="224048"/>
+            <a:ext cx="8046720" cy="685800"/>
+          </a:xfrm>
+        </p:spPr>
+        <p:txBody>
+          <a:bodyPr wrap="square"/>
+          <a:lstStyle/>
+          <a:p>
+            <a:pPr algn="l"/>
+            <a:r>
+              <a:rPr sz="2800" b="1" i="0">
+                <a:solidFill>
+                  <a:srgbClr val="202020"/>
+                </a:solidFill>
+                <a:latin typeface="Arial"/>
+              </a:rPr>
+              <a:t>CFI Is Not a Complete Fix</a:t>
+            </a:r>
+          </a:p>
+        </p:txBody>
+      </p:sp>
+      <p:sp>
+        <p:nvSpPr>
+          <p:cNvPr id="3" name="Text Placeholder 2"/>
+          <p:cNvSpPr>
+            <a:spLocks noGrp="1"/>
+          </p:cNvSpPr>
+          <p:nvPr>
+            <p:ph type="body" idx="1"/>
+          </p:nvPr>
+        </p:nvSpPr>
+        <p:spPr>
+          <a:xfrm>
+            <a:off x="420000" y="1298448"/>
+            <a:ext cx="8046720" cy="3383280"/>
+          </a:xfrm>
+        </p:spPr>
+        <p:txBody>
+          <a:bodyPr wrap="square" lIns="0" tIns="0" rIns="0" bIns="0"/>
+          <a:lstStyle/>
+          <a:p>
+            <a:r>
+              <a:rPr sz="2000" b="0" i="0">
+                <a:solidFill>
+                  <a:srgbClr val="202020"/>
+                </a:solidFill>
+                <a:latin typeface="Arial"/>
+              </a:rPr>
+              <a:t>CFI cannot stop attacks that only use legal control flows</a:t>
+            </a:r>
+          </a:p>
+          <a:p>
+            <a:r>
+              <a:rPr sz="2000" b="0" i="0">
+                <a:solidFill>
+                  <a:srgbClr val="202020"/>
+                </a:solidFill>
+                <a:latin typeface="Arial"/>
+              </a:rPr>
+              <a:t>Example: corrupt a data pointer, not a code pointer - control flow stays valid</a:t>
+            </a:r>
+          </a:p>
+          <a:p>
+            <a:r>
+              <a:rPr sz="2000" b="0" i="0">
+                <a:solidFill>
+                  <a:srgbClr val="202020"/>
+                </a:solidFill>
+                <a:latin typeface="Arial"/>
+              </a:rPr>
+              <a:t>Enforcement has overhead, so deployed CFI is often coarse and looser</a:t>
+            </a:r>
+          </a:p>
+          <a:p>
+            <a:r>
+              <a:rPr sz="2000" b="0" i="0">
+                <a:solidFill>
+                  <a:srgbClr val="202020"/>
+                </a:solidFill>
+                <a:latin typeface="Arial"/>
+              </a:rPr>
+              <a:t>So CFI raises the bar a lot, but is best paired with removing the bug itself</a:t>
+            </a:r>
+          </a:p>
+        </p:txBody>
+      </p:sp>
+      <p:sp>
+        <p:nvSpPr>
+          <p:cNvPr id="41" name="Google Shape;41;p8"/>
+          <p:cNvSpPr txBox="1">
+            <a:spLocks noGrp="1"/>
+          </p:cNvSpPr>
+          <p:nvPr>
+            <p:ph type="sldNum" idx="12"/>
+          </p:nvPr>
+        </p:nvSpPr>
+        <p:spPr>
+          <a:xfrm>
+            <a:off x="8229600" y="4690872"/>
+            <a:ext cx="548640" cy="274320"/>
+          </a:xfrm>
+          <a:prstGeom prst="rect">
+            <a:avLst/>
+          </a:prstGeom>
+          <a:noFill/>
+          <a:ln>
+            <a:noFill/>
+          </a:ln>
+        </p:spPr>
+        <p:txBody>
+          <a:bodyPr spcFirstLastPara="1" wrap="square" lIns="0" tIns="0" rIns="0" bIns="0" anchor="ctr" anchorCtr="0">
+            <a:noAutofit/>
+          </a:bodyPr>
+          <a:lstStyle/>
+          <a:p>
+            <a:pPr marL="0" lvl="0" indent="0" algn="r" rtl="0">
+              <a:spcBef>
+                <a:spcPts val="0"/>
+              </a:spcBef>
+              <a:spcAft>
+                <a:spcPts val="0"/>
+              </a:spcAft>
+              <a:buClr>
+                <a:srgbClr val="8A8A8A"/>
+              </a:buClr>
+              <a:buSzPts val="1200"/>
+              <a:buFont typeface="Arial"/>
+              <a:buNone/>
+            </a:pPr>
+            <a:fld id="{00000000-1234-1234-1234-123412341234}" type="slidenum">
+              <a:rPr lang="en-US"/>
+              <a:t>12</a:t>
+            </a:fld>
+            <a:endParaRPr/>
+          </a:p>
+        </p:txBody>
+      </p:sp>
+    </p:spTree>
+  </p:cSld>
+  <p:clrMapOvr>
+    <a:masterClrMapping/>
+  </p:clrMapOvr>
+</p:sld>
+</file>
+
+<file path=ppt/slides/slide13.xml><?xml version="1.0" encoding="utf-8"?>
+<p:sld xmlns:a="http://schemas.openxmlformats.org/drawingml/2006/main" xmlns:r="http://schemas.openxmlformats.org/officeDocument/2006/relationships" xmlns:p="http://schemas.openxmlformats.org/presentationml/2006/main">
+  <p:cSld>
+    <p:spTree>
+      <p:nvGrpSpPr>
+        <p:cNvPr id="1" name=""/>
+        <p:cNvGrpSpPr/>
+        <p:nvPr/>
+      </p:nvGrpSpPr>
+      <p:grpSpPr>
+        <a:xfrm>
+          <a:off x="0" y="0"/>
+          <a:ext cx="0" cy="0"/>
+          <a:chOff x="0" y="0"/>
+          <a:chExt cx="0" cy="0"/>
+        </a:xfrm>
+      </p:grpSpPr>
+      <p:sp>
+        <p:nvSpPr>
+          <p:cNvPr id="2" name="Title 1"/>
+          <p:cNvSpPr>
+            <a:spLocks noGrp="1"/>
+          </p:cNvSpPr>
+          <p:nvPr>
+            <p:ph type="title"/>
+          </p:nvPr>
+        </p:nvSpPr>
+        <p:spPr>
+          <a:xfrm>
+            <a:off x="534300" y="1965960"/>
+            <a:ext cx="8046720" cy="822960"/>
+          </a:xfrm>
+        </p:spPr>
+        <p:txBody>
+          <a:bodyPr/>
+          <a:lstStyle/>
+          <a:p>
+            <a:r>
+              <a:rPr sz="2600" b="1" i="0">
+                <a:solidFill>
+                  <a:srgbClr val="202020"/>
+                </a:solidFill>
+                <a:latin typeface="Arial"/>
+              </a:rPr>
+              <a:t>Remove the Bug Class</a:t>
+            </a:r>
+          </a:p>
+        </p:txBody>
+      </p:sp>
+      <p:sp>
+        <p:nvSpPr>
+          <p:cNvPr id="3" name="Text Placeholder 2"/>
+          <p:cNvSpPr>
+            <a:spLocks noGrp="1"/>
+          </p:cNvSpPr>
+          <p:nvPr>
+            <p:ph type="body" idx="1"/>
+          </p:nvPr>
+        </p:nvSpPr>
+        <p:spPr>
+          <a:xfrm>
+            <a:off x="534300" y="2761488"/>
+            <a:ext cx="8046720" cy="457200"/>
+          </a:xfrm>
+        </p:spPr>
+        <p:txBody>
+          <a:bodyPr/>
+          <a:lstStyle/>
+          <a:p>
+            <a:r>
+              <a:rPr sz="1800" b="1" i="0">
+                <a:solidFill>
+                  <a:srgbClr val="E47932"/>
+                </a:solidFill>
+                <a:latin typeface="Arial"/>
+              </a:rPr>
+              <a:t>Safe languages, and how C itself is getting safer</a:t>
+            </a:r>
+          </a:p>
+        </p:txBody>
+      </p:sp>
+      <p:sp>
+        <p:nvSpPr>
+          <p:cNvPr id="41" name="Google Shape;41;p8"/>
+          <p:cNvSpPr txBox="1">
+            <a:spLocks noGrp="1"/>
+          </p:cNvSpPr>
+          <p:nvPr>
+            <p:ph type="sldNum" idx="12"/>
+          </p:nvPr>
+        </p:nvSpPr>
+        <p:spPr>
+          <a:xfrm>
+            <a:off x="8229600" y="4690872"/>
+            <a:ext cx="548640" cy="274320"/>
+          </a:xfrm>
+          <a:prstGeom prst="rect">
+            <a:avLst/>
+          </a:prstGeom>
+          <a:noFill/>
+          <a:ln>
+            <a:noFill/>
+          </a:ln>
+        </p:spPr>
+        <p:txBody>
+          <a:bodyPr spcFirstLastPara="1" wrap="square" lIns="0" tIns="0" rIns="0" bIns="0" anchor="ctr" anchorCtr="0">
+            <a:noAutofit/>
+          </a:bodyPr>
+          <a:lstStyle/>
+          <a:p>
+            <a:pPr marL="0" lvl="0" indent="0" algn="r" rtl="0">
+              <a:spcBef>
+                <a:spcPts val="0"/>
+              </a:spcBef>
+              <a:spcAft>
+                <a:spcPts val="0"/>
+              </a:spcAft>
+              <a:buClr>
+                <a:srgbClr val="8A8A8A"/>
+              </a:buClr>
+              <a:buSzPts val="1200"/>
+              <a:buFont typeface="Arial"/>
+              <a:buNone/>
+            </a:pPr>
+            <a:fld id="{00000000-1234-1234-1234-123412341234}" type="slidenum">
+              <a:rPr lang="en-US"/>
+              <a:t>13</a:t>
+            </a:fld>
+            <a:endParaRPr/>
+          </a:p>
+        </p:txBody>
+      </p:sp>
+    </p:spTree>
+  </p:cSld>
+  <p:clrMapOvr>
+    <a:masterClrMapping/>
+  </p:clrMapOvr>
+</p:sld>
+</file>
+
+<file path=ppt/slides/slide14.xml><?xml version="1.0" encoding="utf-8"?>
+<p:sld xmlns:a="http://schemas.openxmlformats.org/drawingml/2006/main" xmlns:r="http://schemas.openxmlformats.org/officeDocument/2006/relationships" xmlns:p="http://schemas.openxmlformats.org/presentationml/2006/main">
+  <p:cSld>
+    <p:spTree>
+      <p:nvGrpSpPr>
+        <p:cNvPr id="1" name=""/>
+        <p:cNvGrpSpPr/>
+        <p:nvPr/>
+      </p:nvGrpSpPr>
+      <p:grpSpPr>
+        <a:xfrm>
+          <a:off x="0" y="0"/>
+          <a:ext cx="0" cy="0"/>
+          <a:chOff x="0" y="0"/>
+          <a:chExt cx="0" cy="0"/>
+        </a:xfrm>
+      </p:grpSpPr>
+      <p:sp>
+        <p:nvSpPr>
+          <p:cNvPr id="2" name="Title 1"/>
+          <p:cNvSpPr>
+            <a:spLocks noGrp="1"/>
+          </p:cNvSpPr>
+          <p:nvPr>
+            <p:ph type="title"/>
+          </p:nvPr>
+        </p:nvSpPr>
+        <p:spPr>
+          <a:xfrm>
+            <a:off x="534300" y="224048"/>
+            <a:ext cx="8046720" cy="685800"/>
+          </a:xfrm>
+        </p:spPr>
+        <p:txBody>
+          <a:bodyPr wrap="square"/>
+          <a:lstStyle/>
+          <a:p>
+            <a:pPr algn="l"/>
+            <a:r>
+              <a:rPr sz="2800" b="1" i="0">
+                <a:solidFill>
+                  <a:srgbClr val="202020"/>
+                </a:solidFill>
+                <a:latin typeface="Arial"/>
+              </a:rPr>
+              <a:t>Why Not Use Safe Languages?</a:t>
+            </a:r>
+          </a:p>
+        </p:txBody>
+      </p:sp>
+      <p:sp>
+        <p:nvSpPr>
+          <p:cNvPr id="3" name="Text Placeholder 2"/>
+          <p:cNvSpPr>
+            <a:spLocks noGrp="1"/>
+          </p:cNvSpPr>
+          <p:nvPr>
+            <p:ph type="body" idx="1"/>
+          </p:nvPr>
+        </p:nvSpPr>
+        <p:spPr>
+          <a:xfrm>
+            <a:off x="420000" y="1298448"/>
+            <a:ext cx="8046720" cy="3383280"/>
+          </a:xfrm>
+        </p:spPr>
+        <p:txBody>
+          <a:bodyPr wrap="square" lIns="0" tIns="0" rIns="0" bIns="0"/>
+          <a:lstStyle/>
+          <a:p>
+            <a:r>
+              <a:rPr sz="2000" b="0" i="0">
+                <a:solidFill>
+                  <a:srgbClr val="202020"/>
+                </a:solidFill>
+                <a:latin typeface="Arial"/>
+              </a:rPr>
+              <a:t>A type-safe language cannot have memory errors: Java, and more recently Rust</a:t>
+            </a:r>
+          </a:p>
+          <a:p>
+            <a:r>
+              <a:rPr sz="2000" b="0" i="0">
+                <a:solidFill>
+                  <a:srgbClr val="202020"/>
+                </a:solidFill>
+                <a:latin typeface="Arial"/>
+              </a:rPr>
+              <a:t>Safe with respect to three properties: spatial, temporal, and type</a:t>
+            </a:r>
+          </a:p>
+          <a:p>
+            <a:r>
+              <a:rPr sz="2000" b="0" i="0">
+                <a:solidFill>
+                  <a:srgbClr val="202020"/>
+                </a:solidFill>
+                <a:latin typeface="Arial"/>
+              </a:rPr>
+              <a:t>Rust: ownership gives temporal safety; the type system is enforced; bounds checked</a:t>
+            </a:r>
+          </a:p>
+          <a:p>
+            <a:r>
+              <a:rPr sz="2000" b="0" i="0">
+                <a:solidFill>
+                  <a:srgbClr val="202020"/>
+                </a:solidFill>
+                <a:latin typeface="Arial"/>
+              </a:rPr>
+              <a:t>Trade-offs are usability and performance - which is why C/C++ persisted</a:t>
+            </a:r>
+          </a:p>
+        </p:txBody>
+      </p:sp>
+      <p:sp>
+        <p:nvSpPr>
+          <p:cNvPr id="41" name="Google Shape;41;p8"/>
+          <p:cNvSpPr txBox="1">
+            <a:spLocks noGrp="1"/>
+          </p:cNvSpPr>
+          <p:nvPr>
+            <p:ph type="sldNum" idx="12"/>
+          </p:nvPr>
+        </p:nvSpPr>
+        <p:spPr>
+          <a:xfrm>
+            <a:off x="8229600" y="4690872"/>
+            <a:ext cx="548640" cy="274320"/>
+          </a:xfrm>
+          <a:prstGeom prst="rect">
+            <a:avLst/>
+          </a:prstGeom>
+          <a:noFill/>
+          <a:ln>
+            <a:noFill/>
+          </a:ln>
+        </p:spPr>
+        <p:txBody>
+          <a:bodyPr spcFirstLastPara="1" wrap="square" lIns="0" tIns="0" rIns="0" bIns="0" anchor="ctr" anchorCtr="0">
+            <a:noAutofit/>
+          </a:bodyPr>
+          <a:lstStyle/>
+          <a:p>
+            <a:pPr marL="0" lvl="0" indent="0" algn="r" rtl="0">
+              <a:spcBef>
+                <a:spcPts val="0"/>
+              </a:spcBef>
+              <a:spcAft>
+                <a:spcPts val="0"/>
+              </a:spcAft>
+              <a:buClr>
+                <a:srgbClr val="8A8A8A"/>
+              </a:buClr>
+              <a:buSzPts val="1200"/>
+              <a:buFont typeface="Arial"/>
+              <a:buNone/>
+            </a:pPr>
+            <a:fld id="{00000000-1234-1234-1234-123412341234}" type="slidenum">
+              <a:rPr lang="en-US"/>
+              <a:t>14</a:t>
+            </a:fld>
+            <a:endParaRPr/>
+          </a:p>
+        </p:txBody>
+      </p:sp>
+      <p:sp>
+        <p:nvSpPr>
+          <p:cNvPr id="42" name="Rectangle 41"/>
+          <p:cNvSpPr/>
+          <p:nvPr/>
+        </p:nvSpPr>
+        <p:spPr>
+          <a:xfrm>
+            <a:off x="1200000" y="3800000"/>
+            <a:ext cx="1900000" cy="460000"/>
+          </a:xfrm>
+          <a:prstGeom prst="rect">
+            <a:avLst/>
+          </a:prstGeom>
+          <a:solidFill>
+            <a:srgbClr val="DDEEDD"/>
+          </a:solidFill>
+          <a:ln w="12700">
+            <a:solidFill>
+              <a:srgbClr val="555555"/>
+            </a:solidFill>
+          </a:ln>
+          <a:effectLst/>
+        </p:spPr>
+        <p:style>
+          <a:lnRef idx="1">
+            <a:schemeClr val="accent1"/>
+          </a:lnRef>
+          <a:fillRef idx="3">
+            <a:schemeClr val="accent1"/>
+          </a:fillRef>
+          <a:effectRef idx="2">
+            <a:schemeClr val="accent1"/>
+          </a:effectRef>
+          <a:fontRef idx="minor">
+            <a:schemeClr val="lt1"/>
+          </a:fontRef>
+        </p:style>
+        <p:txBody>
+          <a:bodyPr wrap="square" lIns="45720" tIns="27432" rIns="45720" bIns="27432" rtlCol="0" anchor="ctr"/>
+          <a:lstStyle/>
+          <a:p>
+            <a:pPr algn="ctr"/>
+            <a:r>
+              <a:rPr sz="1200" b="1" i="0">
+                <a:solidFill>
+                  <a:srgbClr val="202020"/>
+                </a:solidFill>
+                <a:latin typeface="Arial"/>
+              </a:rPr>
+              <a:t>spatial safety</a:t>
+            </a:r>
+          </a:p>
+        </p:txBody>
+      </p:sp>
+      <p:sp>
+        <p:nvSpPr>
+          <p:cNvPr id="43" name="Rectangle 42"/>
+          <p:cNvSpPr/>
+          <p:nvPr/>
+        </p:nvSpPr>
+        <p:spPr>
+          <a:xfrm>
+            <a:off x="3400000" y="3800000"/>
+            <a:ext cx="1900000" cy="460000"/>
+          </a:xfrm>
+          <a:prstGeom prst="rect">
+            <a:avLst/>
+          </a:prstGeom>
+          <a:solidFill>
+            <a:srgbClr val="DDEEDD"/>
+          </a:solidFill>
+          <a:ln w="12700">
+            <a:solidFill>
+              <a:srgbClr val="555555"/>
+            </a:solidFill>
+          </a:ln>
+          <a:effectLst/>
+        </p:spPr>
+        <p:style>
+          <a:lnRef idx="1">
+            <a:schemeClr val="accent1"/>
+          </a:lnRef>
+          <a:fillRef idx="3">
+            <a:schemeClr val="accent1"/>
+          </a:fillRef>
+          <a:effectRef idx="2">
+            <a:schemeClr val="accent1"/>
+          </a:effectRef>
+          <a:fontRef idx="minor">
+            <a:schemeClr val="lt1"/>
+          </a:fontRef>
+        </p:style>
+        <p:txBody>
+          <a:bodyPr wrap="square" lIns="45720" tIns="27432" rIns="45720" bIns="27432" rtlCol="0" anchor="ctr"/>
+          <a:lstStyle/>
+          <a:p>
+            <a:pPr algn="ctr"/>
+            <a:r>
+              <a:rPr sz="1200" b="1" i="0">
+                <a:solidFill>
+                  <a:srgbClr val="202020"/>
+                </a:solidFill>
+                <a:latin typeface="Arial"/>
+              </a:rPr>
+              <a:t>temporal safety</a:t>
+            </a:r>
+          </a:p>
+        </p:txBody>
+      </p:sp>
+      <p:sp>
+        <p:nvSpPr>
+          <p:cNvPr id="44" name="Rectangle 43"/>
+          <p:cNvSpPr/>
+          <p:nvPr/>
+        </p:nvSpPr>
+        <p:spPr>
+          <a:xfrm>
+            <a:off x="5600000" y="3800000"/>
+            <a:ext cx="1900000" cy="460000"/>
+          </a:xfrm>
+          <a:prstGeom prst="rect">
+            <a:avLst/>
+          </a:prstGeom>
+          <a:solidFill>
+            <a:srgbClr val="DDEEDD"/>
+          </a:solidFill>
+          <a:ln w="12700">
+            <a:solidFill>
+              <a:srgbClr val="555555"/>
+            </a:solidFill>
+          </a:ln>
+          <a:effectLst/>
+        </p:spPr>
+        <p:style>
+          <a:lnRef idx="1">
+            <a:schemeClr val="accent1"/>
+          </a:lnRef>
+          <a:fillRef idx="3">
+            <a:schemeClr val="accent1"/>
+          </a:fillRef>
+          <a:effectRef idx="2">
+            <a:schemeClr val="accent1"/>
+          </a:effectRef>
+          <a:fontRef idx="minor">
+            <a:schemeClr val="lt1"/>
+          </a:fontRef>
+        </p:style>
+        <p:txBody>
+          <a:bodyPr wrap="square" lIns="45720" tIns="27432" rIns="45720" bIns="27432" rtlCol="0" anchor="ctr"/>
+          <a:lstStyle/>
+          <a:p>
+            <a:pPr algn="ctr"/>
+            <a:r>
+              <a:rPr sz="1200" b="1" i="0">
+                <a:solidFill>
+                  <a:srgbClr val="202020"/>
+                </a:solidFill>
+                <a:latin typeface="Arial"/>
+              </a:rPr>
+              <a:t>type safety</a:t>
+            </a:r>
+          </a:p>
+        </p:txBody>
+      </p:sp>
+    </p:spTree>
+  </p:cSld>
+  <p:clrMapOvr>
+    <a:masterClrMapping/>
+  </p:clrMapOvr>
+</p:sld>
+</file>
+
+<file path=ppt/slides/slide15.xml><?xml version="1.0" encoding="utf-8"?>
+<p:sld xmlns:a="http://schemas.openxmlformats.org/drawingml/2006/main" xmlns:r="http://schemas.openxmlformats.org/officeDocument/2006/relationships" xmlns:p="http://schemas.openxmlformats.org/presentationml/2006/main">
+  <p:cSld>
+    <p:spTree>
+      <p:nvGrpSpPr>
+        <p:cNvPr id="1" name=""/>
+        <p:cNvGrpSpPr/>
+        <p:nvPr/>
+      </p:nvGrpSpPr>
+      <p:grpSpPr>
+        <a:xfrm>
+          <a:off x="0" y="0"/>
+          <a:ext cx="0" cy="0"/>
+          <a:chOff x="0" y="0"/>
+          <a:chExt cx="0" cy="0"/>
+        </a:xfrm>
+      </p:grpSpPr>
+      <p:sp>
+        <p:nvSpPr>
+          <p:cNvPr id="2" name="Title 1"/>
+          <p:cNvSpPr>
+            <a:spLocks noGrp="1"/>
+          </p:cNvSpPr>
+          <p:nvPr>
+            <p:ph type="title"/>
+          </p:nvPr>
+        </p:nvSpPr>
+        <p:spPr>
+          <a:xfrm>
+            <a:off x="534300" y="224048"/>
+            <a:ext cx="8046720" cy="685800"/>
+          </a:xfrm>
+        </p:spPr>
+        <p:txBody>
+          <a:bodyPr wrap="square"/>
+          <a:lstStyle/>
+          <a:p>
+            <a:pPr algn="l"/>
+            <a:r>
+              <a:rPr sz="2800" b="1" i="0">
+                <a:solidFill>
+                  <a:srgbClr val="202020"/>
+                </a:solidFill>
+                <a:latin typeface="Arial"/>
+              </a:rPr>
+              <a:t>C Is Getting Safer</a:t>
+            </a:r>
+          </a:p>
+        </p:txBody>
+      </p:sp>
+      <p:sp>
+        <p:nvSpPr>
+          <p:cNvPr id="3" name="Text Placeholder 2"/>
+          <p:cNvSpPr>
+            <a:spLocks noGrp="1"/>
+          </p:cNvSpPr>
+          <p:nvPr>
+            <p:ph type="body" idx="1"/>
+          </p:nvPr>
+        </p:nvSpPr>
+        <p:spPr>
+          <a:xfrm>
+            <a:off x="420000" y="1298448"/>
+            <a:ext cx="8046720" cy="3383280"/>
+          </a:xfrm>
+        </p:spPr>
+        <p:txBody>
+          <a:bodyPr wrap="square" lIns="0" tIns="0" rIns="0" bIns="0"/>
+          <a:lstStyle/>
+          <a:p>
+            <a:r>
+              <a:rPr sz="2000" b="0" i="0">
+                <a:solidFill>
+                  <a:srgbClr val="202020"/>
+                </a:solidFill>
+                <a:latin typeface="Arial"/>
+              </a:rPr>
+              <a:t>Rewriting everything in Rust is not realistic, so make existing C safer too</a:t>
+            </a:r>
+          </a:p>
+          <a:p>
+            <a:r>
+              <a:rPr sz="2000" b="0" i="0">
+                <a:solidFill>
+                  <a:srgbClr val="202020"/>
+                </a:solidFill>
+                <a:latin typeface="Arial"/>
+              </a:rPr>
+              <a:t>Fuzzing and analysis keep driving up the share of memory-safe C objects</a:t>
+            </a:r>
+          </a:p>
+          <a:p>
+            <a:r>
+              <a:rPr sz="2000" b="0" i="0">
+                <a:solidFill>
+                  <a:srgbClr val="202020"/>
+                </a:solidFill>
+                <a:latin typeface="Arial"/>
+              </a:rPr>
+              <a:t>Isolate the objects you have proven safe, and protect that region</a:t>
+            </a:r>
+          </a:p>
+        </p:txBody>
+      </p:sp>
+      <p:sp>
+        <p:nvSpPr>
+          <p:cNvPr id="41" name="Google Shape;41;p8"/>
+          <p:cNvSpPr txBox="1">
+            <a:spLocks noGrp="1"/>
+          </p:cNvSpPr>
+          <p:nvPr>
+            <p:ph type="sldNum" idx="12"/>
+          </p:nvPr>
+        </p:nvSpPr>
+        <p:spPr>
+          <a:xfrm>
+            <a:off x="8229600" y="4690872"/>
+            <a:ext cx="548640" cy="274320"/>
+          </a:xfrm>
+          <a:prstGeom prst="rect">
+            <a:avLst/>
+          </a:prstGeom>
+          <a:noFill/>
+          <a:ln>
+            <a:noFill/>
+          </a:ln>
+        </p:spPr>
+        <p:txBody>
+          <a:bodyPr spcFirstLastPara="1" wrap="square" lIns="0" tIns="0" rIns="0" bIns="0" anchor="ctr" anchorCtr="0">
+            <a:noAutofit/>
+          </a:bodyPr>
+          <a:lstStyle/>
+          <a:p>
+            <a:pPr marL="0" lvl="0" indent="0" algn="r" rtl="0">
+              <a:spcBef>
+                <a:spcPts val="0"/>
+              </a:spcBef>
+              <a:spcAft>
+                <a:spcPts val="0"/>
+              </a:spcAft>
+              <a:buClr>
+                <a:srgbClr val="8A8A8A"/>
+              </a:buClr>
+              <a:buSzPts val="1200"/>
+              <a:buFont typeface="Arial"/>
+              <a:buNone/>
+            </a:pPr>
+            <a:fld id="{00000000-1234-1234-1234-123412341234}" type="slidenum">
+              <a:rPr lang="en-US"/>
+              <a:t>15</a:t>
+            </a:fld>
+            <a:endParaRPr/>
+          </a:p>
+        </p:txBody>
+      </p:sp>
+      <p:sp>
+        <p:nvSpPr>
+          <p:cNvPr id="42" name="TextBox 41"/>
+          <p:cNvSpPr txBox="1"/>
+          <p:nvPr/>
+        </p:nvSpPr>
+        <p:spPr>
+          <a:xfrm>
+            <a:off x="600000" y="3350000"/>
+            <a:ext cx="3200000" cy="900000"/>
+          </a:xfrm>
+          <a:prstGeom prst="rect">
+            <a:avLst/>
+          </a:prstGeom>
+          <a:noFill/>
+        </p:spPr>
+        <p:txBody>
+          <a:bodyPr wrap="square" lIns="0" tIns="0" rIns="0" bIns="0" anchor="ctr">
+            <a:spAutoFit/>
+          </a:bodyPr>
+          <a:lstStyle/>
+          <a:p>
+            <a:pPr algn="ctr"/>
+            <a:r>
+              <a:rPr sz="6000" b="1" i="0">
+                <a:solidFill>
+                  <a:srgbClr val="2E7D32"/>
+                </a:solidFill>
+                <a:latin typeface="Arial"/>
+              </a:rPr>
+              <a:t>90%+</a:t>
+            </a:r>
+          </a:p>
+        </p:txBody>
+      </p:sp>
+      <p:sp>
+        <p:nvSpPr>
+          <p:cNvPr id="43" name="TextBox 42"/>
+          <p:cNvSpPr txBox="1"/>
+          <p:nvPr/>
+        </p:nvSpPr>
+        <p:spPr>
+          <a:xfrm>
+            <a:off x="600000" y="4230000"/>
+            <a:ext cx="3200000" cy="260000"/>
+          </a:xfrm>
+          <a:prstGeom prst="rect">
+            <a:avLst/>
+          </a:prstGeom>
+          <a:noFill/>
+        </p:spPr>
+        <p:txBody>
+          <a:bodyPr wrap="square" lIns="0" tIns="0" rIns="0" bIns="0" anchor="t">
+            <a:spAutoFit/>
+          </a:bodyPr>
+          <a:lstStyle/>
+          <a:p>
+            <a:pPr algn="ctr"/>
+            <a:r>
+              <a:rPr sz="1100" b="0" i="1">
+                <a:solidFill>
+                  <a:srgbClr val="8A8A8A"/>
+                </a:solidFill>
+                <a:latin typeface="Arial"/>
+              </a:rPr>
+              <a:t>of stack objects now provably memory-safe</a:t>
+            </a:r>
+          </a:p>
+        </p:txBody>
+      </p:sp>
+      <p:sp>
+        <p:nvSpPr>
+          <p:cNvPr id="44" name="Rounded Rectangle 43"/>
+          <p:cNvSpPr/>
+          <p:nvPr/>
+        </p:nvSpPr>
+        <p:spPr>
+          <a:xfrm>
+            <a:off x="4300000" y="3450000"/>
+            <a:ext cx="3400000" cy="900000"/>
+          </a:xfrm>
+          <a:prstGeom prst="roundRect">
+            <a:avLst>
+              <a:gd name="adj" fmla="val 5000"/>
+            </a:avLst>
+          </a:prstGeom>
+          <a:solidFill>
+            <a:srgbClr val="D6E4F0"/>
+          </a:solidFill>
+          <a:ln w="12700">
+            <a:solidFill>
+              <a:srgbClr val="558855"/>
+            </a:solidFill>
+          </a:ln>
+          <a:effectLst/>
+        </p:spPr>
+        <p:style>
+          <a:lnRef idx="1">
+            <a:schemeClr val="accent1"/>
+          </a:lnRef>
+          <a:fillRef idx="3">
+            <a:schemeClr val="accent1"/>
+          </a:fillRef>
+          <a:effectRef idx="2">
+            <a:schemeClr val="accent1"/>
+          </a:effectRef>
+          <a:fontRef idx="minor">
+            <a:schemeClr val="lt1"/>
+          </a:fontRef>
+        </p:style>
+        <p:txBody>
+          <a:bodyPr rtlCol="0" anchor="ctr"/>
+          <a:lstStyle/>
+          <a:p>
+            <a:pPr algn="ctr"/>
+            <a:endParaRPr/>
+          </a:p>
+        </p:txBody>
+      </p:sp>
+      <p:sp>
+        <p:nvSpPr>
+          <p:cNvPr id="45" name="TextBox 44"/>
+          <p:cNvSpPr txBox="1"/>
+          <p:nvPr/>
+        </p:nvSpPr>
+        <p:spPr>
+          <a:xfrm>
+            <a:off x="4450000" y="3540000"/>
+            <a:ext cx="3100000" cy="240000"/>
+          </a:xfrm>
+          <a:prstGeom prst="rect">
+            <a:avLst/>
+          </a:prstGeom>
+          <a:noFill/>
+        </p:spPr>
+        <p:txBody>
+          <a:bodyPr wrap="square" lIns="0" tIns="0" rIns="0" bIns="0" anchor="t">
+            <a:spAutoFit/>
+          </a:bodyPr>
+          <a:lstStyle/>
+          <a:p>
+            <a:pPr algn="l"/>
+            <a:r>
+              <a:rPr sz="1200" b="1" i="0">
+                <a:solidFill>
+                  <a:srgbClr val="2E7D32"/>
+                </a:solidFill>
+                <a:latin typeface="Arial"/>
+              </a:rPr>
+              <a:t>isolated safe region</a:t>
+            </a:r>
+          </a:p>
+        </p:txBody>
+      </p:sp>
+      <p:sp>
+        <p:nvSpPr>
+          <p:cNvPr id="46" name="Rectangle 45"/>
+          <p:cNvSpPr/>
+          <p:nvPr/>
+        </p:nvSpPr>
+        <p:spPr>
+          <a:xfrm>
+            <a:off x="4550000" y="3850000"/>
+            <a:ext cx="2900000" cy="380000"/>
+          </a:xfrm>
+          <a:prstGeom prst="rect">
+            <a:avLst/>
+          </a:prstGeom>
+          <a:solidFill>
+            <a:srgbClr val="DDEEDD"/>
+          </a:solidFill>
+          <a:ln w="12700">
+            <a:solidFill>
+              <a:srgbClr val="555555"/>
+            </a:solidFill>
+          </a:ln>
+          <a:effectLst/>
+        </p:spPr>
+        <p:style>
+          <a:lnRef idx="1">
+            <a:schemeClr val="accent1"/>
+          </a:lnRef>
+          <a:fillRef idx="3">
+            <a:schemeClr val="accent1"/>
+          </a:fillRef>
+          <a:effectRef idx="2">
+            <a:schemeClr val="accent1"/>
+          </a:effectRef>
+          <a:fontRef idx="minor">
+            <a:schemeClr val="lt1"/>
+          </a:fontRef>
+        </p:style>
+        <p:txBody>
+          <a:bodyPr wrap="square" lIns="45720" tIns="27432" rIns="45720" bIns="27432" rtlCol="0" anchor="ctr"/>
+          <a:lstStyle/>
+          <a:p>
+            <a:pPr algn="ctr"/>
+            <a:r>
+              <a:rPr sz="1100" b="0" i="0">
+                <a:solidFill>
+                  <a:srgbClr val="202020"/>
+                </a:solidFill>
+                <a:latin typeface="Arial"/>
+              </a:rPr>
+              <a:t>proven-safe objects</a:t>
+            </a:r>
+          </a:p>
+        </p:txBody>
+      </p:sp>
+    </p:spTree>
+  </p:cSld>
+  <p:clrMapOvr>
+    <a:masterClrMapping/>
+  </p:clrMapOvr>
+</p:sld>
+</file>
+
+<file path=ppt/slides/slide16.xml><?xml version="1.0" encoding="utf-8"?>
+<p:sld xmlns:a="http://schemas.openxmlformats.org/drawingml/2006/main" xmlns:r="http://schemas.openxmlformats.org/officeDocument/2006/relationships" xmlns:p="http://schemas.openxmlformats.org/presentationml/2006/main">
+  <p:cSld>
+    <p:spTree>
+      <p:nvGrpSpPr>
+        <p:cNvPr id="1" name=""/>
+        <p:cNvGrpSpPr/>
+        <p:nvPr/>
+      </p:nvGrpSpPr>
+      <p:grpSpPr>
+        <a:xfrm>
+          <a:off x="0" y="0"/>
+          <a:ext cx="0" cy="0"/>
+          <a:chOff x="0" y="0"/>
+          <a:chExt cx="0" cy="0"/>
+        </a:xfrm>
+      </p:grpSpPr>
+      <p:sp>
+        <p:nvSpPr>
+          <p:cNvPr id="2" name="Title 1"/>
+          <p:cNvSpPr>
+            <a:spLocks noGrp="1"/>
+          </p:cNvSpPr>
+          <p:nvPr>
+            <p:ph type="title"/>
+          </p:nvPr>
+        </p:nvSpPr>
+        <p:spPr>
+          <a:xfrm>
+            <a:off x="534300" y="224048"/>
+            <a:ext cx="8046720" cy="685800"/>
+          </a:xfrm>
+        </p:spPr>
+        <p:txBody>
+          <a:bodyPr wrap="square"/>
+          <a:lstStyle/>
+          <a:p>
+            <a:pPr algn="l"/>
+            <a:r>
+              <a:rPr sz="2800" b="1" i="0">
+                <a:solidFill>
+                  <a:srgbClr val="202020"/>
+                </a:solidFill>
+                <a:latin typeface="Arial"/>
+              </a:rPr>
+              <a:t>Conclusions</a:t>
+            </a:r>
+          </a:p>
+        </p:txBody>
+      </p:sp>
+      <p:sp>
+        <p:nvSpPr>
+          <p:cNvPr id="3" name="Text Placeholder 2"/>
+          <p:cNvSpPr>
+            <a:spLocks noGrp="1"/>
+          </p:cNvSpPr>
+          <p:nvPr>
+            <p:ph type="body" idx="1"/>
+          </p:nvPr>
+        </p:nvSpPr>
+        <p:spPr>
+          <a:xfrm>
+            <a:off x="420000" y="1298448"/>
+            <a:ext cx="8046720" cy="3383280"/>
+          </a:xfrm>
+        </p:spPr>
+        <p:txBody>
+          <a:bodyPr wrap="square" lIns="0" tIns="0" rIns="0" bIns="0"/>
+          <a:lstStyle/>
+          <a:p>
+            <a:r>
+              <a:rPr sz="2000" b="0" i="0">
+                <a:solidFill>
+                  <a:srgbClr val="202020"/>
+                </a:solidFill>
+                <a:latin typeface="Arial"/>
+              </a:rPr>
+              <a:t>Classic defenses raise the bar; modern ones attack the hijack directly</a:t>
+            </a:r>
+          </a:p>
+          <a:p>
+            <a:r>
+              <a:rPr sz="2000" b="0" i="0">
+                <a:solidFill>
+                  <a:srgbClr val="202020"/>
+                </a:solidFill>
+                <a:latin typeface="Arial"/>
+              </a:rPr>
+              <a:t>Shadow stacks (now in Intel CET hardware) protect the return address</a:t>
+            </a:r>
+          </a:p>
+          <a:p>
+            <a:r>
+              <a:rPr sz="2000" b="0" i="0">
+                <a:solidFill>
+                  <a:srgbClr val="202020"/>
+                </a:solidFill>
+                <a:latin typeface="Arial"/>
+              </a:rPr>
+              <a:t>CFI restricts indirect calls and returns, coarse or fine, but is not complete</a:t>
+            </a:r>
+          </a:p>
+          <a:p>
+            <a:r>
+              <a:rPr sz="2000" b="0" i="0">
+                <a:solidFill>
+                  <a:srgbClr val="202020"/>
+                </a:solidFill>
+                <a:latin typeface="Arial"/>
+              </a:rPr>
+              <a:t>Safe languages remove the bug class, and C keeps getting safer</a:t>
+            </a:r>
+          </a:p>
+          <a:p>
+            <a:r>
+              <a:rPr sz="2000" b="0" i="0">
+                <a:solidFill>
+                  <a:srgbClr val="8A8A8A"/>
+                </a:solidFill>
+                <a:latin typeface="Arial"/>
+              </a:rPr>
+              <a:t>Next: Software Testing &amp; Fuzzing - finding the bugs before attackers do</a:t>
+            </a:r>
+          </a:p>
+        </p:txBody>
+      </p:sp>
+      <p:sp>
+        <p:nvSpPr>
+          <p:cNvPr id="41" name="Google Shape;41;p8"/>
+          <p:cNvSpPr txBox="1">
+            <a:spLocks noGrp="1"/>
+          </p:cNvSpPr>
+          <p:nvPr>
+            <p:ph type="sldNum" idx="12"/>
+          </p:nvPr>
+        </p:nvSpPr>
+        <p:spPr>
+          <a:xfrm>
+            <a:off x="8229600" y="4690872"/>
+            <a:ext cx="548640" cy="274320"/>
+          </a:xfrm>
+          <a:prstGeom prst="rect">
+            <a:avLst/>
+          </a:prstGeom>
+          <a:noFill/>
+          <a:ln>
+            <a:noFill/>
+          </a:ln>
+        </p:spPr>
+        <p:txBody>
+          <a:bodyPr spcFirstLastPara="1" wrap="square" lIns="0" tIns="0" rIns="0" bIns="0" anchor="ctr" anchorCtr="0">
+            <a:noAutofit/>
+          </a:bodyPr>
+          <a:lstStyle/>
+          <a:p>
+            <a:pPr marL="0" lvl="0" indent="0" algn="r" rtl="0">
+              <a:spcBef>
+                <a:spcPts val="0"/>
+              </a:spcBef>
+              <a:spcAft>
+                <a:spcPts val="0"/>
+              </a:spcAft>
+              <a:buClr>
+                <a:srgbClr val="8A8A8A"/>
+              </a:buClr>
+              <a:buSzPts val="1200"/>
+              <a:buFont typeface="Arial"/>
+              <a:buNone/>
+            </a:pPr>
+            <a:fld id="{00000000-1234-1234-1234-123412341234}" type="slidenum">
+              <a:rPr lang="en-US"/>
+              <a:t>16</a:t>
+            </a:fld>
+            <a:endParaRPr/>
+          </a:p>
+        </p:txBody>
+      </p:sp>
+    </p:spTree>
+  </p:cSld>
+  <p:clrMapOvr>
+    <a:masterClrMapping/>
+  </p:clrMapOvr>
+</p:sld>
+</file>
+
+<file path=ppt/slides/slide17.xml><?xml version="1.0" encoding="utf-8"?>
+<p:sld xmlns:a="http://schemas.openxmlformats.org/drawingml/2006/main" xmlns:r="http://schemas.openxmlformats.org/officeDocument/2006/relationships" xmlns:p="http://schemas.openxmlformats.org/presentationml/2006/main">
+  <p:cSld>
+    <p:spTree>
+      <p:nvGrpSpPr>
+        <p:cNvPr id="1" name=""/>
+        <p:cNvGrpSpPr/>
+        <p:nvPr/>
+      </p:nvGrpSpPr>
+      <p:grpSpPr>
+        <a:xfrm>
+          <a:off x="0" y="0"/>
+          <a:ext cx="0" cy="0"/>
+          <a:chOff x="0" y="0"/>
+          <a:chExt cx="0" cy="0"/>
+        </a:xfrm>
+      </p:grpSpPr>
+      <p:sp>
+        <p:nvSpPr>
+          <p:cNvPr id="2" name="Title 1"/>
+          <p:cNvSpPr>
+            <a:spLocks noGrp="1"/>
+          </p:cNvSpPr>
+          <p:nvPr>
+            <p:ph type="title"/>
+          </p:nvPr>
+        </p:nvSpPr>
+        <p:spPr>
+          <a:xfrm>
+            <a:off x="534300" y="224048"/>
+            <a:ext cx="8046720" cy="685800"/>
+          </a:xfrm>
+        </p:spPr>
+        <p:txBody>
+          <a:bodyPr wrap="square"/>
+          <a:lstStyle/>
+          <a:p>
+            <a:pPr algn="l"/>
+            <a:r>
+              <a:rPr sz="2800" b="1" i="0">
+                <a:solidFill>
+                  <a:srgbClr val="202020"/>
+                </a:solidFill>
+                <a:latin typeface="Arial"/>
+              </a:rPr>
+              <a:t>Questions</a:t>
+            </a:r>
+          </a:p>
+        </p:txBody>
+      </p:sp>
+      <p:sp>
+        <p:nvSpPr>
+          <p:cNvPr id="41" name="Google Shape;41;p8"/>
+          <p:cNvSpPr txBox="1">
+            <a:spLocks noGrp="1"/>
+          </p:cNvSpPr>
+          <p:nvPr>
+            <p:ph type="sldNum" idx="12"/>
+          </p:nvPr>
+        </p:nvSpPr>
+        <p:spPr>
+          <a:xfrm>
+            <a:off x="8229600" y="4690872"/>
+            <a:ext cx="548640" cy="274320"/>
+          </a:xfrm>
+          <a:prstGeom prst="rect">
+            <a:avLst/>
+          </a:prstGeom>
+          <a:noFill/>
+          <a:ln>
+            <a:noFill/>
+          </a:ln>
+        </p:spPr>
+        <p:txBody>
+          <a:bodyPr spcFirstLastPara="1" wrap="square" lIns="0" tIns="0" rIns="0" bIns="0" anchor="ctr" anchorCtr="0">
+            <a:noAutofit/>
+          </a:bodyPr>
+          <a:lstStyle/>
+          <a:p>
+            <a:pPr marL="0" lvl="0" indent="0" algn="r" rtl="0">
+              <a:spcBef>
+                <a:spcPts val="0"/>
+              </a:spcBef>
+              <a:spcAft>
+                <a:spcPts val="0"/>
+              </a:spcAft>
+              <a:buClr>
+                <a:srgbClr val="8A8A8A"/>
+              </a:buClr>
+              <a:buSzPts val="1200"/>
+              <a:buFont typeface="Arial"/>
+              <a:buNone/>
+            </a:pPr>
+            <a:fld id="{00000000-1234-1234-1234-123412341234}" type="slidenum">
+              <a:rPr lang="en-US"/>
+              <a:t>17</a:t>
+            </a:fld>
+            <a:endParaRPr/>
+          </a:p>
+        </p:txBody>
+      </p:sp>
+      <p:sp>
+        <p:nvSpPr>
+          <p:cNvPr id="42" name="Rounded Rectangle 41"/>
+          <p:cNvSpPr/>
+          <p:nvPr/>
+        </p:nvSpPr>
+        <p:spPr>
+          <a:xfrm>
+            <a:off x="3800000" y="2550000"/>
+            <a:ext cx="950000" cy="950000"/>
+          </a:xfrm>
+          <a:prstGeom prst="roundRect">
+            <a:avLst>
+              <a:gd name="adj" fmla="val 50000"/>
+            </a:avLst>
+          </a:prstGeom>
+          <a:solidFill>
+            <a:srgbClr val="E47932"/>
+          </a:solidFill>
+          <a:ln>
+            <a:noFill/>
+          </a:ln>
+          <a:effectLst/>
+        </p:spPr>
+        <p:style>
+          <a:lnRef idx="1">
+            <a:schemeClr val="accent1"/>
+          </a:lnRef>
+          <a:fillRef idx="3">
+            <a:schemeClr val="accent1"/>
+          </a:fillRef>
+          <a:effectRef idx="2">
+            <a:schemeClr val="accent1"/>
+          </a:effectRef>
+          <a:fontRef idx="minor">
+            <a:schemeClr val="lt1"/>
+          </a:fontRef>
+        </p:style>
+        <p:txBody>
+          <a:bodyPr wrap="square" lIns="45720" tIns="27432" rIns="45720" bIns="27432" rtlCol="0" anchor="ctr"/>
+          <a:lstStyle/>
+          <a:p>
+            <a:pPr algn="ctr"/>
+            <a:r>
+              <a:rPr sz="5400" b="1" i="0">
+                <a:solidFill>
+                  <a:srgbClr val="FFFFFF"/>
+                </a:solidFill>
+                <a:latin typeface="Arial"/>
+              </a:rPr>
+              <a:t>?</a:t>
+            </a:r>
+          </a:p>
+        </p:txBody>
+      </p:sp>
+    </p:spTree>
+  </p:cSld>
+  <p:clrMapOvr>
+    <a:masterClrMapping/>
+  </p:clrMapOvr>
+</p:sld>
+</file>
+
+<file path=ppt/slides/slide2.xml><?xml version="1.0" encoding="utf-8"?>
+<p:sld xmlns:a="http://schemas.openxmlformats.org/drawingml/2006/main" xmlns:r="http://schemas.openxmlformats.org/officeDocument/2006/relationships" xmlns:p="http://schemas.openxmlformats.org/presentationml/2006/main">
+  <p:cSld>
+    <p:spTree>
+      <p:nvGrpSpPr>
+        <p:cNvPr id="1" name=""/>
+        <p:cNvGrpSpPr/>
+        <p:nvPr/>
+      </p:nvGrpSpPr>
+      <p:grpSpPr>
+        <a:xfrm>
+          <a:off x="0" y="0"/>
+          <a:ext cx="0" cy="0"/>
+          <a:chOff x="0" y="0"/>
+          <a:chExt cx="0" cy="0"/>
+        </a:xfrm>
+      </p:grpSpPr>
+      <p:sp>
+        <p:nvSpPr>
+          <p:cNvPr id="2" name="Title 1"/>
+          <p:cNvSpPr>
+            <a:spLocks noGrp="1"/>
+          </p:cNvSpPr>
+          <p:nvPr>
+            <p:ph type="title"/>
+          </p:nvPr>
+        </p:nvSpPr>
+        <p:spPr>
+          <a:xfrm>
+            <a:off x="534300" y="224048"/>
+            <a:ext cx="8046720" cy="685800"/>
+          </a:xfrm>
+        </p:spPr>
+        <p:txBody>
+          <a:bodyPr wrap="square"/>
+          <a:lstStyle/>
+          <a:p>
+            <a:pPr algn="l"/>
+            <a:r>
+              <a:rPr sz="2800" b="1" i="0">
+                <a:solidFill>
+                  <a:srgbClr val="202020"/>
+                </a:solidFill>
+                <a:latin typeface="Arial"/>
+              </a:rPr>
+              <a:t>Outline</a:t>
+            </a:r>
+          </a:p>
+        </p:txBody>
+      </p:sp>
+      <p:sp>
+        <p:nvSpPr>
+          <p:cNvPr id="3" name="Text Placeholder 2"/>
+          <p:cNvSpPr>
+            <a:spLocks noGrp="1"/>
+          </p:cNvSpPr>
+          <p:nvPr>
+            <p:ph type="body" idx="1"/>
+          </p:nvPr>
+        </p:nvSpPr>
+        <p:spPr>
+          <a:xfrm>
+            <a:off x="420000" y="1298448"/>
+            <a:ext cx="8046720" cy="3383280"/>
+          </a:xfrm>
+        </p:spPr>
+        <p:txBody>
+          <a:bodyPr wrap="square" lIns="0" tIns="0" rIns="0" bIns="0"/>
+          <a:lstStyle/>
+          <a:p>
+            <a:r>
+              <a:rPr sz="2000" b="0" i="0">
+                <a:solidFill>
+                  <a:srgbClr val="202020"/>
+                </a:solidFill>
+                <a:latin typeface="Arial"/>
+              </a:rPr>
+              <a:t>Recap: the classic defenses, and why ROP walks past them</a:t>
+            </a:r>
+          </a:p>
+          <a:p>
+            <a:r>
+              <a:rPr sz="2000" b="0" i="0">
+                <a:solidFill>
+                  <a:srgbClr val="202020"/>
+                </a:solidFill>
+                <a:latin typeface="Arial"/>
+              </a:rPr>
+              <a:t>Control hijacking: the two targets an attacker needs</a:t>
+            </a:r>
+          </a:p>
+          <a:p>
+            <a:r>
+              <a:rPr sz="2000" b="0" i="0">
+                <a:solidFill>
+                  <a:srgbClr val="202020"/>
+                </a:solidFill>
+                <a:latin typeface="Arial"/>
+              </a:rPr>
+              <a:t>Shadow stacks and Intel CET: protect the return address</a:t>
+            </a:r>
+          </a:p>
+          <a:p>
+            <a:r>
+              <a:rPr sz="2000" b="0" i="0">
+                <a:solidFill>
+                  <a:srgbClr val="202020"/>
+                </a:solidFill>
+                <a:latin typeface="Arial"/>
+              </a:rPr>
+              <a:t>Control-flow integrity: restrict indirect calls and returns</a:t>
+            </a:r>
+          </a:p>
+          <a:p>
+            <a:r>
+              <a:rPr sz="2000" b="0" i="0">
+                <a:solidFill>
+                  <a:srgbClr val="202020"/>
+                </a:solidFill>
+                <a:latin typeface="Arial"/>
+              </a:rPr>
+              <a:t>Coarse vs fine CFI, and why CFI is not perfect</a:t>
+            </a:r>
+          </a:p>
+          <a:p>
+            <a:r>
+              <a:rPr sz="2000" b="0" i="0">
+                <a:solidFill>
+                  <a:srgbClr val="202020"/>
+                </a:solidFill>
+                <a:latin typeface="Arial"/>
+              </a:rPr>
+              <a:t>Safe languages, and how C itself is getting safer</a:t>
+            </a:r>
+          </a:p>
+        </p:txBody>
+      </p:sp>
+      <p:sp>
+        <p:nvSpPr>
+          <p:cNvPr id="41" name="Google Shape;41;p8"/>
+          <p:cNvSpPr txBox="1">
+            <a:spLocks noGrp="1"/>
+          </p:cNvSpPr>
+          <p:nvPr>
+            <p:ph type="sldNum" idx="12"/>
+          </p:nvPr>
+        </p:nvSpPr>
+        <p:spPr>
+          <a:xfrm>
+            <a:off x="8229600" y="4690872"/>
+            <a:ext cx="548640" cy="274320"/>
+          </a:xfrm>
+          <a:prstGeom prst="rect">
+            <a:avLst/>
+          </a:prstGeom>
+          <a:noFill/>
+          <a:ln>
+            <a:noFill/>
+          </a:ln>
+        </p:spPr>
+        <p:txBody>
+          <a:bodyPr spcFirstLastPara="1" wrap="square" lIns="0" tIns="0" rIns="0" bIns="0" anchor="ctr" anchorCtr="0">
+            <a:noAutofit/>
+          </a:bodyPr>
+          <a:lstStyle/>
+          <a:p>
+            <a:pPr marL="0" lvl="0" indent="0" algn="r" rtl="0">
+              <a:spcBef>
+                <a:spcPts val="0"/>
+              </a:spcBef>
+              <a:spcAft>
+                <a:spcPts val="0"/>
+              </a:spcAft>
+              <a:buClr>
+                <a:srgbClr val="8A8A8A"/>
+              </a:buClr>
+              <a:buSzPts val="1200"/>
+              <a:buFont typeface="Arial"/>
+              <a:buNone/>
+            </a:pPr>
+            <a:fld id="{00000000-1234-1234-1234-123412341234}" type="slidenum">
+              <a:rPr lang="en-US"/>
+              <a:t>2</a:t>
+            </a:fld>
+            <a:endParaRPr/>
+          </a:p>
+        </p:txBody>
+      </p:sp>
+      <p:sp>
+        <p:nvSpPr>
+          <p:cNvPr id="42" name="Rounded Rectangle 41"/>
+          <p:cNvSpPr/>
+          <p:nvPr/>
+        </p:nvSpPr>
+        <p:spPr>
+          <a:xfrm>
+            <a:off x="248640" y="4020000"/>
+            <a:ext cx="2529840" cy="500000"/>
+          </a:xfrm>
+          <a:prstGeom prst="roundRect">
+            <a:avLst>
+              <a:gd name="adj" fmla="val 12000"/>
+            </a:avLst>
+          </a:prstGeom>
+          <a:solidFill>
+            <a:srgbClr val="94B6D2"/>
+          </a:solidFill>
+          <a:ln>
+            <a:noFill/>
+          </a:ln>
+          <a:effectLst/>
+        </p:spPr>
+        <p:style>
+          <a:lnRef idx="1">
+            <a:schemeClr val="accent1"/>
+          </a:lnRef>
+          <a:fillRef idx="3">
+            <a:schemeClr val="accent1"/>
+          </a:fillRef>
+          <a:effectRef idx="2">
+            <a:schemeClr val="accent1"/>
+          </a:effectRef>
+          <a:fontRef idx="minor">
+            <a:schemeClr val="lt1"/>
+          </a:fontRef>
+        </p:style>
+        <p:txBody>
+          <a:bodyPr wrap="square" lIns="45720" tIns="27432" rIns="45720" bIns="27432" rtlCol="0" anchor="ctr"/>
+          <a:lstStyle/>
+          <a:p>
+            <a:pPr algn="ctr"/>
+            <a:r>
+              <a:rPr sz="1300" b="1" i="0">
+                <a:solidFill>
+                  <a:srgbClr val="202020"/>
+                </a:solidFill>
+                <a:latin typeface="Arial"/>
+              </a:rPr>
+              <a:t>Protect the return</a:t>
+            </a:r>
+          </a:p>
+        </p:txBody>
+      </p:sp>
+      <p:sp>
+        <p:nvSpPr>
+          <p:cNvPr id="43" name="Rounded Rectangle 42"/>
+          <p:cNvSpPr/>
+          <p:nvPr/>
+        </p:nvSpPr>
+        <p:spPr>
+          <a:xfrm>
+            <a:off x="3007080" y="4020000"/>
+            <a:ext cx="2529840" cy="500000"/>
+          </a:xfrm>
+          <a:prstGeom prst="roundRect">
+            <a:avLst>
+              <a:gd name="adj" fmla="val 12000"/>
+            </a:avLst>
+          </a:prstGeom>
+          <a:solidFill>
+            <a:srgbClr val="94B6D2"/>
+          </a:solidFill>
+          <a:ln>
+            <a:noFill/>
+          </a:ln>
+          <a:effectLst/>
+        </p:spPr>
+        <p:style>
+          <a:lnRef idx="1">
+            <a:schemeClr val="accent1"/>
+          </a:lnRef>
+          <a:fillRef idx="3">
+            <a:schemeClr val="accent1"/>
+          </a:fillRef>
+          <a:effectRef idx="2">
+            <a:schemeClr val="accent1"/>
+          </a:effectRef>
+          <a:fontRef idx="minor">
+            <a:schemeClr val="lt1"/>
+          </a:fontRef>
+        </p:style>
+        <p:txBody>
+          <a:bodyPr wrap="square" lIns="45720" tIns="27432" rIns="45720" bIns="27432" rtlCol="0" anchor="ctr"/>
+          <a:lstStyle/>
+          <a:p>
+            <a:pPr algn="ctr"/>
+            <a:r>
+              <a:rPr sz="1300" b="1" i="0">
+                <a:solidFill>
+                  <a:srgbClr val="202020"/>
+                </a:solidFill>
+                <a:latin typeface="Arial"/>
+              </a:rPr>
+              <a:t>Restrict indirect calls</a:t>
+            </a:r>
+          </a:p>
+        </p:txBody>
+      </p:sp>
+      <p:sp>
+        <p:nvSpPr>
+          <p:cNvPr id="44" name="Rounded Rectangle 43"/>
+          <p:cNvSpPr/>
+          <p:nvPr/>
+        </p:nvSpPr>
+        <p:spPr>
+          <a:xfrm>
+            <a:off x="5765520" y="4020000"/>
+            <a:ext cx="2529840" cy="500000"/>
+          </a:xfrm>
+          <a:prstGeom prst="roundRect">
+            <a:avLst>
+              <a:gd name="adj" fmla="val 12000"/>
+            </a:avLst>
+          </a:prstGeom>
+          <a:solidFill>
+            <a:srgbClr val="94B6D2"/>
+          </a:solidFill>
+          <a:ln>
+            <a:noFill/>
+          </a:ln>
+          <a:effectLst/>
+        </p:spPr>
+        <p:style>
+          <a:lnRef idx="1">
+            <a:schemeClr val="accent1"/>
+          </a:lnRef>
+          <a:fillRef idx="3">
+            <a:schemeClr val="accent1"/>
+          </a:fillRef>
+          <a:effectRef idx="2">
+            <a:schemeClr val="accent1"/>
+          </a:effectRef>
+          <a:fontRef idx="minor">
+            <a:schemeClr val="lt1"/>
+          </a:fontRef>
+        </p:style>
+        <p:txBody>
+          <a:bodyPr wrap="square" lIns="45720" tIns="27432" rIns="45720" bIns="27432" rtlCol="0" anchor="ctr"/>
+          <a:lstStyle/>
+          <a:p>
+            <a:pPr algn="ctr"/>
+            <a:r>
+              <a:rPr sz="1300" b="1" i="0">
+                <a:solidFill>
+                  <a:srgbClr val="202020"/>
+                </a:solidFill>
+                <a:latin typeface="Arial"/>
+              </a:rPr>
+              <a:t>Remove the bug</a:t>
+            </a:r>
+          </a:p>
+        </p:txBody>
+      </p:sp>
+    </p:spTree>
+  </p:cSld>
+  <p:clrMapOvr>
+    <a:masterClrMapping/>
+  </p:clrMapOvr>
+</p:sld>
+</file>
+
+<file path=ppt/slides/slide3.xml><?xml version="1.0" encoding="utf-8"?>
+<p:sld xmlns:a="http://schemas.openxmlformats.org/drawingml/2006/main" xmlns:r="http://schemas.openxmlformats.org/officeDocument/2006/relationships" xmlns:p="http://schemas.openxmlformats.org/presentationml/2006/main">
+  <p:cSld>
+    <p:spTree>
+      <p:nvGrpSpPr>
+        <p:cNvPr id="1" name=""/>
+        <p:cNvGrpSpPr/>
+        <p:nvPr/>
+      </p:nvGrpSpPr>
+      <p:grpSpPr>
+        <a:xfrm>
+          <a:off x="0" y="0"/>
+          <a:ext cx="0" cy="0"/>
+          <a:chOff x="0" y="0"/>
+          <a:chExt cx="0" cy="0"/>
+        </a:xfrm>
+      </p:grpSpPr>
+      <p:sp>
+        <p:nvSpPr>
+          <p:cNvPr id="2" name="Title 1"/>
+          <p:cNvSpPr>
+            <a:spLocks noGrp="1"/>
+          </p:cNvSpPr>
+          <p:nvPr>
+            <p:ph type="title"/>
+          </p:nvPr>
+        </p:nvSpPr>
+        <p:spPr>
+          <a:xfrm>
+            <a:off x="534300" y="224048"/>
+            <a:ext cx="8046720" cy="685800"/>
+          </a:xfrm>
+        </p:spPr>
+        <p:txBody>
+          <a:bodyPr wrap="square"/>
+          <a:lstStyle/>
+          <a:p>
+            <a:pPr algn="l"/>
+            <a:r>
+              <a:rPr sz="2800" b="1" i="0">
+                <a:solidFill>
+                  <a:srgbClr val="202020"/>
+                </a:solidFill>
+                <a:latin typeface="Arial"/>
+              </a:rPr>
+              <a:t>Recall: the Classic Defenses Do Not Stop ROP</a:t>
+            </a:r>
+          </a:p>
+        </p:txBody>
+      </p:sp>
+      <p:sp>
+        <p:nvSpPr>
+          <p:cNvPr id="3" name="Text Placeholder 2"/>
+          <p:cNvSpPr>
+            <a:spLocks noGrp="1"/>
+          </p:cNvSpPr>
+          <p:nvPr>
+            <p:ph type="body" idx="1"/>
+          </p:nvPr>
+        </p:nvSpPr>
+        <p:spPr>
+          <a:xfrm>
+            <a:off x="420000" y="1298448"/>
+            <a:ext cx="8046720" cy="3383280"/>
+          </a:xfrm>
+        </p:spPr>
+        <p:txBody>
+          <a:bodyPr wrap="square" lIns="0" tIns="0" rIns="0" bIns="0"/>
+          <a:lstStyle/>
+          <a:p>
+            <a:r>
+              <a:rPr sz="2000" b="0" i="0">
+                <a:solidFill>
+                  <a:srgbClr val="202020"/>
+                </a:solidFill>
+                <a:latin typeface="Arial"/>
+              </a:rPr>
+              <a:t>Lecture 8's trio raises the bar: canaries, ASLR, DEP / NX</a:t>
+            </a:r>
+          </a:p>
+          <a:p>
+            <a:r>
+              <a:rPr sz="2000" b="0" i="0">
+                <a:solidFill>
+                  <a:srgbClr val="202020"/>
+                </a:solidFill>
+                <a:latin typeface="Arial"/>
+              </a:rPr>
+              <a:t>Canaries and ASLR fall to a leak: disclose the canary, or an address</a:t>
+            </a:r>
+          </a:p>
+          <a:p>
+            <a:r>
+              <a:rPr sz="2000" b="0" i="0">
+                <a:solidFill>
+                  <a:srgbClr val="202020"/>
+                </a:solidFill>
+                <a:latin typeface="Arial"/>
+              </a:rPr>
+              <a:t>ROP reuses existing executable code, so DEP / NX never fires</a:t>
+            </a:r>
+          </a:p>
+        </p:txBody>
+      </p:sp>
+      <p:sp>
+        <p:nvSpPr>
+          <p:cNvPr id="41" name="Google Shape;41;p8"/>
+          <p:cNvSpPr txBox="1">
+            <a:spLocks noGrp="1"/>
+          </p:cNvSpPr>
+          <p:nvPr>
+            <p:ph type="sldNum" idx="12"/>
+          </p:nvPr>
+        </p:nvSpPr>
+        <p:spPr>
+          <a:xfrm>
+            <a:off x="8229600" y="4690872"/>
+            <a:ext cx="548640" cy="274320"/>
+          </a:xfrm>
+          <a:prstGeom prst="rect">
+            <a:avLst/>
+          </a:prstGeom>
+          <a:noFill/>
+          <a:ln>
+            <a:noFill/>
+          </a:ln>
+        </p:spPr>
+        <p:txBody>
+          <a:bodyPr spcFirstLastPara="1" wrap="square" lIns="0" tIns="0" rIns="0" bIns="0" anchor="ctr" anchorCtr="0">
+            <a:noAutofit/>
+          </a:bodyPr>
+          <a:lstStyle/>
+          <a:p>
+            <a:pPr marL="0" lvl="0" indent="0" algn="r" rtl="0">
+              <a:spcBef>
+                <a:spcPts val="0"/>
+              </a:spcBef>
+              <a:spcAft>
+                <a:spcPts val="0"/>
+              </a:spcAft>
+              <a:buClr>
+                <a:srgbClr val="8A8A8A"/>
+              </a:buClr>
+              <a:buSzPts val="1200"/>
+              <a:buFont typeface="Arial"/>
+              <a:buNone/>
+            </a:pPr>
+            <a:fld id="{00000000-1234-1234-1234-123412341234}" type="slidenum">
+              <a:rPr lang="en-US"/>
+              <a:t>3</a:t>
+            </a:fld>
+            <a:endParaRPr/>
+          </a:p>
+        </p:txBody>
+      </p:sp>
+      <p:sp>
+        <p:nvSpPr>
+          <p:cNvPr id="42" name="Rectangle 41"/>
+          <p:cNvSpPr/>
+          <p:nvPr/>
+        </p:nvSpPr>
+        <p:spPr>
+          <a:xfrm>
+            <a:off x="600000" y="3650000"/>
+            <a:ext cx="2050000" cy="430000"/>
+          </a:xfrm>
+          <a:prstGeom prst="rect">
+            <a:avLst/>
+          </a:prstGeom>
+          <a:solidFill>
+            <a:srgbClr val="D6E4F0"/>
+          </a:solidFill>
+          <a:ln w="12700">
+            <a:solidFill>
+              <a:srgbClr val="555555"/>
+            </a:solidFill>
+          </a:ln>
+          <a:effectLst/>
+        </p:spPr>
+        <p:style>
+          <a:lnRef idx="1">
+            <a:schemeClr val="accent1"/>
+          </a:lnRef>
+          <a:fillRef idx="3">
+            <a:schemeClr val="accent1"/>
+          </a:fillRef>
+          <a:effectRef idx="2">
+            <a:schemeClr val="accent1"/>
+          </a:effectRef>
+          <a:fontRef idx="minor">
+            <a:schemeClr val="lt1"/>
+          </a:fontRef>
+        </p:style>
+        <p:txBody>
+          <a:bodyPr wrap="square" lIns="45720" tIns="27432" rIns="45720" bIns="27432" rtlCol="0" anchor="ctr"/>
+          <a:lstStyle/>
+          <a:p>
+            <a:pPr algn="ctr"/>
+            <a:r>
+              <a:rPr sz="1200" b="1" i="0">
+                <a:solidFill>
+                  <a:srgbClr val="202020"/>
+                </a:solidFill>
+                <a:latin typeface="Arial"/>
+              </a:rPr>
+              <a:t>Stack canary</a:t>
+            </a:r>
+          </a:p>
+        </p:txBody>
+      </p:sp>
+      <p:sp>
+        <p:nvSpPr>
+          <p:cNvPr id="43" name="TextBox 42"/>
+          <p:cNvSpPr txBox="1"/>
+          <p:nvPr/>
+        </p:nvSpPr>
+        <p:spPr>
+          <a:xfrm>
+            <a:off x="600000" y="4120000"/>
+            <a:ext cx="2050000" cy="240000"/>
+          </a:xfrm>
+          <a:prstGeom prst="rect">
+            <a:avLst/>
+          </a:prstGeom>
+          <a:noFill/>
+        </p:spPr>
+        <p:txBody>
+          <a:bodyPr wrap="square" lIns="0" tIns="0" rIns="0" bIns="0" anchor="t">
+            <a:spAutoFit/>
+          </a:bodyPr>
+          <a:lstStyle/>
+          <a:p>
+            <a:pPr algn="ctr"/>
+            <a:r>
+              <a:rPr sz="1000" b="0" i="1">
+                <a:solidFill>
+                  <a:srgbClr val="C0392B"/>
+                </a:solidFill>
+                <a:latin typeface="Arial"/>
+              </a:rPr>
+              <a:t>bypassed: leak or guess it</a:t>
+            </a:r>
+          </a:p>
+        </p:txBody>
+      </p:sp>
+      <p:sp>
+        <p:nvSpPr>
+          <p:cNvPr id="44" name="Rectangle 43"/>
+          <p:cNvSpPr/>
+          <p:nvPr/>
+        </p:nvSpPr>
+        <p:spPr>
+          <a:xfrm>
+            <a:off x="2900000" y="3650000"/>
+            <a:ext cx="2050000" cy="430000"/>
+          </a:xfrm>
+          <a:prstGeom prst="rect">
+            <a:avLst/>
+          </a:prstGeom>
+          <a:solidFill>
+            <a:srgbClr val="D6E4F0"/>
+          </a:solidFill>
+          <a:ln w="12700">
+            <a:solidFill>
+              <a:srgbClr val="555555"/>
+            </a:solidFill>
+          </a:ln>
+          <a:effectLst/>
+        </p:spPr>
+        <p:style>
+          <a:lnRef idx="1">
+            <a:schemeClr val="accent1"/>
+          </a:lnRef>
+          <a:fillRef idx="3">
+            <a:schemeClr val="accent1"/>
+          </a:fillRef>
+          <a:effectRef idx="2">
+            <a:schemeClr val="accent1"/>
+          </a:effectRef>
+          <a:fontRef idx="minor">
+            <a:schemeClr val="lt1"/>
+          </a:fontRef>
+        </p:style>
+        <p:txBody>
+          <a:bodyPr wrap="square" lIns="45720" tIns="27432" rIns="45720" bIns="27432" rtlCol="0" anchor="ctr"/>
+          <a:lstStyle/>
+          <a:p>
+            <a:pPr algn="ctr"/>
+            <a:r>
+              <a:rPr sz="1200" b="1" i="0">
+                <a:solidFill>
+                  <a:srgbClr val="202020"/>
+                </a:solidFill>
+                <a:latin typeface="Arial"/>
+              </a:rPr>
+              <a:t>ASLR</a:t>
+            </a:r>
+          </a:p>
+        </p:txBody>
+      </p:sp>
+      <p:sp>
+        <p:nvSpPr>
+          <p:cNvPr id="45" name="TextBox 44"/>
+          <p:cNvSpPr txBox="1"/>
+          <p:nvPr/>
+        </p:nvSpPr>
+        <p:spPr>
+          <a:xfrm>
+            <a:off x="2900000" y="4120000"/>
+            <a:ext cx="2050000" cy="240000"/>
+          </a:xfrm>
+          <a:prstGeom prst="rect">
+            <a:avLst/>
+          </a:prstGeom>
+          <a:noFill/>
+        </p:spPr>
+        <p:txBody>
+          <a:bodyPr wrap="square" lIns="0" tIns="0" rIns="0" bIns="0" anchor="t">
+            <a:spAutoFit/>
+          </a:bodyPr>
+          <a:lstStyle/>
+          <a:p>
+            <a:pPr algn="ctr"/>
+            <a:r>
+              <a:rPr sz="1000" b="0" i="1">
+                <a:solidFill>
+                  <a:srgbClr val="C0392B"/>
+                </a:solidFill>
+                <a:latin typeface="Arial"/>
+              </a:rPr>
+              <a:t>bypassed: leak an address</a:t>
+            </a:r>
+          </a:p>
+        </p:txBody>
+      </p:sp>
+      <p:sp>
+        <p:nvSpPr>
+          <p:cNvPr id="46" name="Rectangle 45"/>
+          <p:cNvSpPr/>
+          <p:nvPr/>
+        </p:nvSpPr>
+        <p:spPr>
+          <a:xfrm>
+            <a:off x="5200000" y="3650000"/>
+            <a:ext cx="2050000" cy="430000"/>
+          </a:xfrm>
+          <a:prstGeom prst="rect">
+            <a:avLst/>
+          </a:prstGeom>
+          <a:solidFill>
+            <a:srgbClr val="D6E4F0"/>
+          </a:solidFill>
+          <a:ln w="12700">
+            <a:solidFill>
+              <a:srgbClr val="555555"/>
+            </a:solidFill>
+          </a:ln>
+          <a:effectLst/>
+        </p:spPr>
+        <p:style>
+          <a:lnRef idx="1">
+            <a:schemeClr val="accent1"/>
+          </a:lnRef>
+          <a:fillRef idx="3">
+            <a:schemeClr val="accent1"/>
+          </a:fillRef>
+          <a:effectRef idx="2">
+            <a:schemeClr val="accent1"/>
+          </a:effectRef>
+          <a:fontRef idx="minor">
+            <a:schemeClr val="lt1"/>
+          </a:fontRef>
+        </p:style>
+        <p:txBody>
+          <a:bodyPr wrap="square" lIns="45720" tIns="27432" rIns="45720" bIns="27432" rtlCol="0" anchor="ctr"/>
+          <a:lstStyle/>
+          <a:p>
+            <a:pPr algn="ctr"/>
+            <a:r>
+              <a:rPr sz="1200" b="1" i="0">
+                <a:solidFill>
+                  <a:srgbClr val="202020"/>
+                </a:solidFill>
+                <a:latin typeface="Arial"/>
+              </a:rPr>
+              <a:t>DEP / NX</a:t>
+            </a:r>
+          </a:p>
+        </p:txBody>
+      </p:sp>
+      <p:sp>
+        <p:nvSpPr>
+          <p:cNvPr id="47" name="TextBox 46"/>
+          <p:cNvSpPr txBox="1"/>
+          <p:nvPr/>
+        </p:nvSpPr>
+        <p:spPr>
+          <a:xfrm>
+            <a:off x="5200000" y="4120000"/>
+            <a:ext cx="2050000" cy="240000"/>
+          </a:xfrm>
+          <a:prstGeom prst="rect">
+            <a:avLst/>
+          </a:prstGeom>
+          <a:noFill/>
+        </p:spPr>
+        <p:txBody>
+          <a:bodyPr wrap="square" lIns="0" tIns="0" rIns="0" bIns="0" anchor="t">
+            <a:spAutoFit/>
+          </a:bodyPr>
+          <a:lstStyle/>
+          <a:p>
+            <a:pPr algn="ctr"/>
+            <a:r>
+              <a:rPr sz="1000" b="0" i="1">
+                <a:solidFill>
+                  <a:srgbClr val="C0392B"/>
+                </a:solidFill>
+                <a:latin typeface="Arial"/>
+              </a:rPr>
+              <a:t>bypassed: reuse real code</a:t>
+            </a:r>
+          </a:p>
+        </p:txBody>
+      </p:sp>
+      <p:sp>
+        <p:nvSpPr>
+          <p:cNvPr id="48" name="TextBox 47"/>
+          <p:cNvSpPr txBox="1"/>
+          <p:nvPr/>
+        </p:nvSpPr>
+        <p:spPr>
+          <a:xfrm>
+            <a:off x="600000" y="4410000"/>
+            <a:ext cx="6600000" cy="260000"/>
+          </a:xfrm>
+          <a:prstGeom prst="rect">
+            <a:avLst/>
+          </a:prstGeom>
+          <a:noFill/>
+        </p:spPr>
+        <p:txBody>
+          <a:bodyPr wrap="square" lIns="0" tIns="0" rIns="0" bIns="0" anchor="t">
+            <a:spAutoFit/>
+          </a:bodyPr>
+          <a:lstStyle/>
+          <a:p>
+            <a:pPr algn="l"/>
+            <a:r>
+              <a:rPr sz="1100" b="0" i="1">
+                <a:solidFill>
+                  <a:srgbClr val="8A8A8A"/>
+                </a:solidFill>
+                <a:latin typeface="Arial"/>
+              </a:rPr>
+              <a:t>So we need defenses that stop control hijacking itself, not just raise the cost</a:t>
+            </a:r>
+          </a:p>
+        </p:txBody>
+      </p:sp>
+    </p:spTree>
+  </p:cSld>
+  <p:clrMapOvr>
+    <a:masterClrMapping/>
+  </p:clrMapOvr>
+</p:sld>
+</file>
+
+<file path=ppt/slides/slide4.xml><?xml version="1.0" encoding="utf-8"?>
+<p:sld xmlns:a="http://schemas.openxmlformats.org/drawingml/2006/main" xmlns:r="http://schemas.openxmlformats.org/officeDocument/2006/relationships" xmlns:p="http://schemas.openxmlformats.org/presentationml/2006/main">
+  <p:cSld>
+    <p:spTree>
+      <p:nvGrpSpPr>
+        <p:cNvPr id="1" name=""/>
+        <p:cNvGrpSpPr/>
+        <p:nvPr/>
+      </p:nvGrpSpPr>
+      <p:grpSpPr>
+        <a:xfrm>
+          <a:off x="0" y="0"/>
+          <a:ext cx="0" cy="0"/>
+          <a:chOff x="0" y="0"/>
+          <a:chExt cx="0" cy="0"/>
+        </a:xfrm>
+      </p:grpSpPr>
+      <p:sp>
+        <p:nvSpPr>
+          <p:cNvPr id="2" name="Title 1"/>
+          <p:cNvSpPr>
+            <a:spLocks noGrp="1"/>
+          </p:cNvSpPr>
+          <p:nvPr>
+            <p:ph type="title"/>
+          </p:nvPr>
+        </p:nvSpPr>
+        <p:spPr>
+          <a:xfrm>
+            <a:off x="534300" y="224048"/>
+            <a:ext cx="8046720" cy="685800"/>
+          </a:xfrm>
+        </p:spPr>
+        <p:txBody>
+          <a:bodyPr wrap="square"/>
+          <a:lstStyle/>
+          <a:p>
+            <a:pPr algn="l"/>
+            <a:r>
+              <a:rPr sz="2800" b="1" i="0">
+                <a:solidFill>
+                  <a:srgbClr val="202020"/>
+                </a:solidFill>
+                <a:latin typeface="Arial"/>
+              </a:rPr>
+              <a:t>Control Hijacking: the Two Targets</a:t>
+            </a:r>
+          </a:p>
+        </p:txBody>
+      </p:sp>
+      <p:sp>
+        <p:nvSpPr>
+          <p:cNvPr id="3" name="Text Placeholder 2"/>
+          <p:cNvSpPr>
+            <a:spLocks noGrp="1"/>
+          </p:cNvSpPr>
+          <p:nvPr>
+            <p:ph type="body" idx="1"/>
+          </p:nvPr>
+        </p:nvSpPr>
+        <p:spPr>
+          <a:xfrm>
+            <a:off x="420000" y="1298448"/>
+            <a:ext cx="8046720" cy="3383280"/>
+          </a:xfrm>
+        </p:spPr>
+        <p:txBody>
+          <a:bodyPr wrap="square" lIns="0" tIns="0" rIns="0" bIns="0"/>
+          <a:lstStyle/>
+          <a:p>
+            <a:r>
+              <a:rPr sz="2000" b="0" i="0">
+                <a:solidFill>
+                  <a:srgbClr val="202020"/>
+                </a:solidFill>
+                <a:latin typeface="Arial"/>
+              </a:rPr>
+              <a:t>C/C++ computes some code targets at runtime, and an attacker aims at those</a:t>
+            </a:r>
+          </a:p>
+          <a:p>
+            <a:r>
+              <a:rPr sz="2000" b="0" i="0">
+                <a:solidFill>
+                  <a:srgbClr val="202020"/>
+                </a:solidFill>
+                <a:latin typeface="Arial"/>
+              </a:rPr>
+              <a:t>Return address (on the stack): chooses where ret goes</a:t>
+            </a:r>
+          </a:p>
+          <a:p>
+            <a:r>
+              <a:rPr sz="2000" b="0" i="0">
+                <a:solidFill>
+                  <a:srgbClr val="202020"/>
+                </a:solidFill>
+                <a:latin typeface="Arial"/>
+              </a:rPr>
+              <a:t>Function pointer (stack or heap): chooses where an indirect call goes</a:t>
+            </a:r>
+          </a:p>
+        </p:txBody>
+      </p:sp>
+      <p:sp>
+        <p:nvSpPr>
+          <p:cNvPr id="41" name="Google Shape;41;p8"/>
+          <p:cNvSpPr txBox="1">
+            <a:spLocks noGrp="1"/>
+          </p:cNvSpPr>
+          <p:nvPr>
+            <p:ph type="sldNum" idx="12"/>
+          </p:nvPr>
+        </p:nvSpPr>
+        <p:spPr>
+          <a:xfrm>
+            <a:off x="8229600" y="4690872"/>
+            <a:ext cx="548640" cy="274320"/>
+          </a:xfrm>
+          <a:prstGeom prst="rect">
+            <a:avLst/>
+          </a:prstGeom>
+          <a:noFill/>
+          <a:ln>
+            <a:noFill/>
+          </a:ln>
+        </p:spPr>
+        <p:txBody>
+          <a:bodyPr spcFirstLastPara="1" wrap="square" lIns="0" tIns="0" rIns="0" bIns="0" anchor="ctr" anchorCtr="0">
+            <a:noAutofit/>
+          </a:bodyPr>
+          <a:lstStyle/>
+          <a:p>
+            <a:pPr marL="0" lvl="0" indent="0" algn="r" rtl="0">
+              <a:spcBef>
+                <a:spcPts val="0"/>
+              </a:spcBef>
+              <a:spcAft>
+                <a:spcPts val="0"/>
+              </a:spcAft>
+              <a:buClr>
+                <a:srgbClr val="8A8A8A"/>
+              </a:buClr>
+              <a:buSzPts val="1200"/>
+              <a:buFont typeface="Arial"/>
+              <a:buNone/>
+            </a:pPr>
+            <a:fld id="{00000000-1234-1234-1234-123412341234}" type="slidenum">
+              <a:rPr lang="en-US"/>
+              <a:t>4</a:t>
+            </a:fld>
+            <a:endParaRPr/>
+          </a:p>
+        </p:txBody>
+      </p:sp>
+      <p:sp>
+        <p:nvSpPr>
+          <p:cNvPr id="42" name="Rectangle 41"/>
+          <p:cNvSpPr/>
+          <p:nvPr/>
+        </p:nvSpPr>
+        <p:spPr>
+          <a:xfrm>
+            <a:off x="600000" y="3250000"/>
+            <a:ext cx="2900000" cy="560000"/>
+          </a:xfrm>
+          <a:prstGeom prst="rect">
+            <a:avLst/>
+          </a:prstGeom>
+          <a:solidFill>
+            <a:srgbClr val="D6E4F0"/>
+          </a:solidFill>
+          <a:ln w="12700">
+            <a:solidFill>
+              <a:srgbClr val="555555"/>
+            </a:solidFill>
+          </a:ln>
+          <a:effectLst/>
+        </p:spPr>
+        <p:style>
+          <a:lnRef idx="1">
+            <a:schemeClr val="accent1"/>
+          </a:lnRef>
+          <a:fillRef idx="3">
+            <a:schemeClr val="accent1"/>
+          </a:fillRef>
+          <a:effectRef idx="2">
+            <a:schemeClr val="accent1"/>
+          </a:effectRef>
+          <a:fontRef idx="minor">
+            <a:schemeClr val="lt1"/>
+          </a:fontRef>
+        </p:style>
+        <p:txBody>
+          <a:bodyPr wrap="square" lIns="45720" tIns="27432" rIns="45720" bIns="27432" rtlCol="0" anchor="ctr"/>
+          <a:lstStyle/>
+          <a:p>
+            <a:pPr algn="ctr"/>
+            <a:r>
+              <a:rPr sz="1300" b="1" i="0">
+                <a:solidFill>
+                  <a:srgbClr val="202020"/>
+                </a:solidFill>
+                <a:latin typeface="Arial"/>
+              </a:rPr>
+              <a:t>return address</a:t>
+            </a:r>
+          </a:p>
+          <a:p>
+            <a:pPr algn="ctr"/>
+            <a:r>
+              <a:rPr sz="1000" b="0" i="1">
+                <a:solidFill>
+                  <a:srgbClr val="8A8A8A"/>
+                </a:solidFill>
+                <a:latin typeface="Arial"/>
+              </a:rPr>
+              <a:t>chooses where ret goes</a:t>
+            </a:r>
+          </a:p>
+        </p:txBody>
+      </p:sp>
+      <p:sp>
+        <p:nvSpPr>
+          <p:cNvPr id="43" name="Rectangle 42"/>
+          <p:cNvSpPr/>
+          <p:nvPr/>
+        </p:nvSpPr>
+        <p:spPr>
+          <a:xfrm>
+            <a:off x="600000" y="3960000"/>
+            <a:ext cx="2900000" cy="560000"/>
+          </a:xfrm>
+          <a:prstGeom prst="rect">
+            <a:avLst/>
+          </a:prstGeom>
+          <a:solidFill>
+            <a:srgbClr val="D6E4F0"/>
+          </a:solidFill>
+          <a:ln w="12700">
+            <a:solidFill>
+              <a:srgbClr val="555555"/>
+            </a:solidFill>
+          </a:ln>
+          <a:effectLst/>
+        </p:spPr>
+        <p:style>
+          <a:lnRef idx="1">
+            <a:schemeClr val="accent1"/>
+          </a:lnRef>
+          <a:fillRef idx="3">
+            <a:schemeClr val="accent1"/>
+          </a:fillRef>
+          <a:effectRef idx="2">
+            <a:schemeClr val="accent1"/>
+          </a:effectRef>
+          <a:fontRef idx="minor">
+            <a:schemeClr val="lt1"/>
+          </a:fontRef>
+        </p:style>
+        <p:txBody>
+          <a:bodyPr wrap="square" lIns="45720" tIns="27432" rIns="45720" bIns="27432" rtlCol="0" anchor="ctr"/>
+          <a:lstStyle/>
+          <a:p>
+            <a:pPr algn="ctr"/>
+            <a:r>
+              <a:rPr sz="1300" b="1" i="0">
+                <a:solidFill>
+                  <a:srgbClr val="202020"/>
+                </a:solidFill>
+                <a:latin typeface="Arial"/>
+              </a:rPr>
+              <a:t>function pointer</a:t>
+            </a:r>
+          </a:p>
+          <a:p>
+            <a:pPr algn="ctr"/>
+            <a:r>
+              <a:rPr sz="1000" b="0" i="1">
+                <a:solidFill>
+                  <a:srgbClr val="8A8A8A"/>
+                </a:solidFill>
+                <a:latin typeface="Arial"/>
+              </a:rPr>
+              <a:t>where an indirect call goes</a:t>
+            </a:r>
+          </a:p>
+        </p:txBody>
+      </p:sp>
+      <p:sp>
+        <p:nvSpPr>
+          <p:cNvPr id="44" name="Rectangle 43"/>
+          <p:cNvSpPr/>
+          <p:nvPr/>
+        </p:nvSpPr>
+        <p:spPr>
+          <a:xfrm>
+            <a:off x="4900000" y="3560000"/>
+            <a:ext cx="2850000" cy="640000"/>
+          </a:xfrm>
+          <a:prstGeom prst="rect">
+            <a:avLst/>
+          </a:prstGeom>
+          <a:solidFill>
+            <a:srgbClr val="F6D8C4"/>
+          </a:solidFill>
+          <a:ln w="12700">
+            <a:solidFill>
+              <a:srgbClr val="555555"/>
+            </a:solidFill>
+          </a:ln>
+          <a:effectLst/>
+        </p:spPr>
+        <p:style>
+          <a:lnRef idx="1">
+            <a:schemeClr val="accent1"/>
+          </a:lnRef>
+          <a:fillRef idx="3">
+            <a:schemeClr val="accent1"/>
+          </a:fillRef>
+          <a:effectRef idx="2">
+            <a:schemeClr val="accent1"/>
+          </a:effectRef>
+          <a:fontRef idx="minor">
+            <a:schemeClr val="lt1"/>
+          </a:fontRef>
+        </p:style>
+        <p:txBody>
+          <a:bodyPr wrap="square" lIns="45720" tIns="27432" rIns="45720" bIns="27432" rtlCol="0" anchor="ctr"/>
+          <a:lstStyle/>
+          <a:p>
+            <a:pPr algn="ctr"/>
+            <a:r>
+              <a:rPr sz="1200" b="1" i="0">
+                <a:solidFill>
+                  <a:srgbClr val="C0392B"/>
+                </a:solidFill>
+                <a:latin typeface="Arial"/>
+              </a:rPr>
+              <a:t>attacker picks the code that runs</a:t>
+            </a:r>
+          </a:p>
+        </p:txBody>
+      </p:sp>
+      <p:cxnSp>
+        <p:nvCxnSpPr>
+          <p:cNvPr id="45" name="Connector 44"/>
+          <p:cNvCxnSpPr/>
+          <p:nvPr/>
+        </p:nvCxnSpPr>
+        <p:spPr>
+          <a:xfrm>
+            <a:off x="3500000" y="3530000"/>
+            <a:ext cx="1400000" cy="260000"/>
+          </a:xfrm>
+          <a:prstGeom prst="bentConnector3">
+            <a:avLst/>
+          </a:prstGeom>
+          <a:ln w="25400">
+            <a:solidFill>
+              <a:srgbClr val="C0392B"/>
+            </a:solidFill>
+            <a:tailEnd type="triangle" w="med" len="med"/>
+          </a:ln>
+          <a:effectLst/>
+        </p:spPr>
+        <p:style>
+          <a:lnRef idx="2">
+            <a:schemeClr val="accent1"/>
+          </a:lnRef>
+          <a:fillRef idx="0">
+            <a:schemeClr val="accent1"/>
+          </a:fillRef>
+          <a:effectRef idx="1">
+            <a:schemeClr val="accent1"/>
+          </a:effectRef>
+          <a:fontRef idx="minor">
+            <a:schemeClr val="tx1"/>
+          </a:fontRef>
+        </p:style>
+      </p:cxnSp>
+      <p:cxnSp>
+        <p:nvCxnSpPr>
+          <p:cNvPr id="46" name="Connector 45"/>
+          <p:cNvCxnSpPr/>
+          <p:nvPr/>
+        </p:nvCxnSpPr>
+        <p:spPr>
+          <a:xfrm flipV="1">
+            <a:off x="3500000" y="3970000"/>
+            <a:ext cx="1400000" cy="270000"/>
+          </a:xfrm>
+          <a:prstGeom prst="bentConnector3">
+            <a:avLst/>
+          </a:prstGeom>
+          <a:ln w="25400">
+            <a:solidFill>
+              <a:srgbClr val="C0392B"/>
+            </a:solidFill>
+            <a:tailEnd type="triangle" w="med" len="med"/>
+          </a:ln>
+          <a:effectLst/>
+        </p:spPr>
+        <p:style>
+          <a:lnRef idx="2">
+            <a:schemeClr val="accent1"/>
+          </a:lnRef>
+          <a:fillRef idx="0">
+            <a:schemeClr val="accent1"/>
+          </a:fillRef>
+          <a:effectRef idx="1">
+            <a:schemeClr val="accent1"/>
+          </a:effectRef>
+          <a:fontRef idx="minor">
+            <a:schemeClr val="tx1"/>
+          </a:fontRef>
+        </p:style>
+      </p:cxnSp>
+    </p:spTree>
+  </p:cSld>
+  <p:clrMapOvr>
+    <a:masterClrMapping/>
+  </p:clrMapOvr>
+  <p:timing>
+    <p:tnLst>
+      <p:par>
+        <p:cTn id="1" dur="indefinite" restart="never" nodeType="tmRoot">
+          <p:childTnLst>
+            <p:seq concurrent="1" nextAc="seek">
+              <p:cTn id="2" dur="indefinite" nodeType="mainSeq">
+                <p:childTnLst>
                   <p:par>
-                    <p:cTn id="25" fill="hold">
+                    <p:cTn id="3" fill="hold">
                       <p:stCondLst>
                         <p:cond delay="indefinite"/>
                       </p:stCondLst>
                       <p:childTnLst>
                         <p:par>
-                          <p:cTn id="26" fill="hold">
+                          <p:cTn id="4" fill="hold">
                             <p:stCondLst>
                               <p:cond delay="0"/>
                             </p:stCondLst>
                             <p:childTnLst>
                               <p:par>
-                                <p:cTn id="27" presetID="10" presetClass="entr" presetSubtype="0" fill="hold" nodeType="clickEffect">
+                                <p:cTn id="5" presetID="10" presetClass="entr" presetSubtype="0" fill="hold" nodeType="clickEffect">
                                   <p:stCondLst>
                                     <p:cond delay="0"/>
                                   </p:stCondLst>
                                   <p:childTnLst>
                                     <p:set>
                                       <p:cBhvr>
-                                        <p:cTn id="28" dur="1" fill="hold">
+                                        <p:cTn id="6" dur="1" fill="hold">
                                           <p:stCondLst>
                                             <p:cond delay="0"/>
                                           </p:stCondLst>
                                         </p:cTn>
                                         <p:tgtEl>
-                                          <p:spTgt spid="48"/>
+                                          <p:spTgt spid="44"/>
                                         </p:tgtEl>
                                         <p:attrNameLst>
                                           <p:attrName>style.visibility</p:attrName>
@@ -8820,9 +8503,9 @@
                                     </p:set>
                                     <p:animEffect transition="in" filter="fade">
                                       <p:cBhvr>
-                                        <p:cTn id="29" dur="500"/>
+                                        <p:cTn id="7" dur="500"/>
                                         <p:tgtEl>
-                                          <p:spTgt spid="48"/>
+                                          <p:spTgt spid="44"/>
                                         </p:tgtEl>
                                       </p:cBhvr>
                                     </p:animEffect>
@@ -8830,20 +8513,20 @@
                                 </p:cTn>
                               </p:par>
                               <p:par>
-                                <p:cTn id="30" presetID="10" presetClass="entr" presetSubtype="0" fill="hold" nodeType="withEffect">
+                                <p:cTn id="8" presetID="10" presetClass="entr" presetSubtype="0" fill="hold" nodeType="withEffect">
                                   <p:stCondLst>
                                     <p:cond delay="0"/>
                                   </p:stCondLst>
                                   <p:childTnLst>
                                     <p:set>
                                       <p:cBhvr>
-                                        <p:cTn id="31" dur="1" fill="hold">
+                                        <p:cTn id="9" dur="1" fill="hold">
                                           <p:stCondLst>
                                             <p:cond delay="0"/>
                                           </p:stCondLst>
                                         </p:cTn>
                                         <p:tgtEl>
-                                          <p:spTgt spid="49"/>
+                                          <p:spTgt spid="45"/>
                                         </p:tgtEl>
                                         <p:attrNameLst>
                                           <p:attrName>style.visibility</p:attrName>
@@ -8855,9 +8538,9 @@
                                     </p:set>
                                     <p:animEffect transition="in" filter="fade">
                                       <p:cBhvr>
-                                        <p:cTn id="32" dur="500"/>
+                                        <p:cTn id="10" dur="500"/>
                                         <p:tgtEl>
-                                          <p:spTgt spid="49"/>
+                                          <p:spTgt spid="45"/>
                                         </p:tgtEl>
                                       </p:cBhvr>
                                     </p:animEffect>
@@ -8865,20 +8548,20 @@
                                 </p:cTn>
                               </p:par>
                               <p:par>
-                                <p:cTn id="33" presetID="10" presetClass="entr" presetSubtype="0" fill="hold" nodeType="withEffect">
+                                <p:cTn id="11" presetID="10" presetClass="entr" presetSubtype="0" fill="hold" nodeType="withEffect">
                                   <p:stCondLst>
                                     <p:cond delay="0"/>
                                   </p:stCondLst>
                                   <p:childTnLst>
                                     <p:set>
                                       <p:cBhvr>
-                                        <p:cTn id="34" dur="1" fill="hold">
+                                        <p:cTn id="12" dur="1" fill="hold">
                                           <p:stCondLst>
                                             <p:cond delay="0"/>
                                           </p:stCondLst>
                                         </p:cTn>
                                         <p:tgtEl>
-                                          <p:spTgt spid="50"/>
+                                          <p:spTgt spid="46"/>
                                         </p:tgtEl>
                                         <p:attrNameLst>
                                           <p:attrName>style.visibility</p:attrName>
@@ -8890,9 +8573,9 @@
                                     </p:set>
                                     <p:animEffect transition="in" filter="fade">
                                       <p:cBhvr>
-                                        <p:cTn id="35" dur="500"/>
+                                        <p:cTn id="13" dur="500"/>
                                         <p:tgtEl>
-                                          <p:spTgt spid="50"/>
+                                          <p:spTgt spid="46"/>
                                         </p:tgtEl>
                                       </p:cBhvr>
                                     </p:animEffect>
@@ -8957,7 +8640,12 @@
             <p:ph type="title"/>
           </p:nvPr>
         </p:nvSpPr>
-        <p:spPr/>
+        <p:spPr>
+          <a:xfrm>
+            <a:off x="534300" y="1965960"/>
+            <a:ext cx="8046720" cy="822960"/>
+          </a:xfrm>
+        </p:spPr>
         <p:txBody>
           <a:bodyPr/>
           <a:lstStyle/>
@@ -8969,7 +8657,7 @@
                 </a:solidFill>
                 <a:latin typeface="Arial"/>
               </a:rPr>
-              <a:t>Line of Defense 1: Make Hijacking Hard</a:t>
+              <a:t>Protect the Return Address</a:t>
             </a:r>
           </a:p>
         </p:txBody>
@@ -8984,7 +8672,12 @@
             <p:ph type="body" idx="1"/>
           </p:nvPr>
         </p:nvSpPr>
-        <p:spPr/>
+        <p:spPr>
+          <a:xfrm>
+            <a:off x="534300" y="2761488"/>
+            <a:ext cx="8046720" cy="457200"/>
+          </a:xfrm>
+        </p:spPr>
         <p:txBody>
           <a:bodyPr/>
           <a:lstStyle/>
@@ -8996,7 +8689,7 @@
                 </a:solidFill>
                 <a:latin typeface="Arial"/>
               </a:rPr>
-              <a:t>Protect the targets an attacker must corrupt to steer control</a:t>
+              <a:t>The backward edge: shadow stacks and Intel CET</a:t>
             </a:r>
           </a:p>
         </p:txBody>
@@ -9087,7 +8780,12 @@
             <p:ph type="title"/>
           </p:nvPr>
         </p:nvSpPr>
-        <p:spPr/>
+        <p:spPr>
+          <a:xfrm>
+            <a:off x="534300" y="224048"/>
+            <a:ext cx="8046720" cy="685800"/>
+          </a:xfrm>
+        </p:spPr>
         <p:txBody>
           <a:bodyPr wrap="square"/>
           <a:lstStyle/>
@@ -9100,7 +8798,7 @@
                 </a:solidFill>
                 <a:latin typeface="Arial"/>
               </a:rPr>
-              <a:t>Control-Flow Integrity (CFI)</a:t>
+              <a:t>Shadow Stacks: Protect the Return Address</a:t>
             </a:r>
           </a:p>
         </p:txBody>
@@ -9115,7 +8813,12 @@
             <p:ph type="body" idx="1"/>
           </p:nvPr>
         </p:nvSpPr>
-        <p:spPr/>
+        <p:spPr>
+          <a:xfrm>
+            <a:off x="420000" y="1298448"/>
+            <a:ext cx="8046720" cy="3383280"/>
+          </a:xfrm>
+        </p:spPr>
         <p:txBody>
           <a:bodyPr wrap="square" lIns="0" tIns="0" rIns="0" bIns="0"/>
           <a:lstStyle/>
@@ -9127,7 +8830,7 @@
                 </a:solidFill>
                 <a:latin typeface="Arial"/>
               </a:rPr>
-              <a:t>Every indirect call or jump must land on a target the program actually allows</a:t>
+              <a:t>Check the return address directly, instead of a separate canary value</a:t>
             </a:r>
           </a:p>
           <a:p>
@@ -9138,7 +8841,7 @@
                 </a:solidFill>
                 <a:latin typeface="Arial"/>
               </a:rPr>
-              <a:t>Compute the legal target set ahead of time; check it at runtime before the jump</a:t>
+              <a:t>On call: record the return address in a protected shadow location</a:t>
             </a:r>
           </a:p>
           <a:p>
@@ -9149,7 +8852,7 @@
                 </a:solidFill>
                 <a:latin typeface="Arial"/>
               </a:rPr>
-              <a:t>An overwritten function pointer now points outside the set, so the call is refused</a:t>
+              <a:t>On return: compare the two; reject unless they match</a:t>
             </a:r>
           </a:p>
         </p:txBody>
@@ -9207,14 +8910,49 @@
       </p:sp>
       <p:sp>
         <p:nvSpPr>
-          <p:cNvPr id="42" name="Rectangle 41"/>
+          <p:cNvPr id="42" name="TextBox 41"/>
+          <p:cNvSpPr txBox="1"/>
+          <p:nvPr/>
+        </p:nvSpPr>
+        <p:spPr>
+          <a:xfrm>
+            <a:off x="800000" y="3200000"/>
+            <a:ext cx="2300000" cy="230000"/>
+          </a:xfrm>
+          <a:prstGeom prst="rect">
+            <a:avLst/>
+          </a:prstGeom>
+          <a:noFill/>
+        </p:spPr>
+        <p:txBody>
+          <a:bodyPr wrap="square" lIns="0" tIns="0" rIns="0" bIns="0" anchor="t">
+            <a:spAutoFit/>
+          </a:bodyPr>
+          <a:lstStyle/>
+          <a:p>
+            <a:pPr algn="ctr"/>
+            <a:r>
+              <a:rPr sz="1100" b="1" i="0">
+                <a:solidFill>
+                  <a:srgbClr val="8A8A8A"/>
+                </a:solidFill>
+                <a:latin typeface="Arial"/>
+              </a:rPr>
+              <a:t>normal stack</a:t>
+            </a:r>
+          </a:p>
+        </p:txBody>
+      </p:sp>
+      <p:sp>
+        <p:nvSpPr>
+          <p:cNvPr id="43" name="Rectangle 42"/>
           <p:cNvSpPr/>
           <p:nvPr/>
         </p:nvSpPr>
         <p:spPr>
           <a:xfrm>
-            <a:off x="900000" y="3500000"/>
-            <a:ext cx="2100000" cy="520000"/>
+            <a:off x="800000" y="3450000"/>
+            <a:ext cx="2300000" cy="340000"/>
           </a:xfrm>
           <a:prstGeom prst="rect">
             <a:avLst/>
@@ -9249,33 +8987,33 @@
           <a:p>
             <a:pPr algn="ctr"/>
             <a:r>
-              <a:rPr sz="1100" b="0" i="0">
+              <a:rPr sz="1000" b="0" i="0">
                 <a:solidFill>
                   <a:srgbClr val="202020"/>
                 </a:solidFill>
-                <a:latin typeface="Courier New"/>
-              </a:rPr>
-              <a:t>indirect call  (*fp)()</a:t>
-            </a:r>
-          </a:p>
-        </p:txBody>
-      </p:sp>
-      <p:sp>
-        <p:nvSpPr>
-          <p:cNvPr id="43" name="Rectangle 42"/>
+                <a:latin typeface="Arial"/>
+              </a:rPr>
+              <a:t>locals / buf</a:t>
+            </a:r>
+          </a:p>
+        </p:txBody>
+      </p:sp>
+      <p:sp>
+        <p:nvSpPr>
+          <p:cNvPr id="44" name="Rectangle 43"/>
           <p:cNvSpPr/>
           <p:nvPr/>
         </p:nvSpPr>
         <p:spPr>
           <a:xfrm>
-            <a:off x="4000000" y="3250000"/>
-            <a:ext cx="1700000" cy="320000"/>
+            <a:off x="800000" y="3790000"/>
+            <a:ext cx="2300000" cy="340000"/>
           </a:xfrm>
           <a:prstGeom prst="rect">
             <a:avLst/>
           </a:prstGeom>
           <a:solidFill>
-            <a:srgbClr val="DDEEDD"/>
+            <a:srgbClr val="F6D8C4"/>
           </a:solidFill>
           <a:ln w="12700">
             <a:solidFill>
@@ -9304,27 +9042,62 @@
           <a:p>
             <a:pPr algn="ctr"/>
             <a:r>
-              <a:rPr sz="1000" b="0" i="0">
-                <a:solidFill>
-                  <a:srgbClr val="202020"/>
-                </a:solidFill>
-                <a:latin typeface="Arial"/>
-              </a:rPr>
-              <a:t>handler A</a:t>
-            </a:r>
-          </a:p>
-        </p:txBody>
-      </p:sp>
-      <p:sp>
-        <p:nvSpPr>
-          <p:cNvPr id="44" name="Rectangle 43"/>
+              <a:rPr sz="1000" b="1" i="0">
+                <a:solidFill>
+                  <a:srgbClr val="C0392B"/>
+                </a:solidFill>
+                <a:latin typeface="Arial"/>
+              </a:rPr>
+              <a:t>return = GADGET</a:t>
+            </a:r>
+          </a:p>
+        </p:txBody>
+      </p:sp>
+      <p:sp>
+        <p:nvSpPr>
+          <p:cNvPr id="45" name="TextBox 44"/>
+          <p:cNvSpPr txBox="1"/>
+          <p:nvPr/>
+        </p:nvSpPr>
+        <p:spPr>
+          <a:xfrm>
+            <a:off x="4200000" y="3200000"/>
+            <a:ext cx="2300000" cy="230000"/>
+          </a:xfrm>
+          <a:prstGeom prst="rect">
+            <a:avLst/>
+          </a:prstGeom>
+          <a:noFill/>
+        </p:spPr>
+        <p:txBody>
+          <a:bodyPr wrap="square" lIns="0" tIns="0" rIns="0" bIns="0" anchor="t">
+            <a:spAutoFit/>
+          </a:bodyPr>
+          <a:lstStyle/>
+          <a:p>
+            <a:pPr algn="ctr"/>
+            <a:r>
+              <a:rPr sz="1100" b="1" i="0">
+                <a:solidFill>
+                  <a:srgbClr val="8A8A8A"/>
+                </a:solidFill>
+                <a:latin typeface="Arial"/>
+              </a:rPr>
+              <a:t>shadow stack</a:t>
+            </a:r>
+          </a:p>
+        </p:txBody>
+      </p:sp>
+      <p:sp>
+        <p:nvSpPr>
+          <p:cNvPr id="46" name="Rectangle 45"/>
           <p:cNvSpPr/>
           <p:nvPr/>
         </p:nvSpPr>
         <p:spPr>
           <a:xfrm>
-            <a:off x="4000000" y="3630000"/>
-            <a:ext cx="1700000" cy="320000"/>
+            <a:off x="4200000" y="3790000"/>
+            <a:ext cx="2300000" cy="340000"/>
           </a:xfrm>
           <a:prstGeom prst="rect">
             <a:avLst/>
@@ -9365,28 +9138,28 @@
                 </a:solidFill>
                 <a:latin typeface="Arial"/>
               </a:rPr>
-              <a:t>handler B</a:t>
+              <a:t>return = real</a:t>
             </a:r>
           </a:p>
         </p:txBody>
       </p:sp>
       <p:cxnSp>
         <p:nvCxnSpPr>
-          <p:cNvPr id="45" name="Connector 44"/>
+          <p:cNvPr id="47" name="Connector 46"/>
           <p:cNvCxnSpPr/>
           <p:nvPr/>
         </p:nvCxnSpPr>
         <p:spPr>
-          <a:xfrm flipV="1">
-            <a:off x="3000000" y="3410000"/>
-            <a:ext cx="1000000" cy="270000"/>
+          <a:xfrm>
+            <a:off x="3100000" y="3960000"/>
+            <a:ext cx="1100000" cy="0"/>
           </a:xfrm>
           <a:prstGeom prst="bentConnector3">
             <a:avLst/>
           </a:prstGeom>
-          <a:ln w="22225">
+          <a:ln w="25400">
             <a:solidFill>
-              <a:srgbClr val="2E7D32"/>
+              <a:srgbClr val="C0392B"/>
             </a:solidFill>
             <a:tailEnd type="triangle" w="med" len="med"/>
           </a:ln>
@@ -9407,53 +9180,16 @@
           </a:fontRef>
         </p:style>
       </p:cxnSp>
-      <p:cxnSp>
-        <p:nvCxnSpPr>
-          <p:cNvPr id="46" name="Connector 45"/>
-          <p:cNvCxnSpPr/>
-          <p:nvPr/>
-        </p:nvCxnSpPr>
-        <p:spPr>
-          <a:xfrm flipV="1">
-            <a:off x="3000000" y="3790000"/>
-            <a:ext cx="1000000" cy="10000"/>
-          </a:xfrm>
-          <a:prstGeom prst="bentConnector3">
-            <a:avLst/>
-          </a:prstGeom>
-          <a:ln w="22225">
-            <a:solidFill>
-              <a:srgbClr val="2E7D32"/>
-            </a:solidFill>
-            <a:tailEnd type="triangle" w="med" len="med"/>
-          </a:ln>
-          <a:effectLst/>
-        </p:spPr>
-        <p:style>
-          <a:lnRef idx="2">
-            <a:schemeClr val="accent1"/>
-          </a:lnRef>
-          <a:fillRef idx="0">
-            <a:schemeClr val="accent1"/>
-          </a:fillRef>
-          <a:effectRef idx="1">
-            <a:schemeClr val="accent1"/>
-          </a:effectRef>
-          <a:fontRef idx="minor">
-            <a:schemeClr val="tx1"/>
-          </a:fontRef>
-        </p:style>
-      </p:cxnSp>
-      <p:sp>
-        <p:nvSpPr>
-          <p:cNvPr id="47" name="TextBox 46"/>
+      <p:sp>
+        <p:nvSpPr>
+          <p:cNvPr id="48" name="TextBox 47"/>
           <p:cNvSpPr txBox="1"/>
           <p:nvPr/>
         </p:nvSpPr>
         <p:spPr>
           <a:xfrm>
-            <a:off x="4000000" y="3010000"/>
-            <a:ext cx="2600000" cy="230000"/>
+            <a:off x="800000" y="4270000"/>
+            <a:ext cx="6000000" cy="300000"/>
           </a:xfrm>
           <a:prstGeom prst="rect">
             <a:avLst/>
@@ -9466,121 +9202,29 @@
           </a:bodyPr>
           <a:lstStyle/>
           <a:p>
-            <a:pPr algn="l"/>
-            <a:r>
-              <a:rPr sz="1000" b="0" i="1">
-                <a:solidFill>
-                  <a:srgbClr val="2E7D32"/>
-                </a:solidFill>
-                <a:latin typeface="Arial"/>
-              </a:rPr>
-              <a:t>allowed target set</a:t>
-            </a:r>
-          </a:p>
-        </p:txBody>
-      </p:sp>
-      <p:sp>
-        <p:nvSpPr>
-          <p:cNvPr id="48" name="Rectangle 47"/>
-          <p:cNvSpPr/>
-          <p:nvPr/>
-        </p:nvSpPr>
-        <p:spPr>
-          <a:xfrm>
-            <a:off x="4000000" y="4150000"/>
-            <a:ext cx="1850000" cy="340000"/>
-          </a:xfrm>
-          <a:prstGeom prst="rect">
-            <a:avLst/>
-          </a:prstGeom>
-          <a:solidFill>
-            <a:srgbClr val="F6D8C4"/>
-          </a:solidFill>
-          <a:ln w="12700">
-            <a:solidFill>
-              <a:srgbClr val="555555"/>
-            </a:solidFill>
-          </a:ln>
-          <a:effectLst/>
-        </p:spPr>
-        <p:style>
-          <a:lnRef idx="1">
-            <a:schemeClr val="accent1"/>
-          </a:lnRef>
-          <a:fillRef idx="3">
-            <a:schemeClr val="accent1"/>
-          </a:fillRef>
-          <a:effectRef idx="2">
-            <a:schemeClr val="accent1"/>
-          </a:effectRef>
-          <a:fontRef idx="minor">
-            <a:schemeClr val="lt1"/>
-          </a:fontRef>
-        </p:style>
-        <p:txBody>
-          <a:bodyPr wrap="square" lIns="45720" tIns="27432" rIns="45720" bIns="27432" rtlCol="0" anchor="ctr"/>
-          <a:lstStyle/>
-          <a:p>
             <a:pPr algn="ctr"/>
             <a:r>
-              <a:rPr sz="1000" b="0" i="0">
-                <a:solidFill>
-                  <a:srgbClr val="202020"/>
-                </a:solidFill>
-                <a:latin typeface="Arial"/>
-              </a:rPr>
-              <a:t>attacker's gadget</a:t>
-            </a:r>
-          </a:p>
-        </p:txBody>
-      </p:sp>
-      <p:cxnSp>
-        <p:nvCxnSpPr>
-          <p:cNvPr id="49" name="Connector 48"/>
-          <p:cNvCxnSpPr/>
-          <p:nvPr/>
-        </p:nvCxnSpPr>
-        <p:spPr>
-          <a:xfrm>
-            <a:off x="3000000" y="3920000"/>
-            <a:ext cx="1000000" cy="380000"/>
-          </a:xfrm>
-          <a:prstGeom prst="bentConnector3">
-            <a:avLst/>
-          </a:prstGeom>
-          <a:ln w="25400">
-            <a:solidFill>
-              <a:srgbClr val="C0392B"/>
-            </a:solidFill>
-            <a:tailEnd type="triangle" w="med" len="med"/>
-          </a:ln>
-          <a:effectLst/>
-        </p:spPr>
-        <p:style>
-          <a:lnRef idx="2">
-            <a:schemeClr val="accent1"/>
-          </a:lnRef>
-          <a:fillRef idx="0">
-            <a:schemeClr val="accent1"/>
-          </a:fillRef>
-          <a:effectRef idx="1">
-            <a:schemeClr val="accent1"/>
-          </a:effectRef>
-          <a:fontRef idx="minor">
-            <a:schemeClr val="tx1"/>
-          </a:fontRef>
-        </p:style>
-      </p:cxnSp>
-      <p:sp>
-        <p:nvSpPr>
-          <p:cNvPr id="50" name="TextBox 49"/>
+              <a:rPr sz="1200" b="1" i="1">
+                <a:solidFill>
+                  <a:srgbClr val="C0392B"/>
+                </a:solidFill>
+                <a:latin typeface="Arial"/>
+              </a:rPr>
+              <a:t>mismatch -&gt; reject before returning</a:t>
+            </a:r>
+          </a:p>
+        </p:txBody>
+      </p:sp>
+      <p:sp>
+        <p:nvSpPr>
+          <p:cNvPr id="49" name="TextBox 48"/>
           <p:cNvSpPr txBox="1"/>
           <p:nvPr/>
         </p:nvSpPr>
         <p:spPr>
           <a:xfrm>
-            <a:off x="5950000" y="4180000"/>
-            <a:ext cx="1000000" cy="280000"/>
+            <a:off x="800000" y="4590000"/>
+            <a:ext cx="6000000" cy="240000"/>
           </a:xfrm>
           <a:prstGeom prst="rect">
             <a:avLst/>
@@ -9588,347 +9232,6 @@
           <a:noFill/>
         </p:spPr>
         <p:txBody>
-          <a:bodyPr wrap="square" lIns="0" tIns="0" rIns="0" bIns="0" anchor="ctr">
-            <a:spAutoFit/>
-          </a:bodyPr>
-          <a:lstStyle/>
-          <a:p>
-            <a:pPr algn="l"/>
-            <a:r>
-              <a:rPr sz="1100" b="1" i="0">
-                <a:solidFill>
-                  <a:srgbClr val="C0392B"/>
-                </a:solidFill>
-                <a:latin typeface="Arial"/>
-              </a:rPr>
-              <a:t>X blocked</a:t>
-            </a:r>
-          </a:p>
-        </p:txBody>
-      </p:sp>
-    </p:spTree>
-  </p:cSld>
-  <p:clrMapOvr>
-    <a:masterClrMapping/>
-  </p:clrMapOvr>
-  <p:timing>
-    <p:tnLst>
-      <p:par>
-        <p:cTn id="1" dur="indefinite" restart="never" nodeType="tmRoot">
-          <p:childTnLst>
-            <p:seq concurrent="1" nextAc="seek">
-              <p:cTn id="2" dur="indefinite" nodeType="mainSeq">
-                <p:childTnLst>
-                  <p:par>
-                    <p:cTn id="3" fill="hold">
-                      <p:stCondLst>
-                        <p:cond delay="indefinite"/>
-                      </p:stCondLst>
-                      <p:childTnLst>
-                        <p:par>
-                          <p:cTn id="4" fill="hold">
-                            <p:stCondLst>
-                              <p:cond delay="0"/>
-                            </p:stCondLst>
-                            <p:childTnLst>
-                              <p:par>
-                                <p:cTn id="5" presetID="10" presetClass="entr" presetSubtype="0" fill="hold" nodeType="clickEffect">
-                                  <p:stCondLst>
-                                    <p:cond delay="0"/>
-                                  </p:stCondLst>
-                                  <p:childTnLst>
-                                    <p:set>
-                                      <p:cBhvr>
-                                        <p:cTn id="6" dur="1" fill="hold">
-                                          <p:stCondLst>
-                                            <p:cond delay="0"/>
-                                          </p:stCondLst>
-                                        </p:cTn>
-                                        <p:tgtEl>
-                                          <p:spTgt spid="49"/>
-                                        </p:tgtEl>
-                                        <p:attrNameLst>
-                                          <p:attrName>style.visibility</p:attrName>
-                                        </p:attrNameLst>
-                                      </p:cBhvr>
-                                      <p:to>
-                                        <p:strVal val="visible"/>
-                                      </p:to>
-                                    </p:set>
-                                    <p:animEffect transition="in" filter="fade">
-                                      <p:cBhvr>
-                                        <p:cTn id="7" dur="500"/>
-                                        <p:tgtEl>
-                                          <p:spTgt spid="49"/>
-                                        </p:tgtEl>
-                                      </p:cBhvr>
-                                    </p:animEffect>
-                                  </p:childTnLst>
-                                </p:cTn>
-                              </p:par>
-                              <p:par>
-                                <p:cTn id="8" presetID="10" presetClass="entr" presetSubtype="0" fill="hold" nodeType="withEffect">
-                                  <p:stCondLst>
-                                    <p:cond delay="0"/>
-                                  </p:stCondLst>
-                                  <p:childTnLst>
-                                    <p:set>
-                                      <p:cBhvr>
-                                        <p:cTn id="9" dur="1" fill="hold">
-                                          <p:stCondLst>
-                                            <p:cond delay="0"/>
-                                          </p:stCondLst>
-                                        </p:cTn>
-                                        <p:tgtEl>
-                                          <p:spTgt spid="48"/>
-                                        </p:tgtEl>
-                                        <p:attrNameLst>
-                                          <p:attrName>style.visibility</p:attrName>
-                                        </p:attrNameLst>
-                                      </p:cBhvr>
-                                      <p:to>
-                                        <p:strVal val="visible"/>
-                                      </p:to>
-                                    </p:set>
-                                    <p:animEffect transition="in" filter="fade">
-                                      <p:cBhvr>
-                                        <p:cTn id="10" dur="500"/>
-                                        <p:tgtEl>
-                                          <p:spTgt spid="48"/>
-                                        </p:tgtEl>
-                                      </p:cBhvr>
-                                    </p:animEffect>
-                                  </p:childTnLst>
-                                </p:cTn>
-                              </p:par>
-                              <p:par>
-                                <p:cTn id="11" presetID="10" presetClass="entr" presetSubtype="0" fill="hold" nodeType="withEffect">
-                                  <p:stCondLst>
-                                    <p:cond delay="0"/>
-                                  </p:stCondLst>
-                                  <p:childTnLst>
-                                    <p:set>
-                                      <p:cBhvr>
-                                        <p:cTn id="12" dur="1" fill="hold">
-                                          <p:stCondLst>
-                                            <p:cond delay="0"/>
-                                          </p:stCondLst>
-                                        </p:cTn>
-                                        <p:tgtEl>
-                                          <p:spTgt spid="50"/>
-                                        </p:tgtEl>
-                                        <p:attrNameLst>
-                                          <p:attrName>style.visibility</p:attrName>
-                                        </p:attrNameLst>
-                                      </p:cBhvr>
-                                      <p:to>
-                                        <p:strVal val="visible"/>
-                                      </p:to>
-                                    </p:set>
-                                    <p:animEffect transition="in" filter="fade">
-                                      <p:cBhvr>
-                                        <p:cTn id="13" dur="500"/>
-                                        <p:tgtEl>
-                                          <p:spTgt spid="50"/>
-                                        </p:tgtEl>
-                                      </p:cBhvr>
-                                    </p:animEffect>
-                                  </p:childTnLst>
-                                </p:cTn>
-                              </p:par>
-                            </p:childTnLst>
-                          </p:cTn>
-                        </p:par>
-                      </p:childTnLst>
-                    </p:cTn>
-                  </p:par>
-                </p:childTnLst>
-              </p:cTn>
-              <p:prevCondLst>
-                <p:cond evt="onPrev" delay="0">
-                  <p:tgtEl>
-                    <p:sldTgt/>
-                  </p:tgtEl>
-                </p:cond>
-              </p:prevCondLst>
-              <p:nextCondLst>
-                <p:cond evt="onNext" delay="0">
-                  <p:tgtEl>
-                    <p:sldTgt/>
-                  </p:tgtEl>
-                </p:cond>
-              </p:nextCondLst>
-            </p:seq>
-          </p:childTnLst>
-        </p:cTn>
-      </p:par>
-    </p:tnLst>
-  </p:timing>
-</p:sld>
-</file>
-
-<file path=ppt/slides/slide7.xml><?xml version="1.0" encoding="utf-8"?>
-<p:sld xmlns:a="http://schemas.openxmlformats.org/drawingml/2006/main" xmlns:r="http://schemas.openxmlformats.org/officeDocument/2006/relationships" xmlns:p="http://schemas.openxmlformats.org/presentationml/2006/main">
-  <p:cSld>
-    <p:spTree>
-      <p:nvGrpSpPr>
-        <p:cNvPr id="1" name=""/>
-        <p:cNvGrpSpPr/>
-        <p:nvPr/>
-      </p:nvGrpSpPr>
-      <p:grpSpPr>
-        <a:xfrm>
-          <a:off x="0" y="0"/>
-          <a:ext cx="0" cy="0"/>
-          <a:chOff x="0" y="0"/>
-          <a:chExt cx="0" cy="0"/>
-        </a:xfrm>
-      </p:grpSpPr>
-      <p:sp>
-        <p:nvSpPr>
-          <p:cNvPr id="2" name="Title 1"/>
-          <p:cNvSpPr>
-            <a:spLocks noGrp="1"/>
-          </p:cNvSpPr>
-          <p:nvPr>
-            <p:ph type="title"/>
-          </p:nvPr>
-        </p:nvSpPr>
-        <p:spPr/>
-        <p:txBody>
-          <a:bodyPr wrap="square"/>
-          <a:lstStyle/>
-          <a:p>
-            <a:pPr algn="l"/>
-            <a:r>
-              <a:rPr sz="2800" b="1" i="0">
-                <a:solidFill>
-                  <a:srgbClr val="202020"/>
-                </a:solidFill>
-                <a:latin typeface="Arial"/>
-              </a:rPr>
-              <a:t>Shadow Stacks: Protect the Return Address</a:t>
-            </a:r>
-          </a:p>
-        </p:txBody>
-      </p:sp>
-      <p:sp>
-        <p:nvSpPr>
-          <p:cNvPr id="3" name="Text Placeholder 2"/>
-          <p:cNvSpPr>
-            <a:spLocks noGrp="1"/>
-          </p:cNvSpPr>
-          <p:nvPr>
-            <p:ph type="body" idx="1"/>
-          </p:nvPr>
-        </p:nvSpPr>
-        <p:spPr/>
-        <p:txBody>
-          <a:bodyPr wrap="square" lIns="0" tIns="0" rIns="0" bIns="0"/>
-          <a:lstStyle/>
-          <a:p>
-            <a:r>
-              <a:rPr sz="2000" b="0" i="0">
-                <a:solidFill>
-                  <a:srgbClr val="202020"/>
-                </a:solidFill>
-                <a:latin typeface="Arial"/>
-              </a:rPr>
-              <a:t>The return address is CFI's hard case (too many callers)</a:t>
-            </a:r>
-          </a:p>
-          <a:p>
-            <a:r>
-              <a:rPr sz="2000" b="0" i="0">
-                <a:solidFill>
-                  <a:srgbClr val="202020"/>
-                </a:solidFill>
-                <a:latin typeface="Arial"/>
-              </a:rPr>
-              <a:t>Keep a protected copy on a separate shadow stack</a:t>
-            </a:r>
-          </a:p>
-          <a:p>
-            <a:r>
-              <a:rPr sz="2000" b="0" i="0">
-                <a:solidFill>
-                  <a:srgbClr val="202020"/>
-                </a:solidFill>
-                <a:latin typeface="Arial"/>
-              </a:rPr>
-              <a:t>On return, compare; a mismatch means tampering, so abort</a:t>
-            </a:r>
-          </a:p>
-        </p:txBody>
-      </p:sp>
-      <p:sp>
-        <p:nvSpPr>
-          <p:cNvPr id="41" name="Google Shape;41;p8"/>
-          <p:cNvSpPr txBox="1">
-            <a:spLocks noGrp="1"/>
-          </p:cNvSpPr>
-          <p:nvPr>
-            <p:ph type="sldNum" idx="12"/>
-          </p:nvPr>
-        </p:nvSpPr>
-        <p:spPr>
-          <a:xfrm>
-            <a:off x="8229600" y="4690872"/>
-            <a:ext cx="548640" cy="274320"/>
-          </a:xfrm>
-          <a:prstGeom prst="rect">
-            <a:avLst/>
-          </a:prstGeom>
-          <a:noFill/>
-          <a:ln>
-            <a:noFill/>
-          </a:ln>
-        </p:spPr>
-        <p:txBody>
-          <a:bodyPr spcFirstLastPara="1" wrap="square" lIns="0" tIns="0" rIns="0" bIns="0" anchor="ctr" anchorCtr="0">
-            <a:noAutofit/>
-          </a:bodyPr>
-          <a:lstStyle/>
-          <a:p>
-            <a:pPr marL="0" lvl="0" indent="0" algn="r" rtl="0">
-              <a:spcBef>
-                <a:spcPts val="0"/>
-              </a:spcBef>
-              <a:spcAft>
-                <a:spcPts val="0"/>
-              </a:spcAft>
-              <a:buClr>
-                <a:srgbClr val="8A8A8A"/>
-              </a:buClr>
-              <a:buSzPts val="1200"/>
-              <a:buFont typeface="Arial"/>
-              <a:buNone/>
-            </a:pPr>
-            <a:fld id="{00000000-1234-1234-1234-123412341234}" type="slidenum">
-              <a:rPr lang="en-US"/>
-              <a:t>7</a:t>
-            </a:fld>
-            <a:endParaRPr/>
-          </a:p>
-        </p:txBody>
-      </p:sp>
-      <p:sp>
-        <p:nvSpPr>
-          <p:cNvPr id="42" name="TextBox 41"/>
-          <p:cNvSpPr txBox="1"/>
-          <p:nvPr/>
-        </p:nvSpPr>
-        <p:spPr>
-          <a:xfrm>
-            <a:off x="1100000" y="3200000"/>
-            <a:ext cx="2300000" cy="230000"/>
-          </a:xfrm>
-          <a:prstGeom prst="rect">
-            <a:avLst/>
-          </a:prstGeom>
-          <a:noFill/>
-        </p:spPr>
-        <p:txBody>
           <a:bodyPr wrap="square" lIns="0" tIns="0" rIns="0" bIns="0" anchor="t">
             <a:spAutoFit/>
           </a:bodyPr>
@@ -9936,320 +9239,13 @@
           <a:p>
             <a:pPr algn="ctr"/>
             <a:r>
-              <a:rPr sz="1100" b="1" i="0">
+              <a:rPr sz="1000" b="0" i="1">
                 <a:solidFill>
                   <a:srgbClr val="8A8A8A"/>
                 </a:solidFill>
                 <a:latin typeface="Arial"/>
               </a:rPr>
-              <a:t>normal stack</a:t>
-            </a:r>
-          </a:p>
-        </p:txBody>
-      </p:sp>
-      <p:sp>
-        <p:nvSpPr>
-          <p:cNvPr id="43" name="Rectangle 42"/>
-          <p:cNvSpPr/>
-          <p:nvPr/>
-        </p:nvSpPr>
-        <p:spPr>
-          <a:xfrm>
-            <a:off x="1100000" y="3450000"/>
-            <a:ext cx="2300000" cy="340000"/>
-          </a:xfrm>
-          <a:prstGeom prst="rect">
-            <a:avLst/>
-          </a:prstGeom>
-          <a:solidFill>
-            <a:srgbClr val="D6E4F0"/>
-          </a:solidFill>
-          <a:ln w="12700">
-            <a:solidFill>
-              <a:srgbClr val="555555"/>
-            </a:solidFill>
-          </a:ln>
-          <a:effectLst/>
-        </p:spPr>
-        <p:style>
-          <a:lnRef idx="1">
-            <a:schemeClr val="accent1"/>
-          </a:lnRef>
-          <a:fillRef idx="3">
-            <a:schemeClr val="accent1"/>
-          </a:fillRef>
-          <a:effectRef idx="2">
-            <a:schemeClr val="accent1"/>
-          </a:effectRef>
-          <a:fontRef idx="minor">
-            <a:schemeClr val="lt1"/>
-          </a:fontRef>
-        </p:style>
-        <p:txBody>
-          <a:bodyPr wrap="square" lIns="45720" tIns="27432" rIns="45720" bIns="27432" rtlCol="0" anchor="ctr"/>
-          <a:lstStyle/>
-          <a:p>
-            <a:pPr algn="ctr"/>
-            <a:r>
-              <a:rPr sz="1000" b="0" i="0">
-                <a:solidFill>
-                  <a:srgbClr val="202020"/>
-                </a:solidFill>
-                <a:latin typeface="Arial"/>
-              </a:rPr>
-              <a:t>locals / buf</a:t>
-            </a:r>
-          </a:p>
-        </p:txBody>
-      </p:sp>
-      <p:sp>
-        <p:nvSpPr>
-          <p:cNvPr id="44" name="Rectangle 43"/>
-          <p:cNvSpPr/>
-          <p:nvPr/>
-        </p:nvSpPr>
-        <p:spPr>
-          <a:xfrm>
-            <a:off x="1100000" y="3790000"/>
-            <a:ext cx="2300000" cy="340000"/>
-          </a:xfrm>
-          <a:prstGeom prst="rect">
-            <a:avLst/>
-          </a:prstGeom>
-          <a:solidFill>
-            <a:srgbClr val="F6D8C4"/>
-          </a:solidFill>
-          <a:ln w="12700">
-            <a:solidFill>
-              <a:srgbClr val="555555"/>
-            </a:solidFill>
-          </a:ln>
-          <a:effectLst/>
-        </p:spPr>
-        <p:style>
-          <a:lnRef idx="1">
-            <a:schemeClr val="accent1"/>
-          </a:lnRef>
-          <a:fillRef idx="3">
-            <a:schemeClr val="accent1"/>
-          </a:fillRef>
-          <a:effectRef idx="2">
-            <a:schemeClr val="accent1"/>
-          </a:effectRef>
-          <a:fontRef idx="minor">
-            <a:schemeClr val="lt1"/>
-          </a:fontRef>
-        </p:style>
-        <p:txBody>
-          <a:bodyPr wrap="square" lIns="45720" tIns="27432" rIns="45720" bIns="27432" rtlCol="0" anchor="ctr"/>
-          <a:lstStyle/>
-          <a:p>
-            <a:pPr algn="ctr"/>
-            <a:r>
-              <a:rPr sz="1000" b="1" i="0">
-                <a:solidFill>
-                  <a:srgbClr val="C0392B"/>
-                </a:solidFill>
-                <a:latin typeface="Arial"/>
-              </a:rPr>
-              <a:t>return = GADGET</a:t>
-            </a:r>
-          </a:p>
-        </p:txBody>
-      </p:sp>
-      <p:sp>
-        <p:nvSpPr>
-          <p:cNvPr id="45" name="TextBox 44"/>
-          <p:cNvSpPr txBox="1"/>
-          <p:nvPr/>
-        </p:nvSpPr>
-        <p:spPr>
-          <a:xfrm>
-            <a:off x="4500000" y="3200000"/>
-            <a:ext cx="2300000" cy="230000"/>
-          </a:xfrm>
-          <a:prstGeom prst="rect">
-            <a:avLst/>
-          </a:prstGeom>
-          <a:noFill/>
-        </p:spPr>
-        <p:txBody>
-          <a:bodyPr wrap="square" lIns="0" tIns="0" rIns="0" bIns="0" anchor="t">
-            <a:spAutoFit/>
-          </a:bodyPr>
-          <a:lstStyle/>
-          <a:p>
-            <a:pPr algn="ctr"/>
-            <a:r>
-              <a:rPr sz="1100" b="1" i="0">
-                <a:solidFill>
-                  <a:srgbClr val="8A8A8A"/>
-                </a:solidFill>
-                <a:latin typeface="Arial"/>
-              </a:rPr>
-              <a:t>shadow stack</a:t>
-            </a:r>
-          </a:p>
-        </p:txBody>
-      </p:sp>
-      <p:sp>
-        <p:nvSpPr>
-          <p:cNvPr id="46" name="Rectangle 45"/>
-          <p:cNvSpPr/>
-          <p:nvPr/>
-        </p:nvSpPr>
-        <p:spPr>
-          <a:xfrm>
-            <a:off x="4500000" y="3790000"/>
-            <a:ext cx="2300000" cy="340000"/>
-          </a:xfrm>
-          <a:prstGeom prst="rect">
-            <a:avLst/>
-          </a:prstGeom>
-          <a:solidFill>
-            <a:srgbClr val="DDEEDD"/>
-          </a:solidFill>
-          <a:ln w="12700">
-            <a:solidFill>
-              <a:srgbClr val="555555"/>
-            </a:solidFill>
-          </a:ln>
-          <a:effectLst/>
-        </p:spPr>
-        <p:style>
-          <a:lnRef idx="1">
-            <a:schemeClr val="accent1"/>
-          </a:lnRef>
-          <a:fillRef idx="3">
-            <a:schemeClr val="accent1"/>
-          </a:fillRef>
-          <a:effectRef idx="2">
-            <a:schemeClr val="accent1"/>
-          </a:effectRef>
-          <a:fontRef idx="minor">
-            <a:schemeClr val="lt1"/>
-          </a:fontRef>
-        </p:style>
-        <p:txBody>
-          <a:bodyPr wrap="square" lIns="45720" tIns="27432" rIns="45720" bIns="27432" rtlCol="0" anchor="ctr"/>
-          <a:lstStyle/>
-          <a:p>
-            <a:pPr algn="ctr"/>
-            <a:r>
-              <a:rPr sz="1000" b="0" i="0">
-                <a:solidFill>
-                  <a:srgbClr val="202020"/>
-                </a:solidFill>
-                <a:latin typeface="Arial"/>
-              </a:rPr>
-              <a:t>return = real</a:t>
-            </a:r>
-          </a:p>
-        </p:txBody>
-      </p:sp>
-      <p:cxnSp>
-        <p:nvCxnSpPr>
-          <p:cNvPr id="47" name="Connector 46"/>
-          <p:cNvCxnSpPr/>
-          <p:nvPr/>
-        </p:nvCxnSpPr>
-        <p:spPr>
-          <a:xfrm>
-            <a:off x="3400000" y="3960000"/>
-            <a:ext cx="1100000" cy="0"/>
-          </a:xfrm>
-          <a:prstGeom prst="bentConnector3">
-            <a:avLst/>
-          </a:prstGeom>
-          <a:ln w="25400">
-            <a:solidFill>
-              <a:srgbClr val="C0392B"/>
-            </a:solidFill>
-            <a:tailEnd type="triangle" w="med" len="med"/>
-          </a:ln>
-          <a:effectLst/>
-        </p:spPr>
-        <p:style>
-          <a:lnRef idx="2">
-            <a:schemeClr val="accent1"/>
-          </a:lnRef>
-          <a:fillRef idx="0">
-            <a:schemeClr val="accent1"/>
-          </a:fillRef>
-          <a:effectRef idx="1">
-            <a:schemeClr val="accent1"/>
-          </a:effectRef>
-          <a:fontRef idx="minor">
-            <a:schemeClr val="tx1"/>
-          </a:fontRef>
-        </p:style>
-      </p:cxnSp>
-      <p:sp>
-        <p:nvSpPr>
-          <p:cNvPr id="48" name="TextBox 47"/>
-          <p:cNvSpPr txBox="1"/>
-          <p:nvPr/>
-        </p:nvSpPr>
-        <p:spPr>
-          <a:xfrm>
-            <a:off x="1100000" y="4270000"/>
-            <a:ext cx="6000000" cy="300000"/>
-          </a:xfrm>
-          <a:prstGeom prst="rect">
-            <a:avLst/>
-          </a:prstGeom>
-          <a:noFill/>
-        </p:spPr>
-        <p:txBody>
-          <a:bodyPr wrap="square" lIns="0" tIns="0" rIns="0" bIns="0" anchor="t">
-            <a:spAutoFit/>
-          </a:bodyPr>
-          <a:lstStyle/>
-          <a:p>
-            <a:pPr algn="ctr"/>
-            <a:r>
-              <a:rPr sz="1200" b="1" i="1">
-                <a:solidFill>
-                  <a:srgbClr val="C0392B"/>
-                </a:solidFill>
-                <a:latin typeface="Arial"/>
-              </a:rPr>
-              <a:t>mismatch -&gt; abort before returning</a:t>
-            </a:r>
-          </a:p>
-        </p:txBody>
-      </p:sp>
-      <p:sp>
-        <p:nvSpPr>
-          <p:cNvPr id="49" name="TextBox 48"/>
-          <p:cNvSpPr txBox="1"/>
-          <p:nvPr/>
-        </p:nvSpPr>
-        <p:spPr>
-          <a:xfrm>
-            <a:off x="1100000" y="4590000"/>
-            <a:ext cx="6000000" cy="240000"/>
-          </a:xfrm>
-          <a:prstGeom prst="rect">
-            <a:avLst/>
-          </a:prstGeom>
-          <a:noFill/>
-        </p:spPr>
-        <p:txBody>
-          <a:bodyPr wrap="square" lIns="0" tIns="0" rIns="0" bIns="0" anchor="t">
-            <a:spAutoFit/>
-          </a:bodyPr>
-          <a:lstStyle/>
-          <a:p>
-            <a:pPr algn="ctr"/>
-            <a:r>
-              <a:rPr sz="1000" b="0" i="1">
-                <a:solidFill>
-                  <a:srgbClr val="8A8A8A"/>
-                </a:solidFill>
-                <a:latin typeface="Arial"/>
-              </a:rPr>
-              <a:t>hardware support: Intel CET shadow stack, enforced by the CPU</a:t>
+              <a:t>more reliable than a stack canary</a:t>
             </a:r>
           </a:p>
         </p:txBody>
@@ -10380,6 +9376,435 @@
 </p:sld>
 </file>
 
+<file path=ppt/slides/slide7.xml><?xml version="1.0" encoding="utf-8"?>
+<p:sld xmlns:a="http://schemas.openxmlformats.org/drawingml/2006/main" xmlns:r="http://schemas.openxmlformats.org/officeDocument/2006/relationships" xmlns:p="http://schemas.openxmlformats.org/presentationml/2006/main">
+  <p:cSld>
+    <p:spTree>
+      <p:nvGrpSpPr>
+        <p:cNvPr id="1" name=""/>
+        <p:cNvGrpSpPr/>
+        <p:nvPr/>
+      </p:nvGrpSpPr>
+      <p:grpSpPr>
+        <a:xfrm>
+          <a:off x="0" y="0"/>
+          <a:ext cx="0" cy="0"/>
+          <a:chOff x="0" y="0"/>
+          <a:chExt cx="0" cy="0"/>
+        </a:xfrm>
+      </p:grpSpPr>
+      <p:sp>
+        <p:nvSpPr>
+          <p:cNvPr id="2" name="Title 1"/>
+          <p:cNvSpPr>
+            <a:spLocks noGrp="1"/>
+          </p:cNvSpPr>
+          <p:nvPr>
+            <p:ph type="title"/>
+          </p:nvPr>
+        </p:nvSpPr>
+        <p:spPr>
+          <a:xfrm>
+            <a:off x="534300" y="224048"/>
+            <a:ext cx="8046720" cy="685800"/>
+          </a:xfrm>
+        </p:spPr>
+        <p:txBody>
+          <a:bodyPr wrap="square"/>
+          <a:lstStyle/>
+          <a:p>
+            <a:pPr algn="l"/>
+            <a:r>
+              <a:rPr sz="2800" b="1" i="0">
+                <a:solidFill>
+                  <a:srgbClr val="202020"/>
+                </a:solidFill>
+                <a:latin typeface="Arial"/>
+              </a:rPr>
+              <a:t>Doing It in Hardware: Intel CET</a:t>
+            </a:r>
+          </a:p>
+        </p:txBody>
+      </p:sp>
+      <p:sp>
+        <p:nvSpPr>
+          <p:cNvPr id="3" name="Text Placeholder 2"/>
+          <p:cNvSpPr>
+            <a:spLocks noGrp="1"/>
+          </p:cNvSpPr>
+          <p:nvPr>
+            <p:ph type="body" idx="1"/>
+          </p:nvPr>
+        </p:nvSpPr>
+        <p:spPr>
+          <a:xfrm>
+            <a:off x="420000" y="1298448"/>
+            <a:ext cx="8046720" cy="3383280"/>
+          </a:xfrm>
+        </p:spPr>
+        <p:txBody>
+          <a:bodyPr wrap="square" lIns="0" tIns="0" rIns="0" bIns="0">
+            <a:normAutofit/>
+          </a:bodyPr>
+          <a:lstStyle/>
+          <a:p>
+            <a:r>
+              <a:rPr sz="1800" b="0" i="0" dirty="0">
+                <a:solidFill>
+                  <a:srgbClr val="202020"/>
+                </a:solidFill>
+                <a:latin typeface="Arial"/>
+              </a:rPr>
+              <a:t>A software shadow stack is reliable but expensive: two writes, plus protecting the copy</a:t>
+            </a:r>
+          </a:p>
+          <a:p>
+            <a:r>
+              <a:rPr sz="1800" b="0" i="0" dirty="0">
+                <a:solidFill>
+                  <a:srgbClr val="202020"/>
+                </a:solidFill>
+                <a:latin typeface="Arial"/>
+              </a:rPr>
+              <a:t>Intel CET implements the shadow stack in hardware, enforced by the CPU</a:t>
+            </a:r>
+          </a:p>
+          <a:p>
+            <a:r>
+              <a:rPr sz="1800" b="0" i="0" dirty="0">
+                <a:solidFill>
+                  <a:srgbClr val="202020"/>
+                </a:solidFill>
+                <a:latin typeface="Arial"/>
+              </a:rPr>
+              <a:t>It also adds coarse CFI on indirect calls (covered next)</a:t>
+            </a:r>
+          </a:p>
+          <a:p>
+            <a:r>
+              <a:rPr sz="1800" b="0" i="0" dirty="0">
+                <a:solidFill>
+                  <a:srgbClr val="202020"/>
+                </a:solidFill>
+                <a:latin typeface="Arial"/>
+              </a:rPr>
+              <a:t>Enabled with </a:t>
+            </a:r>
+            <a:r>
+              <a:rPr sz="1800" b="0" i="0" dirty="0" err="1">
+                <a:solidFill>
+                  <a:srgbClr val="202020"/>
+                </a:solidFill>
+                <a:latin typeface="Arial"/>
+              </a:rPr>
+              <a:t>gcc</a:t>
+            </a:r>
+            <a:r>
+              <a:rPr sz="1800" b="0" i="0" dirty="0">
+                <a:solidFill>
+                  <a:srgbClr val="202020"/>
+                </a:solidFill>
+                <a:latin typeface="Arial"/>
+              </a:rPr>
+              <a:t> / clang -</a:t>
+            </a:r>
+            <a:r>
+              <a:rPr sz="1800" b="0" i="0" dirty="0" err="1">
+                <a:solidFill>
+                  <a:srgbClr val="202020"/>
+                </a:solidFill>
+                <a:latin typeface="Arial"/>
+              </a:rPr>
+              <a:t>fcf</a:t>
+            </a:r>
+            <a:r>
+              <a:rPr sz="1800" b="0" i="0" dirty="0">
+                <a:solidFill>
+                  <a:srgbClr val="202020"/>
+                </a:solidFill>
+                <a:latin typeface="Arial"/>
+              </a:rPr>
+              <a:t>-protection; supported by Windows and Linux</a:t>
+            </a:r>
+          </a:p>
+        </p:txBody>
+      </p:sp>
+      <p:sp>
+        <p:nvSpPr>
+          <p:cNvPr id="41" name="Google Shape;41;p8"/>
+          <p:cNvSpPr txBox="1">
+            <a:spLocks noGrp="1"/>
+          </p:cNvSpPr>
+          <p:nvPr>
+            <p:ph type="sldNum" idx="12"/>
+          </p:nvPr>
+        </p:nvSpPr>
+        <p:spPr>
+          <a:xfrm>
+            <a:off x="8229600" y="4690872"/>
+            <a:ext cx="548640" cy="274320"/>
+          </a:xfrm>
+          <a:prstGeom prst="rect">
+            <a:avLst/>
+          </a:prstGeom>
+          <a:noFill/>
+          <a:ln>
+            <a:noFill/>
+          </a:ln>
+        </p:spPr>
+        <p:txBody>
+          <a:bodyPr spcFirstLastPara="1" wrap="square" lIns="0" tIns="0" rIns="0" bIns="0" anchor="ctr" anchorCtr="0">
+            <a:noAutofit/>
+          </a:bodyPr>
+          <a:lstStyle/>
+          <a:p>
+            <a:pPr marL="0" lvl="0" indent="0" algn="r" rtl="0">
+              <a:spcBef>
+                <a:spcPts val="0"/>
+              </a:spcBef>
+              <a:spcAft>
+                <a:spcPts val="0"/>
+              </a:spcAft>
+              <a:buClr>
+                <a:srgbClr val="8A8A8A"/>
+              </a:buClr>
+              <a:buSzPts val="1200"/>
+              <a:buFont typeface="Arial"/>
+              <a:buNone/>
+            </a:pPr>
+            <a:fld id="{00000000-1234-1234-1234-123412341234}" type="slidenum">
+              <a:rPr lang="en-US"/>
+              <a:t>7</a:t>
+            </a:fld>
+            <a:endParaRPr/>
+          </a:p>
+        </p:txBody>
+      </p:sp>
+      <p:sp>
+        <p:nvSpPr>
+          <p:cNvPr id="42" name="Rectangle 41"/>
+          <p:cNvSpPr/>
+          <p:nvPr/>
+        </p:nvSpPr>
+        <p:spPr>
+          <a:xfrm>
+            <a:off x="1300000" y="3650000"/>
+            <a:ext cx="2300000" cy="520000"/>
+          </a:xfrm>
+          <a:prstGeom prst="rect">
+            <a:avLst/>
+          </a:prstGeom>
+          <a:solidFill>
+            <a:srgbClr val="D6E4F0"/>
+          </a:solidFill>
+          <a:ln w="12700">
+            <a:solidFill>
+              <a:srgbClr val="555555"/>
+            </a:solidFill>
+          </a:ln>
+          <a:effectLst/>
+        </p:spPr>
+        <p:style>
+          <a:lnRef idx="1">
+            <a:schemeClr val="accent1"/>
+          </a:lnRef>
+          <a:fillRef idx="3">
+            <a:schemeClr val="accent1"/>
+          </a:fillRef>
+          <a:effectRef idx="2">
+            <a:schemeClr val="accent1"/>
+          </a:effectRef>
+          <a:fontRef idx="minor">
+            <a:schemeClr val="lt1"/>
+          </a:fontRef>
+        </p:style>
+        <p:txBody>
+          <a:bodyPr wrap="square" lIns="45720" tIns="27432" rIns="45720" bIns="27432" rtlCol="0" anchor="ctr"/>
+          <a:lstStyle/>
+          <a:p>
+            <a:pPr algn="ctr"/>
+            <a:r>
+              <a:rPr sz="1100" b="0" i="0">
+                <a:solidFill>
+                  <a:srgbClr val="202020"/>
+                </a:solidFill>
+                <a:latin typeface="Arial"/>
+              </a:rPr>
+              <a:t>software shadow stack</a:t>
+            </a:r>
+          </a:p>
+        </p:txBody>
+      </p:sp>
+      <p:sp>
+        <p:nvSpPr>
+          <p:cNvPr id="43" name="TextBox 42"/>
+          <p:cNvSpPr txBox="1"/>
+          <p:nvPr/>
+        </p:nvSpPr>
+        <p:spPr>
+          <a:xfrm>
+            <a:off x="1300000" y="4190000"/>
+            <a:ext cx="2300000" cy="230000"/>
+          </a:xfrm>
+          <a:prstGeom prst="rect">
+            <a:avLst/>
+          </a:prstGeom>
+          <a:noFill/>
+        </p:spPr>
+        <p:txBody>
+          <a:bodyPr wrap="square" lIns="0" tIns="0" rIns="0" bIns="0" anchor="t">
+            <a:spAutoFit/>
+          </a:bodyPr>
+          <a:lstStyle/>
+          <a:p>
+            <a:pPr algn="ctr"/>
+            <a:r>
+              <a:rPr sz="1000" b="0" i="1">
+                <a:solidFill>
+                  <a:srgbClr val="C0392B"/>
+                </a:solidFill>
+                <a:latin typeface="Arial"/>
+              </a:rPr>
+              <a:t>reliable, but slow</a:t>
+            </a:r>
+          </a:p>
+        </p:txBody>
+      </p:sp>
+      <p:cxnSp>
+        <p:nvCxnSpPr>
+          <p:cNvPr id="44" name="Connector 43"/>
+          <p:cNvCxnSpPr/>
+          <p:nvPr/>
+        </p:nvCxnSpPr>
+        <p:spPr>
+          <a:xfrm>
+            <a:off x="3600000" y="3910000"/>
+            <a:ext cx="650000" cy="0"/>
+          </a:xfrm>
+          <a:prstGeom prst="bentConnector3">
+            <a:avLst/>
+          </a:prstGeom>
+          <a:ln w="25400">
+            <a:solidFill>
+              <a:srgbClr val="8A8A8A"/>
+            </a:solidFill>
+            <a:tailEnd type="triangle" w="med" len="med"/>
+          </a:ln>
+          <a:effectLst/>
+        </p:spPr>
+        <p:style>
+          <a:lnRef idx="2">
+            <a:schemeClr val="accent1"/>
+          </a:lnRef>
+          <a:fillRef idx="0">
+            <a:schemeClr val="accent1"/>
+          </a:fillRef>
+          <a:effectRef idx="1">
+            <a:schemeClr val="accent1"/>
+          </a:effectRef>
+          <a:fontRef idx="minor">
+            <a:schemeClr val="tx1"/>
+          </a:fontRef>
+        </p:style>
+      </p:cxnSp>
+      <p:sp>
+        <p:nvSpPr>
+          <p:cNvPr id="45" name="Rectangle 44"/>
+          <p:cNvSpPr/>
+          <p:nvPr/>
+        </p:nvSpPr>
+        <p:spPr>
+          <a:xfrm>
+            <a:off x="4300000" y="3650000"/>
+            <a:ext cx="2400000" cy="520000"/>
+          </a:xfrm>
+          <a:prstGeom prst="rect">
+            <a:avLst/>
+          </a:prstGeom>
+          <a:solidFill>
+            <a:srgbClr val="DDEEDD"/>
+          </a:solidFill>
+          <a:ln w="12700">
+            <a:solidFill>
+              <a:srgbClr val="555555"/>
+            </a:solidFill>
+          </a:ln>
+          <a:effectLst/>
+        </p:spPr>
+        <p:style>
+          <a:lnRef idx="1">
+            <a:schemeClr val="accent1"/>
+          </a:lnRef>
+          <a:fillRef idx="3">
+            <a:schemeClr val="accent1"/>
+          </a:fillRef>
+          <a:effectRef idx="2">
+            <a:schemeClr val="accent1"/>
+          </a:effectRef>
+          <a:fontRef idx="minor">
+            <a:schemeClr val="lt1"/>
+          </a:fontRef>
+        </p:style>
+        <p:txBody>
+          <a:bodyPr wrap="square" lIns="45720" tIns="27432" rIns="45720" bIns="27432" rtlCol="0" anchor="ctr"/>
+          <a:lstStyle/>
+          <a:p>
+            <a:pPr algn="ctr"/>
+            <a:r>
+              <a:rPr sz="1100" b="1" i="0">
+                <a:solidFill>
+                  <a:srgbClr val="202020"/>
+                </a:solidFill>
+                <a:latin typeface="Arial"/>
+              </a:rPr>
+              <a:t>Intel CET (hardware)</a:t>
+            </a:r>
+          </a:p>
+        </p:txBody>
+      </p:sp>
+      <p:sp>
+        <p:nvSpPr>
+          <p:cNvPr id="46" name="TextBox 45"/>
+          <p:cNvSpPr txBox="1"/>
+          <p:nvPr/>
+        </p:nvSpPr>
+        <p:spPr>
+          <a:xfrm>
+            <a:off x="4300000" y="4190000"/>
+            <a:ext cx="2400000" cy="230000"/>
+          </a:xfrm>
+          <a:prstGeom prst="rect">
+            <a:avLst/>
+          </a:prstGeom>
+          <a:noFill/>
+        </p:spPr>
+        <p:txBody>
+          <a:bodyPr wrap="square" lIns="0" tIns="0" rIns="0" bIns="0" anchor="t">
+            <a:spAutoFit/>
+          </a:bodyPr>
+          <a:lstStyle/>
+          <a:p>
+            <a:pPr algn="ctr"/>
+            <a:r>
+              <a:rPr sz="1000" b="0" i="1">
+                <a:solidFill>
+                  <a:srgbClr val="2E7D32"/>
+                </a:solidFill>
+                <a:latin typeface="Arial"/>
+              </a:rPr>
+              <a:t>same check, enforced by the CPU</a:t>
+            </a:r>
+          </a:p>
+        </p:txBody>
+      </p:sp>
+    </p:spTree>
+  </p:cSld>
+  <p:clrMapOvr>
+    <a:masterClrMapping/>
+  </p:clrMapOvr>
+</p:sld>
+</file>
+
 <file path=ppt/slides/slide8.xml><?xml version="1.0" encoding="utf-8"?>
 <p:sld xmlns:a="http://schemas.openxmlformats.org/drawingml/2006/main" xmlns:r="http://schemas.openxmlformats.org/officeDocument/2006/relationships" xmlns:p="http://schemas.openxmlformats.org/presentationml/2006/main">
   <p:cSld>
@@ -10407,20 +9832,24 @@
             <p:ph type="title"/>
           </p:nvPr>
         </p:nvSpPr>
-        <p:spPr/>
-        <p:txBody>
-          <a:bodyPr wrap="square"/>
+        <p:spPr>
+          <a:xfrm>
+            <a:off x="534300" y="1965960"/>
+            <a:ext cx="8046720" cy="822960"/>
+          </a:xfrm>
+        </p:spPr>
+        <p:txBody>
+          <a:bodyPr/>
           <a:lstStyle/>
           <a:p>
-            <a:pPr algn="l"/>
-            <a:r>
-              <a:rPr sz="2800" b="1" i="0">
+            <a:r>
+              <a:rPr sz="2600" b="1" i="0">
                 <a:solidFill>
                   <a:srgbClr val="202020"/>
                 </a:solidFill>
                 <a:latin typeface="Arial"/>
               </a:rPr>
-              <a:t>Pointer Authentication (ARM PAC)</a:t>
+              <a:t>Restrict Indirect Calls</a:t>
             </a:r>
           </a:p>
         </p:txBody>
@@ -10437,44 +9866,22 @@
         </p:nvSpPr>
         <p:spPr>
           <a:xfrm>
-            <a:off x="423949" y="1298448"/>
-            <a:ext cx="8171411" cy="3383280"/>
-          </a:xfrm>
-        </p:spPr>
-        <p:txBody>
-          <a:bodyPr wrap="square" lIns="0" tIns="0" rIns="0" bIns="0"/>
+            <a:off x="534300" y="2761488"/>
+            <a:ext cx="8046720" cy="457200"/>
+          </a:xfrm>
+        </p:spPr>
+        <p:txBody>
+          <a:bodyPr/>
           <a:lstStyle/>
           <a:p>
             <a:r>
-              <a:rPr sz="2000" b="0" i="0" dirty="0">
-                <a:solidFill>
-                  <a:srgbClr val="202020"/>
-                </a:solidFill>
-                <a:latin typeface="Arial"/>
-              </a:rPr>
-              <a:t>Spare high bits of a 64-bit pointer hold a short signature (a keyed MAC)</a:t>
-            </a:r>
-          </a:p>
-          <a:p>
-            <a:r>
-              <a:rPr sz="2000" b="0" i="0" dirty="0">
-                <a:solidFill>
-                  <a:srgbClr val="202020"/>
-                </a:solidFill>
-                <a:latin typeface="Arial"/>
-              </a:rPr>
-              <a:t>Sign a pointer when you store it; verify the signature before you use it</a:t>
-            </a:r>
-          </a:p>
-          <a:p>
-            <a:r>
-              <a:rPr sz="2000" b="0" i="0" dirty="0">
-                <a:solidFill>
-                  <a:srgbClr val="202020"/>
-                </a:solidFill>
-                <a:latin typeface="Arial"/>
-              </a:rPr>
-              <a:t>An attacker who overwrites the pointer cannot forge the signature, so use faults</a:t>
+              <a:rPr sz="1800" b="1" i="0">
+                <a:solidFill>
+                  <a:srgbClr val="E47932"/>
+                </a:solidFill>
+                <a:latin typeface="Arial"/>
+              </a:rPr>
+              <a:t>The forward edge: control-flow integrity</a:t>
             </a:r>
           </a:p>
         </p:txBody>
@@ -10530,346 +9937,11 @@
           </a:p>
         </p:txBody>
       </p:sp>
-      <p:sp>
-        <p:nvSpPr>
-          <p:cNvPr id="42" name="Rectangle 41"/>
-          <p:cNvSpPr/>
-          <p:nvPr/>
-        </p:nvSpPr>
-        <p:spPr>
-          <a:xfrm>
-            <a:off x="1000000" y="3550000"/>
-            <a:ext cx="2500000" cy="520000"/>
-          </a:xfrm>
-          <a:prstGeom prst="rect">
-            <a:avLst/>
-          </a:prstGeom>
-          <a:solidFill>
-            <a:srgbClr val="DDEEDD"/>
-          </a:solidFill>
-          <a:ln w="12700">
-            <a:solidFill>
-              <a:srgbClr val="555555"/>
-            </a:solidFill>
-          </a:ln>
-          <a:effectLst/>
-        </p:spPr>
-        <p:style>
-          <a:lnRef idx="1">
-            <a:schemeClr val="accent1"/>
-          </a:lnRef>
-          <a:fillRef idx="3">
-            <a:schemeClr val="accent1"/>
-          </a:fillRef>
-          <a:effectRef idx="2">
-            <a:schemeClr val="accent1"/>
-          </a:effectRef>
-          <a:fontRef idx="minor">
-            <a:schemeClr val="lt1"/>
-          </a:fontRef>
-        </p:style>
-        <p:txBody>
-          <a:bodyPr wrap="square" lIns="45720" tIns="27432" rIns="45720" bIns="27432" rtlCol="0" anchor="ctr"/>
-          <a:lstStyle/>
-          <a:p>
-            <a:pPr algn="ctr"/>
-            <a:r>
-              <a:rPr sz="1100" b="0" i="0">
-                <a:solidFill>
-                  <a:srgbClr val="202020"/>
-                </a:solidFill>
-                <a:latin typeface="Courier New"/>
-              </a:rPr>
-              <a:t>ptr + PAC signature</a:t>
-            </a:r>
-          </a:p>
-        </p:txBody>
-      </p:sp>
-      <p:sp>
-        <p:nvSpPr>
-          <p:cNvPr id="43" name="TextBox 42"/>
-          <p:cNvSpPr txBox="1"/>
-          <p:nvPr/>
-        </p:nvSpPr>
-        <p:spPr>
-          <a:xfrm>
-            <a:off x="1000000" y="4090000"/>
-            <a:ext cx="2500000" cy="230000"/>
-          </a:xfrm>
-          <a:prstGeom prst="rect">
-            <a:avLst/>
-          </a:prstGeom>
-          <a:noFill/>
-        </p:spPr>
-        <p:txBody>
-          <a:bodyPr wrap="square" lIns="0" tIns="0" rIns="0" bIns="0" anchor="t">
-            <a:spAutoFit/>
-          </a:bodyPr>
-          <a:lstStyle/>
-          <a:p>
-            <a:pPr algn="ctr"/>
-            <a:r>
-              <a:rPr sz="1000" b="0" i="1">
-                <a:solidFill>
-                  <a:srgbClr val="2E7D32"/>
-                </a:solidFill>
-                <a:latin typeface="Arial"/>
-              </a:rPr>
-              <a:t>signed on store</a:t>
-            </a:r>
-          </a:p>
-        </p:txBody>
-      </p:sp>
-      <p:cxnSp>
-        <p:nvCxnSpPr>
-          <p:cNvPr id="44" name="Connector 43"/>
-          <p:cNvCxnSpPr/>
-          <p:nvPr/>
-        </p:nvCxnSpPr>
-        <p:spPr>
-          <a:xfrm>
-            <a:off x="3500000" y="3810000"/>
-            <a:ext cx="700000" cy="0"/>
-          </a:xfrm>
-          <a:prstGeom prst="bentConnector3">
-            <a:avLst/>
-          </a:prstGeom>
-          <a:ln w="22225">
-            <a:solidFill>
-              <a:srgbClr val="8A8A8A"/>
-            </a:solidFill>
-            <a:tailEnd type="triangle" w="med" len="med"/>
-          </a:ln>
-          <a:effectLst/>
-        </p:spPr>
-        <p:style>
-          <a:lnRef idx="2">
-            <a:schemeClr val="accent1"/>
-          </a:lnRef>
-          <a:fillRef idx="0">
-            <a:schemeClr val="accent1"/>
-          </a:fillRef>
-          <a:effectRef idx="1">
-            <a:schemeClr val="accent1"/>
-          </a:effectRef>
-          <a:fontRef idx="minor">
-            <a:schemeClr val="tx1"/>
-          </a:fontRef>
-        </p:style>
-      </p:cxnSp>
-      <p:sp>
-        <p:nvSpPr>
-          <p:cNvPr id="45" name="Rectangle 44"/>
-          <p:cNvSpPr/>
-          <p:nvPr/>
-        </p:nvSpPr>
-        <p:spPr>
-          <a:xfrm>
-            <a:off x="4200000" y="3550000"/>
-            <a:ext cx="2500000" cy="520000"/>
-          </a:xfrm>
-          <a:prstGeom prst="rect">
-            <a:avLst/>
-          </a:prstGeom>
-          <a:solidFill>
-            <a:srgbClr val="F6D8C4"/>
-          </a:solidFill>
-          <a:ln w="12700">
-            <a:solidFill>
-              <a:srgbClr val="555555"/>
-            </a:solidFill>
-          </a:ln>
-          <a:effectLst/>
-        </p:spPr>
-        <p:style>
-          <a:lnRef idx="1">
-            <a:schemeClr val="accent1"/>
-          </a:lnRef>
-          <a:fillRef idx="3">
-            <a:schemeClr val="accent1"/>
-          </a:fillRef>
-          <a:effectRef idx="2">
-            <a:schemeClr val="accent1"/>
-          </a:effectRef>
-          <a:fontRef idx="minor">
-            <a:schemeClr val="lt1"/>
-          </a:fontRef>
-        </p:style>
-        <p:txBody>
-          <a:bodyPr wrap="square" lIns="45720" tIns="27432" rIns="45720" bIns="27432" rtlCol="0" anchor="ctr"/>
-          <a:lstStyle/>
-          <a:p>
-            <a:pPr algn="ctr"/>
-            <a:r>
-              <a:rPr sz="1100" b="1" i="0">
-                <a:solidFill>
-                  <a:srgbClr val="C0392B"/>
-                </a:solidFill>
-                <a:latin typeface="Courier New"/>
-              </a:rPr>
-              <a:t>overwritten ptr</a:t>
-            </a:r>
-          </a:p>
-        </p:txBody>
-      </p:sp>
-      <p:sp>
-        <p:nvSpPr>
-          <p:cNvPr id="46" name="TextBox 45"/>
-          <p:cNvSpPr txBox="1"/>
-          <p:nvPr/>
-        </p:nvSpPr>
-        <p:spPr>
-          <a:xfrm>
-            <a:off x="4200000" y="4090000"/>
-            <a:ext cx="2800000" cy="260000"/>
-          </a:xfrm>
-          <a:prstGeom prst="rect">
-            <a:avLst/>
-          </a:prstGeom>
-          <a:noFill/>
-        </p:spPr>
-        <p:txBody>
-          <a:bodyPr wrap="square" lIns="0" tIns="0" rIns="0" bIns="0" anchor="t">
-            <a:spAutoFit/>
-          </a:bodyPr>
-          <a:lstStyle/>
-          <a:p>
-            <a:pPr algn="l"/>
-            <a:r>
-              <a:rPr sz="1000" b="0" i="1">
-                <a:solidFill>
-                  <a:srgbClr val="C0392B"/>
-                </a:solidFill>
-                <a:latin typeface="Arial"/>
-              </a:rPr>
-              <a:t>verify fails -&gt; fault (no valid signature)</a:t>
-            </a:r>
-          </a:p>
-        </p:txBody>
-      </p:sp>
     </p:spTree>
   </p:cSld>
   <p:clrMapOvr>
     <a:masterClrMapping/>
   </p:clrMapOvr>
-  <p:timing>
-    <p:tnLst>
-      <p:par>
-        <p:cTn id="1" dur="indefinite" restart="never" nodeType="tmRoot">
-          <p:childTnLst>
-            <p:seq concurrent="1" nextAc="seek">
-              <p:cTn id="2" dur="indefinite" nodeType="mainSeq">
-                <p:childTnLst>
-                  <p:par>
-                    <p:cTn id="3" fill="hold">
-                      <p:stCondLst>
-                        <p:cond delay="indefinite"/>
-                      </p:stCondLst>
-                      <p:childTnLst>
-                        <p:par>
-                          <p:cTn id="4" fill="hold">
-                            <p:stCondLst>
-                              <p:cond delay="0"/>
-                            </p:stCondLst>
-                            <p:childTnLst>
-                              <p:par>
-                                <p:cTn id="5" presetID="10" presetClass="entr" presetSubtype="0" fill="hold" nodeType="clickEffect">
-                                  <p:stCondLst>
-                                    <p:cond delay="0"/>
-                                  </p:stCondLst>
-                                  <p:childTnLst>
-                                    <p:set>
-                                      <p:cBhvr>
-                                        <p:cTn id="6" dur="1" fill="hold">
-                                          <p:stCondLst>
-                                            <p:cond delay="0"/>
-                                          </p:stCondLst>
-                                        </p:cTn>
-                                        <p:tgtEl>
-                                          <p:spTgt spid="45"/>
-                                        </p:tgtEl>
-                                        <p:attrNameLst>
-                                          <p:attrName>style.visibility</p:attrName>
-                                        </p:attrNameLst>
-                                      </p:cBhvr>
-                                      <p:to>
-                                        <p:strVal val="visible"/>
-                                      </p:to>
-                                    </p:set>
-                                    <p:animEffect transition="in" filter="fade">
-                                      <p:cBhvr>
-                                        <p:cTn id="7" dur="500"/>
-                                        <p:tgtEl>
-                                          <p:spTgt spid="45"/>
-                                        </p:tgtEl>
-                                      </p:cBhvr>
-                                    </p:animEffect>
-                                  </p:childTnLst>
-                                </p:cTn>
-                              </p:par>
-                              <p:par>
-                                <p:cTn id="8" presetID="10" presetClass="entr" presetSubtype="0" fill="hold" nodeType="withEffect">
-                                  <p:stCondLst>
-                                    <p:cond delay="0"/>
-                                  </p:stCondLst>
-                                  <p:childTnLst>
-                                    <p:set>
-                                      <p:cBhvr>
-                                        <p:cTn id="9" dur="1" fill="hold">
-                                          <p:stCondLst>
-                                            <p:cond delay="0"/>
-                                          </p:stCondLst>
-                                        </p:cTn>
-                                        <p:tgtEl>
-                                          <p:spTgt spid="46"/>
-                                        </p:tgtEl>
-                                        <p:attrNameLst>
-                                          <p:attrName>style.visibility</p:attrName>
-                                        </p:attrNameLst>
-                                      </p:cBhvr>
-                                      <p:to>
-                                        <p:strVal val="visible"/>
-                                      </p:to>
-                                    </p:set>
-                                    <p:animEffect transition="in" filter="fade">
-                                      <p:cBhvr>
-                                        <p:cTn id="10" dur="500"/>
-                                        <p:tgtEl>
-                                          <p:spTgt spid="46"/>
-                                        </p:tgtEl>
-                                      </p:cBhvr>
-                                    </p:animEffect>
-                                  </p:childTnLst>
-                                </p:cTn>
-                              </p:par>
-                            </p:childTnLst>
-                          </p:cTn>
-                        </p:par>
-                      </p:childTnLst>
-                    </p:cTn>
-                  </p:par>
-                </p:childTnLst>
-              </p:cTn>
-              <p:prevCondLst>
-                <p:cond evt="onPrev" delay="0">
-                  <p:tgtEl>
-                    <p:sldTgt/>
-                  </p:tgtEl>
-                </p:cond>
-              </p:prevCondLst>
-              <p:nextCondLst>
-                <p:cond evt="onNext" delay="0">
-                  <p:tgtEl>
-                    <p:sldTgt/>
-                  </p:tgtEl>
-                </p:cond>
-              </p:nextCondLst>
-            </p:seq>
-          </p:childTnLst>
-        </p:cTn>
-      </p:par>
-    </p:tnLst>
-  </p:timing>
 </p:sld>
 </file>
 
@@ -10900,19 +9972,25 @@
             <p:ph type="title"/>
           </p:nvPr>
         </p:nvSpPr>
-        <p:spPr/>
-        <p:txBody>
-          <a:bodyPr/>
+        <p:spPr>
+          <a:xfrm>
+            <a:off x="534300" y="224048"/>
+            <a:ext cx="8046720" cy="685800"/>
+          </a:xfrm>
+        </p:spPr>
+        <p:txBody>
+          <a:bodyPr wrap="square"/>
           <a:lstStyle/>
           <a:p>
-            <a:r>
-              <a:rPr sz="2600" b="1" i="0">
+            <a:pPr algn="l"/>
+            <a:r>
+              <a:rPr sz="2800" b="1" i="0">
                 <a:solidFill>
                   <a:srgbClr val="202020"/>
                 </a:solidFill>
                 <a:latin typeface="Arial"/>
               </a:rPr>
-              <a:t>Line of Defense 2: Remove the Bug Class</a:t>
+              <a:t>Hijacking via Function Pointers</a:t>
             </a:r>
           </a:p>
         </p:txBody>
@@ -10927,19 +10005,46 @@
             <p:ph type="body" idx="1"/>
           </p:nvPr>
         </p:nvSpPr>
-        <p:spPr/>
-        <p:txBody>
-          <a:bodyPr/>
+        <p:spPr>
+          <a:xfrm>
+            <a:off x="420000" y="1298448"/>
+            <a:ext cx="8046720" cy="3383280"/>
+          </a:xfrm>
+        </p:spPr>
+        <p:txBody>
+          <a:bodyPr wrap="square" lIns="0" tIns="0" rIns="0" bIns="0"/>
           <a:lstStyle/>
           <a:p>
             <a:r>
-              <a:rPr sz="1800" b="1" i="0">
-                <a:solidFill>
-                  <a:srgbClr val="E47932"/>
-                </a:solidFill>
-                <a:latin typeface="Arial"/>
-              </a:rPr>
-              <a:t>If the vulnerability cannot exist, there is nothing to exploit</a:t>
+              <a:rPr sz="2000" b="0" i="0">
+                <a:solidFill>
+                  <a:srgbClr val="202020"/>
+                </a:solidFill>
+                <a:latin typeface="Arial"/>
+              </a:rPr>
+              <a:t>An indirect call jumps wherever a function pointer says</a:t>
+            </a:r>
+          </a:p>
+          <a:p>
+            <a:r>
+              <a:rPr sz="2000" b="0" i="0">
+                <a:solidFill>
+                  <a:srgbClr val="202020"/>
+                </a:solidFill>
+                <a:latin typeface="Arial"/>
+              </a:rPr>
+              <a:t>Overwrite the pointer and the attacker chooses the code - a gadget, say</a:t>
+            </a:r>
+          </a:p>
+          <a:p>
+            <a:r>
+              <a:rPr sz="2000" b="0" i="0">
+                <a:solidFill>
+                  <a:srgbClr val="202020"/>
+                </a:solidFill>
+                <a:latin typeface="Arial"/>
+              </a:rPr>
+              <a:t>Shadow stacks do not help here: this is a forward edge, not a return</a:t>
             </a:r>
           </a:p>
         </p:txBody>
@@ -10992,6 +10097,182 @@
               <a:t>9</a:t>
             </a:fld>
             <a:endParaRPr/>
+          </a:p>
+        </p:txBody>
+      </p:sp>
+      <p:sp>
+        <p:nvSpPr>
+          <p:cNvPr id="42" name="Rounded Rectangle 41"/>
+          <p:cNvSpPr/>
+          <p:nvPr/>
+        </p:nvSpPr>
+        <p:spPr>
+          <a:xfrm>
+            <a:off x="248640" y="3550000"/>
+            <a:ext cx="5400000" cy="1050000"/>
+          </a:xfrm>
+          <a:prstGeom prst="roundRect">
+            <a:avLst>
+              <a:gd name="adj" fmla="val 5000"/>
+            </a:avLst>
+          </a:prstGeom>
+          <a:solidFill>
+            <a:srgbClr val="1E2430"/>
+          </a:solidFill>
+          <a:ln>
+            <a:noFill/>
+          </a:ln>
+          <a:effectLst/>
+        </p:spPr>
+        <p:style>
+          <a:lnRef idx="1">
+            <a:schemeClr val="accent1"/>
+          </a:lnRef>
+          <a:fillRef idx="3">
+            <a:schemeClr val="accent1"/>
+          </a:fillRef>
+          <a:effectRef idx="2">
+            <a:schemeClr val="accent1"/>
+          </a:effectRef>
+          <a:fontRef idx="minor">
+            <a:schemeClr val="lt1"/>
+          </a:fontRef>
+        </p:style>
+        <p:txBody>
+          <a:bodyPr wrap="none" lIns="109728" tIns="68580" rIns="54864" bIns="68580" rtlCol="0" anchor="t"/>
+          <a:lstStyle/>
+          <a:p>
+            <a:pPr>
+              <a:lnSpc>
+                <a:spcPct val="100000"/>
+              </a:lnSpc>
+              <a:spcBef>
+                <a:spcPts val="0"/>
+              </a:spcBef>
+              <a:spcAft>
+                <a:spcPts val="0"/>
+              </a:spcAft>
+            </a:pPr>
+            <a:r>
+              <a:rPr sz="1050" b="0" i="0" dirty="0">
+                <a:solidFill>
+                  <a:srgbClr val="4EC9B0"/>
+                </a:solidFill>
+                <a:latin typeface="Courier New"/>
+              </a:rPr>
+              <a:t>int</a:t>
+            </a:r>
+            <a:r>
+              <a:rPr sz="1050" b="0" i="0" dirty="0">
+                <a:solidFill>
+                  <a:srgbClr val="D4D4D4"/>
+                </a:solidFill>
+                <a:latin typeface="Courier New"/>
+              </a:rPr>
+              <a:t> (*f)() = &amp;function;</a:t>
+            </a:r>
+          </a:p>
+          <a:p>
+            <a:pPr>
+              <a:lnSpc>
+                <a:spcPct val="100000"/>
+              </a:lnSpc>
+              <a:spcBef>
+                <a:spcPts val="0"/>
+              </a:spcBef>
+              <a:spcAft>
+                <a:spcPts val="0"/>
+              </a:spcAft>
+            </a:pPr>
+            <a:r>
+              <a:rPr sz="1050" b="0" i="0" dirty="0">
+                <a:solidFill>
+                  <a:srgbClr val="4EC9B0"/>
+                </a:solidFill>
+                <a:latin typeface="Courier New"/>
+              </a:rPr>
+              <a:t>int</a:t>
+            </a:r>
+            <a:r>
+              <a:rPr sz="1050" b="0" i="0" dirty="0">
+                <a:solidFill>
+                  <a:srgbClr val="D4D4D4"/>
+                </a:solidFill>
+                <a:latin typeface="Courier New"/>
+              </a:rPr>
+              <a:t> </a:t>
+            </a:r>
+            <a:r>
+              <a:rPr sz="1050" b="0" i="0" dirty="0" err="1">
+                <a:solidFill>
+                  <a:srgbClr val="D4D4D4"/>
+                </a:solidFill>
+                <a:latin typeface="Courier New"/>
+              </a:rPr>
+              <a:t>val</a:t>
+            </a:r>
+            <a:r>
+              <a:rPr sz="1050" b="0" i="0" dirty="0">
+                <a:solidFill>
+                  <a:srgbClr val="D4D4D4"/>
+                </a:solidFill>
+                <a:latin typeface="Courier New"/>
+              </a:rPr>
+              <a:t> = f();           </a:t>
+            </a:r>
+            <a:r>
+              <a:rPr sz="1050" b="0" i="0" dirty="0">
+                <a:solidFill>
+                  <a:srgbClr val="6A9955"/>
+                </a:solidFill>
+                <a:latin typeface="Courier New"/>
+              </a:rPr>
+              <a:t>// indirect call through f</a:t>
+            </a:r>
+          </a:p>
+          <a:p>
+            <a:pPr>
+              <a:lnSpc>
+                <a:spcPct val="100000"/>
+              </a:lnSpc>
+              <a:spcBef>
+                <a:spcPts val="0"/>
+              </a:spcBef>
+              <a:spcAft>
+                <a:spcPts val="0"/>
+              </a:spcAft>
+            </a:pPr>
+            <a:r>
+              <a:rPr sz="1050" b="0" i="0" dirty="0">
+                <a:solidFill>
+                  <a:srgbClr val="6A9955"/>
+                </a:solidFill>
+                <a:latin typeface="Courier New"/>
+              </a:rPr>
+              <a:t>// if the attacker can modify f,</a:t>
+            </a:r>
+          </a:p>
+          <a:p>
+            <a:pPr>
+              <a:lnSpc>
+                <a:spcPct val="100000"/>
+              </a:lnSpc>
+              <a:spcBef>
+                <a:spcPts val="0"/>
+              </a:spcBef>
+              <a:spcAft>
+                <a:spcPts val="0"/>
+              </a:spcAft>
+            </a:pPr>
+            <a:r>
+              <a:rPr sz="1050" b="0" i="0" dirty="0">
+                <a:solidFill>
+                  <a:srgbClr val="6A9955"/>
+                </a:solidFill>
+                <a:latin typeface="Courier New"/>
+              </a:rPr>
+              <a:t>// they choose which code runs</a:t>
+            </a:r>
           </a:p>
         </p:txBody>
       </p:sp>
